--- a/中越詩歌/如鹿切慕在溪水_Khát khao dòng nước.pptx
+++ b/中越詩歌/如鹿切慕在溪水_Khát khao dòng nước.pptx
@@ -5,10 +5,15 @@
     <p:sldMasterId id="2147483661" r:id="rId1"/>
   </p:sldMasterIdLst>
   <p:sldIdLst>
-    <p:sldId id="256" r:id="rId2"/>
-    <p:sldId id="257" r:id="rId3"/>
-    <p:sldId id="258" r:id="rId4"/>
-    <p:sldId id="259" r:id="rId5"/>
+    <p:sldId id="260" r:id="rId2"/>
+    <p:sldId id="261" r:id="rId3"/>
+    <p:sldId id="262" r:id="rId4"/>
+    <p:sldId id="263" r:id="rId5"/>
+    <p:sldId id="264" r:id="rId6"/>
+    <p:sldId id="265" r:id="rId7"/>
+    <p:sldId id="266" r:id="rId8"/>
+    <p:sldId id="267" r:id="rId9"/>
+    <p:sldId id="268" r:id="rId10"/>
   </p:sldIdLst>
   <p:sldSz cx="10080625" cy="5670550"/>
   <p:notesSz cx="7559675" cy="10691813"/>
@@ -164,7 +169,7 @@
           <a:lstStyle/>
           <a:p>
             <a:r>
-              <a:rPr lang="en-US" altLang="zh-TW" smtClean="0"/>
+              <a:rPr lang="en-US" altLang="zh-TW"/>
               <a:t>Click to edit Master title style</a:t>
             </a:r>
             <a:endParaRPr lang="zh-TW" altLang="en-US"/>
@@ -283,7 +288,7 @@
           </a:lstStyle>
           <a:p>
             <a:r>
-              <a:rPr lang="en-US" altLang="zh-TW" smtClean="0"/>
+              <a:rPr lang="en-US" altLang="zh-TW"/>
               <a:t>Click to edit Master subtitle style</a:t>
             </a:r>
             <a:endParaRPr lang="zh-TW" altLang="en-US"/>
@@ -306,14 +311,11 @@
           <a:lstStyle/>
           <a:p>
             <a:r>
-              <a:rPr lang="en-US" sz="1400" b="0" strike="noStrike" spc="-1" smtClean="0">
+              <a:rPr lang="en-US" sz="1400" b="0" strike="noStrike" spc="-1">
                 <a:latin typeface="Times New Roman"/>
               </a:rPr>
               <a:t>&lt;date/time&gt;</a:t>
             </a:r>
-            <a:endParaRPr lang="en-US" sz="1400" b="0" strike="noStrike" spc="-1">
-              <a:latin typeface="Times New Roman"/>
-            </a:endParaRPr>
           </a:p>
         </p:txBody>
       </p:sp>
@@ -334,14 +336,11 @@
           <a:p>
             <a:pPr algn="ctr"/>
             <a:r>
-              <a:rPr lang="en-US" sz="1400" b="0" strike="noStrike" spc="-1" smtClean="0">
+              <a:rPr lang="en-US" sz="1400" b="0" strike="noStrike" spc="-1">
                 <a:latin typeface="Times New Roman"/>
               </a:rPr>
               <a:t>&lt;footer&gt;</a:t>
             </a:r>
-            <a:endParaRPr lang="en-US" sz="1400" b="0" strike="noStrike" spc="-1">
-              <a:latin typeface="Times New Roman"/>
-            </a:endParaRPr>
           </a:p>
         </p:txBody>
       </p:sp>
@@ -414,7 +413,7 @@
           <a:lstStyle/>
           <a:p>
             <a:r>
-              <a:rPr lang="en-US" altLang="zh-TW" smtClean="0"/>
+              <a:rPr lang="en-US" altLang="zh-TW"/>
               <a:t>Click to edit Master title style</a:t>
             </a:r>
             <a:endParaRPr lang="zh-TW" altLang="en-US"/>
@@ -438,35 +437,35 @@
           <a:p>
             <a:pPr lvl="0"/>
             <a:r>
-              <a:rPr lang="en-US" altLang="zh-TW" smtClean="0"/>
+              <a:rPr lang="en-US" altLang="zh-TW"/>
               <a:t>Click to edit Master text styles</a:t>
             </a:r>
           </a:p>
           <a:p>
             <a:pPr lvl="1"/>
             <a:r>
-              <a:rPr lang="en-US" altLang="zh-TW" smtClean="0"/>
+              <a:rPr lang="en-US" altLang="zh-TW"/>
               <a:t>Second level</a:t>
             </a:r>
           </a:p>
           <a:p>
             <a:pPr lvl="2"/>
             <a:r>
-              <a:rPr lang="en-US" altLang="zh-TW" smtClean="0"/>
+              <a:rPr lang="en-US" altLang="zh-TW"/>
               <a:t>Third level</a:t>
             </a:r>
           </a:p>
           <a:p>
             <a:pPr lvl="3"/>
             <a:r>
-              <a:rPr lang="en-US" altLang="zh-TW" smtClean="0"/>
+              <a:rPr lang="en-US" altLang="zh-TW"/>
               <a:t>Fourth level</a:t>
             </a:r>
           </a:p>
           <a:p>
             <a:pPr lvl="4"/>
             <a:r>
-              <a:rPr lang="en-US" altLang="zh-TW" smtClean="0"/>
+              <a:rPr lang="en-US" altLang="zh-TW"/>
               <a:t>Fifth level</a:t>
             </a:r>
             <a:endParaRPr lang="zh-TW" altLang="en-US"/>
@@ -489,14 +488,11 @@
           <a:lstStyle/>
           <a:p>
             <a:r>
-              <a:rPr lang="en-US" sz="1400" b="0" strike="noStrike" spc="-1" smtClean="0">
+              <a:rPr lang="en-US" sz="1400" b="0" strike="noStrike" spc="-1">
                 <a:latin typeface="Times New Roman"/>
               </a:rPr>
               <a:t>&lt;date/time&gt;</a:t>
             </a:r>
-            <a:endParaRPr lang="en-US" sz="1400" b="0" strike="noStrike" spc="-1">
-              <a:latin typeface="Times New Roman"/>
-            </a:endParaRPr>
           </a:p>
         </p:txBody>
       </p:sp>
@@ -517,14 +513,11 @@
           <a:p>
             <a:pPr algn="ctr"/>
             <a:r>
-              <a:rPr lang="en-US" sz="1400" b="0" strike="noStrike" spc="-1" smtClean="0">
+              <a:rPr lang="en-US" sz="1400" b="0" strike="noStrike" spc="-1">
                 <a:latin typeface="Times New Roman"/>
               </a:rPr>
               <a:t>&lt;footer&gt;</a:t>
             </a:r>
-            <a:endParaRPr lang="en-US" sz="1400" b="0" strike="noStrike" spc="-1">
-              <a:latin typeface="Times New Roman"/>
-            </a:endParaRPr>
           </a:p>
         </p:txBody>
       </p:sp>
@@ -602,7 +595,7 @@
           <a:lstStyle/>
           <a:p>
             <a:r>
-              <a:rPr lang="en-US" altLang="zh-TW" smtClean="0"/>
+              <a:rPr lang="en-US" altLang="zh-TW"/>
               <a:t>Click to edit Master title style</a:t>
             </a:r>
             <a:endParaRPr lang="zh-TW" altLang="en-US"/>
@@ -631,35 +624,35 @@
           <a:p>
             <a:pPr lvl="0"/>
             <a:r>
-              <a:rPr lang="en-US" altLang="zh-TW" smtClean="0"/>
+              <a:rPr lang="en-US" altLang="zh-TW"/>
               <a:t>Click to edit Master text styles</a:t>
             </a:r>
           </a:p>
           <a:p>
             <a:pPr lvl="1"/>
             <a:r>
-              <a:rPr lang="en-US" altLang="zh-TW" smtClean="0"/>
+              <a:rPr lang="en-US" altLang="zh-TW"/>
               <a:t>Second level</a:t>
             </a:r>
           </a:p>
           <a:p>
             <a:pPr lvl="2"/>
             <a:r>
-              <a:rPr lang="en-US" altLang="zh-TW" smtClean="0"/>
+              <a:rPr lang="en-US" altLang="zh-TW"/>
               <a:t>Third level</a:t>
             </a:r>
           </a:p>
           <a:p>
             <a:pPr lvl="3"/>
             <a:r>
-              <a:rPr lang="en-US" altLang="zh-TW" smtClean="0"/>
+              <a:rPr lang="en-US" altLang="zh-TW"/>
               <a:t>Fourth level</a:t>
             </a:r>
           </a:p>
           <a:p>
             <a:pPr lvl="4"/>
             <a:r>
-              <a:rPr lang="en-US" altLang="zh-TW" smtClean="0"/>
+              <a:rPr lang="en-US" altLang="zh-TW"/>
               <a:t>Fifth level</a:t>
             </a:r>
             <a:endParaRPr lang="zh-TW" altLang="en-US"/>
@@ -682,14 +675,11 @@
           <a:lstStyle/>
           <a:p>
             <a:r>
-              <a:rPr lang="en-US" sz="1400" b="0" strike="noStrike" spc="-1" smtClean="0">
+              <a:rPr lang="en-US" sz="1400" b="0" strike="noStrike" spc="-1">
                 <a:latin typeface="Times New Roman"/>
               </a:rPr>
               <a:t>&lt;date/time&gt;</a:t>
             </a:r>
-            <a:endParaRPr lang="en-US" sz="1400" b="0" strike="noStrike" spc="-1">
-              <a:latin typeface="Times New Roman"/>
-            </a:endParaRPr>
           </a:p>
         </p:txBody>
       </p:sp>
@@ -710,14 +700,11 @@
           <a:p>
             <a:pPr algn="ctr"/>
             <a:r>
-              <a:rPr lang="en-US" sz="1400" b="0" strike="noStrike" spc="-1" smtClean="0">
+              <a:rPr lang="en-US" sz="1400" b="0" strike="noStrike" spc="-1">
                 <a:latin typeface="Times New Roman"/>
               </a:rPr>
               <a:t>&lt;footer&gt;</a:t>
             </a:r>
-            <a:endParaRPr lang="en-US" sz="1400" b="0" strike="noStrike" spc="-1">
-              <a:latin typeface="Times New Roman"/>
-            </a:endParaRPr>
           </a:p>
         </p:txBody>
       </p:sp>
@@ -745,91 +732,6 @@
             </a:fld>
             <a:endParaRPr lang="en-US" sz="1400" b="0" strike="noStrike" spc="-1">
               <a:latin typeface="Times New Roman"/>
-            </a:endParaRPr>
-          </a:p>
-        </p:txBody>
-      </p:sp>
-    </p:spTree>
-  </p:cSld>
-  <p:clrMapOvr>
-    <a:masterClrMapping/>
-  </p:clrMapOvr>
-</p:sldLayout>
-</file>
-
-<file path=ppt/slideLayouts/slideLayout12.xml><?xml version="1.0" encoding="utf-8"?>
-<p:sldLayout xmlns:a="http://schemas.openxmlformats.org/drawingml/2006/main" xmlns:r="http://schemas.openxmlformats.org/officeDocument/2006/relationships" xmlns:p="http://schemas.openxmlformats.org/presentationml/2006/main" type="tx">
-  <p:cSld name="Title Slide">
-    <p:spTree>
-      <p:nvGrpSpPr>
-        <p:cNvPr id="1" name=""/>
-        <p:cNvGrpSpPr/>
-        <p:nvPr/>
-      </p:nvGrpSpPr>
-      <p:grpSpPr>
-        <a:xfrm>
-          <a:off x="0" y="0"/>
-          <a:ext cx="0" cy="0"/>
-          <a:chOff x="0" y="0"/>
-          <a:chExt cx="0" cy="0"/>
-        </a:xfrm>
-      </p:grpSpPr>
-      <p:sp>
-        <p:nvSpPr>
-          <p:cNvPr id="5" name="PlaceHolder 1"/>
-          <p:cNvSpPr>
-            <a:spLocks noGrp="1"/>
-          </p:cNvSpPr>
-          <p:nvPr>
-            <p:ph type="title"/>
-          </p:nvPr>
-        </p:nvSpPr>
-        <p:spPr>
-          <a:xfrm>
-            <a:off x="504000" y="226080"/>
-            <a:ext cx="9071640" cy="946440"/>
-          </a:xfrm>
-          <a:prstGeom prst="rect">
-            <a:avLst/>
-          </a:prstGeom>
-        </p:spPr>
-        <p:txBody>
-          <a:bodyPr lIns="0" tIns="0" rIns="0" bIns="0" anchor="ctr"/>
-          <a:lstStyle/>
-          <a:p>
-            <a:pPr algn="ctr"/>
-            <a:endParaRPr lang="en-US" sz="4400" b="0" strike="noStrike" spc="-1">
-              <a:latin typeface="Arial"/>
-            </a:endParaRPr>
-          </a:p>
-        </p:txBody>
-      </p:sp>
-      <p:sp>
-        <p:nvSpPr>
-          <p:cNvPr id="6" name="PlaceHolder 2"/>
-          <p:cNvSpPr>
-            <a:spLocks noGrp="1"/>
-          </p:cNvSpPr>
-          <p:nvPr>
-            <p:ph type="subTitle"/>
-          </p:nvPr>
-        </p:nvSpPr>
-        <p:spPr>
-          <a:xfrm>
-            <a:off x="504000" y="1326600"/>
-            <a:ext cx="9071640" cy="3288240"/>
-          </a:xfrm>
-          <a:prstGeom prst="rect">
-            <a:avLst/>
-          </a:prstGeom>
-        </p:spPr>
-        <p:txBody>
-          <a:bodyPr lIns="0" tIns="0" rIns="0" bIns="0" anchor="ctr"/>
-          <a:lstStyle/>
-          <a:p>
-            <a:pPr algn="ctr"/>
-            <a:endParaRPr lang="en-US" sz="3200" b="0" strike="noStrike" spc="-1">
-              <a:latin typeface="Arial"/>
             </a:endParaRPr>
           </a:p>
         </p:txBody>
@@ -875,7 +777,7 @@
           <a:lstStyle/>
           <a:p>
             <a:r>
-              <a:rPr lang="en-US" altLang="zh-TW" smtClean="0"/>
+              <a:rPr lang="en-US" altLang="zh-TW"/>
               <a:t>Click to edit Master title style</a:t>
             </a:r>
             <a:endParaRPr lang="zh-TW" altLang="en-US"/>
@@ -899,35 +801,35 @@
           <a:p>
             <a:pPr lvl="0"/>
             <a:r>
-              <a:rPr lang="en-US" altLang="zh-TW" smtClean="0"/>
+              <a:rPr lang="en-US" altLang="zh-TW"/>
               <a:t>Click to edit Master text styles</a:t>
             </a:r>
           </a:p>
           <a:p>
             <a:pPr lvl="1"/>
             <a:r>
-              <a:rPr lang="en-US" altLang="zh-TW" smtClean="0"/>
+              <a:rPr lang="en-US" altLang="zh-TW"/>
               <a:t>Second level</a:t>
             </a:r>
           </a:p>
           <a:p>
             <a:pPr lvl="2"/>
             <a:r>
-              <a:rPr lang="en-US" altLang="zh-TW" smtClean="0"/>
+              <a:rPr lang="en-US" altLang="zh-TW"/>
               <a:t>Third level</a:t>
             </a:r>
           </a:p>
           <a:p>
             <a:pPr lvl="3"/>
             <a:r>
-              <a:rPr lang="en-US" altLang="zh-TW" smtClean="0"/>
+              <a:rPr lang="en-US" altLang="zh-TW"/>
               <a:t>Fourth level</a:t>
             </a:r>
           </a:p>
           <a:p>
             <a:pPr lvl="4"/>
             <a:r>
-              <a:rPr lang="en-US" altLang="zh-TW" smtClean="0"/>
+              <a:rPr lang="en-US" altLang="zh-TW"/>
               <a:t>Fifth level</a:t>
             </a:r>
             <a:endParaRPr lang="zh-TW" altLang="en-US"/>
@@ -950,14 +852,11 @@
           <a:lstStyle/>
           <a:p>
             <a:r>
-              <a:rPr lang="en-US" sz="1400" b="0" strike="noStrike" spc="-1" smtClean="0">
+              <a:rPr lang="en-US" sz="1400" b="0" strike="noStrike" spc="-1">
                 <a:latin typeface="Times New Roman"/>
               </a:rPr>
               <a:t>&lt;date/time&gt;</a:t>
             </a:r>
-            <a:endParaRPr lang="en-US" sz="1400" b="0" strike="noStrike" spc="-1">
-              <a:latin typeface="Times New Roman"/>
-            </a:endParaRPr>
           </a:p>
         </p:txBody>
       </p:sp>
@@ -978,14 +877,11 @@
           <a:p>
             <a:pPr algn="ctr"/>
             <a:r>
-              <a:rPr lang="en-US" sz="1400" b="0" strike="noStrike" spc="-1" smtClean="0">
+              <a:rPr lang="en-US" sz="1400" b="0" strike="noStrike" spc="-1">
                 <a:latin typeface="Times New Roman"/>
               </a:rPr>
               <a:t>&lt;footer&gt;</a:t>
             </a:r>
-            <a:endParaRPr lang="en-US" sz="1400" b="0" strike="noStrike" spc="-1">
-              <a:latin typeface="Times New Roman"/>
-            </a:endParaRPr>
           </a:p>
         </p:txBody>
       </p:sp>
@@ -1067,7 +963,7 @@
           </a:lstStyle>
           <a:p>
             <a:r>
-              <a:rPr lang="en-US" altLang="zh-TW" smtClean="0"/>
+              <a:rPr lang="en-US" altLang="zh-TW"/>
               <a:t>Click to edit Master title style</a:t>
             </a:r>
             <a:endParaRPr lang="zh-TW" altLang="en-US"/>
@@ -1187,7 +1083,7 @@
           <a:p>
             <a:pPr lvl="0"/>
             <a:r>
-              <a:rPr lang="en-US" altLang="zh-TW" smtClean="0"/>
+              <a:rPr lang="en-US" altLang="zh-TW"/>
               <a:t>Click to edit Master text styles</a:t>
             </a:r>
           </a:p>
@@ -1209,14 +1105,11 @@
           <a:lstStyle/>
           <a:p>
             <a:r>
-              <a:rPr lang="en-US" sz="1400" b="0" strike="noStrike" spc="-1" smtClean="0">
+              <a:rPr lang="en-US" sz="1400" b="0" strike="noStrike" spc="-1">
                 <a:latin typeface="Times New Roman"/>
               </a:rPr>
               <a:t>&lt;date/time&gt;</a:t>
             </a:r>
-            <a:endParaRPr lang="en-US" sz="1400" b="0" strike="noStrike" spc="-1">
-              <a:latin typeface="Times New Roman"/>
-            </a:endParaRPr>
           </a:p>
         </p:txBody>
       </p:sp>
@@ -1237,14 +1130,11 @@
           <a:p>
             <a:pPr algn="ctr"/>
             <a:r>
-              <a:rPr lang="en-US" sz="1400" b="0" strike="noStrike" spc="-1" smtClean="0">
+              <a:rPr lang="en-US" sz="1400" b="0" strike="noStrike" spc="-1">
                 <a:latin typeface="Times New Roman"/>
               </a:rPr>
               <a:t>&lt;footer&gt;</a:t>
             </a:r>
-            <a:endParaRPr lang="en-US" sz="1400" b="0" strike="noStrike" spc="-1">
-              <a:latin typeface="Times New Roman"/>
-            </a:endParaRPr>
           </a:p>
         </p:txBody>
       </p:sp>
@@ -1317,7 +1207,7 @@
           <a:lstStyle/>
           <a:p>
             <a:r>
-              <a:rPr lang="en-US" altLang="zh-TW" smtClean="0"/>
+              <a:rPr lang="en-US" altLang="zh-TW"/>
               <a:t>Click to edit Master title style</a:t>
             </a:r>
             <a:endParaRPr lang="zh-TW" altLang="en-US"/>
@@ -1374,35 +1264,35 @@
           <a:p>
             <a:pPr lvl="0"/>
             <a:r>
-              <a:rPr lang="en-US" altLang="zh-TW" smtClean="0"/>
+              <a:rPr lang="en-US" altLang="zh-TW"/>
               <a:t>Click to edit Master text styles</a:t>
             </a:r>
           </a:p>
           <a:p>
             <a:pPr lvl="1"/>
             <a:r>
-              <a:rPr lang="en-US" altLang="zh-TW" smtClean="0"/>
+              <a:rPr lang="en-US" altLang="zh-TW"/>
               <a:t>Second level</a:t>
             </a:r>
           </a:p>
           <a:p>
             <a:pPr lvl="2"/>
             <a:r>
-              <a:rPr lang="en-US" altLang="zh-TW" smtClean="0"/>
+              <a:rPr lang="en-US" altLang="zh-TW"/>
               <a:t>Third level</a:t>
             </a:r>
           </a:p>
           <a:p>
             <a:pPr lvl="3"/>
             <a:r>
-              <a:rPr lang="en-US" altLang="zh-TW" smtClean="0"/>
+              <a:rPr lang="en-US" altLang="zh-TW"/>
               <a:t>Fourth level</a:t>
             </a:r>
           </a:p>
           <a:p>
             <a:pPr lvl="4"/>
             <a:r>
-              <a:rPr lang="en-US" altLang="zh-TW" smtClean="0"/>
+              <a:rPr lang="en-US" altLang="zh-TW"/>
               <a:t>Fifth level</a:t>
             </a:r>
             <a:endParaRPr lang="zh-TW" altLang="en-US"/>
@@ -1459,35 +1349,35 @@
           <a:p>
             <a:pPr lvl="0"/>
             <a:r>
-              <a:rPr lang="en-US" altLang="zh-TW" smtClean="0"/>
+              <a:rPr lang="en-US" altLang="zh-TW"/>
               <a:t>Click to edit Master text styles</a:t>
             </a:r>
           </a:p>
           <a:p>
             <a:pPr lvl="1"/>
             <a:r>
-              <a:rPr lang="en-US" altLang="zh-TW" smtClean="0"/>
+              <a:rPr lang="en-US" altLang="zh-TW"/>
               <a:t>Second level</a:t>
             </a:r>
           </a:p>
           <a:p>
             <a:pPr lvl="2"/>
             <a:r>
-              <a:rPr lang="en-US" altLang="zh-TW" smtClean="0"/>
+              <a:rPr lang="en-US" altLang="zh-TW"/>
               <a:t>Third level</a:t>
             </a:r>
           </a:p>
           <a:p>
             <a:pPr lvl="3"/>
             <a:r>
-              <a:rPr lang="en-US" altLang="zh-TW" smtClean="0"/>
+              <a:rPr lang="en-US" altLang="zh-TW"/>
               <a:t>Fourth level</a:t>
             </a:r>
           </a:p>
           <a:p>
             <a:pPr lvl="4"/>
             <a:r>
-              <a:rPr lang="en-US" altLang="zh-TW" smtClean="0"/>
+              <a:rPr lang="en-US" altLang="zh-TW"/>
               <a:t>Fifth level</a:t>
             </a:r>
             <a:endParaRPr lang="zh-TW" altLang="en-US"/>
@@ -1510,14 +1400,11 @@
           <a:lstStyle/>
           <a:p>
             <a:r>
-              <a:rPr lang="en-US" sz="1400" b="0" strike="noStrike" spc="-1" smtClean="0">
+              <a:rPr lang="en-US" sz="1400" b="0" strike="noStrike" spc="-1">
                 <a:latin typeface="Times New Roman"/>
               </a:rPr>
               <a:t>&lt;date/time&gt;</a:t>
             </a:r>
-            <a:endParaRPr lang="en-US" sz="1400" b="0" strike="noStrike" spc="-1">
-              <a:latin typeface="Times New Roman"/>
-            </a:endParaRPr>
           </a:p>
         </p:txBody>
       </p:sp>
@@ -1538,14 +1425,11 @@
           <a:p>
             <a:pPr algn="ctr"/>
             <a:r>
-              <a:rPr lang="en-US" sz="1400" b="0" strike="noStrike" spc="-1" smtClean="0">
+              <a:rPr lang="en-US" sz="1400" b="0" strike="noStrike" spc="-1">
                 <a:latin typeface="Times New Roman"/>
               </a:rPr>
               <a:t>&lt;footer&gt;</a:t>
             </a:r>
-            <a:endParaRPr lang="en-US" sz="1400" b="0" strike="noStrike" spc="-1">
-              <a:latin typeface="Times New Roman"/>
-            </a:endParaRPr>
           </a:p>
         </p:txBody>
       </p:sp>
@@ -1622,7 +1506,7 @@
           </a:lstStyle>
           <a:p>
             <a:r>
-              <a:rPr lang="en-US" altLang="zh-TW" smtClean="0"/>
+              <a:rPr lang="en-US" altLang="zh-TW"/>
               <a:t>Click to edit Master title style</a:t>
             </a:r>
             <a:endParaRPr lang="zh-TW" altLang="en-US"/>
@@ -1688,7 +1572,7 @@
           <a:p>
             <a:pPr lvl="0"/>
             <a:r>
-              <a:rPr lang="en-US" altLang="zh-TW" smtClean="0"/>
+              <a:rPr lang="en-US" altLang="zh-TW"/>
               <a:t>Click to edit Master text styles</a:t>
             </a:r>
           </a:p>
@@ -1744,35 +1628,35 @@
           <a:p>
             <a:pPr lvl="0"/>
             <a:r>
-              <a:rPr lang="en-US" altLang="zh-TW" smtClean="0"/>
+              <a:rPr lang="en-US" altLang="zh-TW"/>
               <a:t>Click to edit Master text styles</a:t>
             </a:r>
           </a:p>
           <a:p>
             <a:pPr lvl="1"/>
             <a:r>
-              <a:rPr lang="en-US" altLang="zh-TW" smtClean="0"/>
+              <a:rPr lang="en-US" altLang="zh-TW"/>
               <a:t>Second level</a:t>
             </a:r>
           </a:p>
           <a:p>
             <a:pPr lvl="2"/>
             <a:r>
-              <a:rPr lang="en-US" altLang="zh-TW" smtClean="0"/>
+              <a:rPr lang="en-US" altLang="zh-TW"/>
               <a:t>Third level</a:t>
             </a:r>
           </a:p>
           <a:p>
             <a:pPr lvl="3"/>
             <a:r>
-              <a:rPr lang="en-US" altLang="zh-TW" smtClean="0"/>
+              <a:rPr lang="en-US" altLang="zh-TW"/>
               <a:t>Fourth level</a:t>
             </a:r>
           </a:p>
           <a:p>
             <a:pPr lvl="4"/>
             <a:r>
-              <a:rPr lang="en-US" altLang="zh-TW" smtClean="0"/>
+              <a:rPr lang="en-US" altLang="zh-TW"/>
               <a:t>Fifth level</a:t>
             </a:r>
             <a:endParaRPr lang="zh-TW" altLang="en-US"/>
@@ -1838,7 +1722,7 @@
           <a:p>
             <a:pPr lvl="0"/>
             <a:r>
-              <a:rPr lang="en-US" altLang="zh-TW" smtClean="0"/>
+              <a:rPr lang="en-US" altLang="zh-TW"/>
               <a:t>Click to edit Master text styles</a:t>
             </a:r>
           </a:p>
@@ -1894,35 +1778,35 @@
           <a:p>
             <a:pPr lvl="0"/>
             <a:r>
-              <a:rPr lang="en-US" altLang="zh-TW" smtClean="0"/>
+              <a:rPr lang="en-US" altLang="zh-TW"/>
               <a:t>Click to edit Master text styles</a:t>
             </a:r>
           </a:p>
           <a:p>
             <a:pPr lvl="1"/>
             <a:r>
-              <a:rPr lang="en-US" altLang="zh-TW" smtClean="0"/>
+              <a:rPr lang="en-US" altLang="zh-TW"/>
               <a:t>Second level</a:t>
             </a:r>
           </a:p>
           <a:p>
             <a:pPr lvl="2"/>
             <a:r>
-              <a:rPr lang="en-US" altLang="zh-TW" smtClean="0"/>
+              <a:rPr lang="en-US" altLang="zh-TW"/>
               <a:t>Third level</a:t>
             </a:r>
           </a:p>
           <a:p>
             <a:pPr lvl="3"/>
             <a:r>
-              <a:rPr lang="en-US" altLang="zh-TW" smtClean="0"/>
+              <a:rPr lang="en-US" altLang="zh-TW"/>
               <a:t>Fourth level</a:t>
             </a:r>
           </a:p>
           <a:p>
             <a:pPr lvl="4"/>
             <a:r>
-              <a:rPr lang="en-US" altLang="zh-TW" smtClean="0"/>
+              <a:rPr lang="en-US" altLang="zh-TW"/>
               <a:t>Fifth level</a:t>
             </a:r>
             <a:endParaRPr lang="zh-TW" altLang="en-US"/>
@@ -1945,14 +1829,11 @@
           <a:lstStyle/>
           <a:p>
             <a:r>
-              <a:rPr lang="en-US" sz="1400" b="0" strike="noStrike" spc="-1" smtClean="0">
+              <a:rPr lang="en-US" sz="1400" b="0" strike="noStrike" spc="-1">
                 <a:latin typeface="Times New Roman"/>
               </a:rPr>
               <a:t>&lt;date/time&gt;</a:t>
             </a:r>
-            <a:endParaRPr lang="en-US" sz="1400" b="0" strike="noStrike" spc="-1">
-              <a:latin typeface="Times New Roman"/>
-            </a:endParaRPr>
           </a:p>
         </p:txBody>
       </p:sp>
@@ -1973,14 +1854,11 @@
           <a:p>
             <a:pPr algn="ctr"/>
             <a:r>
-              <a:rPr lang="en-US" sz="1400" b="0" strike="noStrike" spc="-1" smtClean="0">
+              <a:rPr lang="en-US" sz="1400" b="0" strike="noStrike" spc="-1">
                 <a:latin typeface="Times New Roman"/>
               </a:rPr>
               <a:t>&lt;footer&gt;</a:t>
             </a:r>
-            <a:endParaRPr lang="en-US" sz="1400" b="0" strike="noStrike" spc="-1">
-              <a:latin typeface="Times New Roman"/>
-            </a:endParaRPr>
           </a:p>
         </p:txBody>
       </p:sp>
@@ -2053,7 +1931,7 @@
           <a:lstStyle/>
           <a:p>
             <a:r>
-              <a:rPr lang="en-US" altLang="zh-TW" smtClean="0"/>
+              <a:rPr lang="en-US" altLang="zh-TW"/>
               <a:t>Click to edit Master title style</a:t>
             </a:r>
             <a:endParaRPr lang="zh-TW" altLang="en-US"/>
@@ -2076,14 +1954,11 @@
           <a:lstStyle/>
           <a:p>
             <a:r>
-              <a:rPr lang="en-US" sz="1400" b="0" strike="noStrike" spc="-1" smtClean="0">
+              <a:rPr lang="en-US" sz="1400" b="0" strike="noStrike" spc="-1">
                 <a:latin typeface="Times New Roman"/>
               </a:rPr>
               <a:t>&lt;date/time&gt;</a:t>
             </a:r>
-            <a:endParaRPr lang="en-US" sz="1400" b="0" strike="noStrike" spc="-1">
-              <a:latin typeface="Times New Roman"/>
-            </a:endParaRPr>
           </a:p>
         </p:txBody>
       </p:sp>
@@ -2104,14 +1979,11 @@
           <a:p>
             <a:pPr algn="ctr"/>
             <a:r>
-              <a:rPr lang="en-US" sz="1400" b="0" strike="noStrike" spc="-1" smtClean="0">
+              <a:rPr lang="en-US" sz="1400" b="0" strike="noStrike" spc="-1">
                 <a:latin typeface="Times New Roman"/>
               </a:rPr>
               <a:t>&lt;footer&gt;</a:t>
             </a:r>
-            <a:endParaRPr lang="en-US" sz="1400" b="0" strike="noStrike" spc="-1">
-              <a:latin typeface="Times New Roman"/>
-            </a:endParaRPr>
           </a:p>
         </p:txBody>
       </p:sp>
@@ -2184,14 +2056,11 @@
           <a:lstStyle/>
           <a:p>
             <a:r>
-              <a:rPr lang="en-US" sz="1400" b="0" strike="noStrike" spc="-1" smtClean="0">
+              <a:rPr lang="en-US" sz="1400" b="0" strike="noStrike" spc="-1">
                 <a:latin typeface="Times New Roman"/>
               </a:rPr>
               <a:t>&lt;date/time&gt;</a:t>
             </a:r>
-            <a:endParaRPr lang="en-US" sz="1400" b="0" strike="noStrike" spc="-1">
-              <a:latin typeface="Times New Roman"/>
-            </a:endParaRPr>
           </a:p>
         </p:txBody>
       </p:sp>
@@ -2212,14 +2081,11 @@
           <a:p>
             <a:pPr algn="ctr"/>
             <a:r>
-              <a:rPr lang="en-US" sz="1400" b="0" strike="noStrike" spc="-1" smtClean="0">
+              <a:rPr lang="en-US" sz="1400" b="0" strike="noStrike" spc="-1">
                 <a:latin typeface="Times New Roman"/>
               </a:rPr>
               <a:t>&lt;footer&gt;</a:t>
             </a:r>
-            <a:endParaRPr lang="en-US" sz="1400" b="0" strike="noStrike" spc="-1">
-              <a:latin typeface="Times New Roman"/>
-            </a:endParaRPr>
           </a:p>
         </p:txBody>
       </p:sp>
@@ -2301,7 +2167,7 @@
           </a:lstStyle>
           <a:p>
             <a:r>
-              <a:rPr lang="en-US" altLang="zh-TW" smtClean="0"/>
+              <a:rPr lang="en-US" altLang="zh-TW"/>
               <a:t>Click to edit Master title style</a:t>
             </a:r>
             <a:endParaRPr lang="zh-TW" altLang="en-US"/>
@@ -2358,35 +2224,35 @@
           <a:p>
             <a:pPr lvl="0"/>
             <a:r>
-              <a:rPr lang="en-US" altLang="zh-TW" smtClean="0"/>
+              <a:rPr lang="en-US" altLang="zh-TW"/>
               <a:t>Click to edit Master text styles</a:t>
             </a:r>
           </a:p>
           <a:p>
             <a:pPr lvl="1"/>
             <a:r>
-              <a:rPr lang="en-US" altLang="zh-TW" smtClean="0"/>
+              <a:rPr lang="en-US" altLang="zh-TW"/>
               <a:t>Second level</a:t>
             </a:r>
           </a:p>
           <a:p>
             <a:pPr lvl="2"/>
             <a:r>
-              <a:rPr lang="en-US" altLang="zh-TW" smtClean="0"/>
+              <a:rPr lang="en-US" altLang="zh-TW"/>
               <a:t>Third level</a:t>
             </a:r>
           </a:p>
           <a:p>
             <a:pPr lvl="3"/>
             <a:r>
-              <a:rPr lang="en-US" altLang="zh-TW" smtClean="0"/>
+              <a:rPr lang="en-US" altLang="zh-TW"/>
               <a:t>Fourth level</a:t>
             </a:r>
           </a:p>
           <a:p>
             <a:pPr lvl="4"/>
             <a:r>
-              <a:rPr lang="en-US" altLang="zh-TW" smtClean="0"/>
+              <a:rPr lang="en-US" altLang="zh-TW"/>
               <a:t>Fifth level</a:t>
             </a:r>
             <a:endParaRPr lang="zh-TW" altLang="en-US"/>
@@ -2452,7 +2318,7 @@
           <a:p>
             <a:pPr lvl="0"/>
             <a:r>
-              <a:rPr lang="en-US" altLang="zh-TW" smtClean="0"/>
+              <a:rPr lang="en-US" altLang="zh-TW"/>
               <a:t>Click to edit Master text styles</a:t>
             </a:r>
           </a:p>
@@ -2474,14 +2340,11 @@
           <a:lstStyle/>
           <a:p>
             <a:r>
-              <a:rPr lang="en-US" sz="1400" b="0" strike="noStrike" spc="-1" smtClean="0">
+              <a:rPr lang="en-US" sz="1400" b="0" strike="noStrike" spc="-1">
                 <a:latin typeface="Times New Roman"/>
               </a:rPr>
               <a:t>&lt;date/time&gt;</a:t>
             </a:r>
-            <a:endParaRPr lang="en-US" sz="1400" b="0" strike="noStrike" spc="-1">
-              <a:latin typeface="Times New Roman"/>
-            </a:endParaRPr>
           </a:p>
         </p:txBody>
       </p:sp>
@@ -2502,14 +2365,11 @@
           <a:p>
             <a:pPr algn="ctr"/>
             <a:r>
-              <a:rPr lang="en-US" sz="1400" b="0" strike="noStrike" spc="-1" smtClean="0">
+              <a:rPr lang="en-US" sz="1400" b="0" strike="noStrike" spc="-1">
                 <a:latin typeface="Times New Roman"/>
               </a:rPr>
               <a:t>&lt;footer&gt;</a:t>
             </a:r>
-            <a:endParaRPr lang="en-US" sz="1400" b="0" strike="noStrike" spc="-1">
-              <a:latin typeface="Times New Roman"/>
-            </a:endParaRPr>
           </a:p>
         </p:txBody>
       </p:sp>
@@ -2591,7 +2451,7 @@
           </a:lstStyle>
           <a:p>
             <a:r>
-              <a:rPr lang="en-US" altLang="zh-TW" smtClean="0"/>
+              <a:rPr lang="en-US" altLang="zh-TW"/>
               <a:t>Click to edit Master title style</a:t>
             </a:r>
             <a:endParaRPr lang="zh-TW" altLang="en-US"/>
@@ -2656,7 +2516,7 @@
           </a:lstStyle>
           <a:p>
             <a:r>
-              <a:rPr lang="en-US" altLang="zh-TW" smtClean="0"/>
+              <a:rPr lang="en-US" altLang="zh-TW"/>
               <a:t>Click icon to add picture</a:t>
             </a:r>
             <a:endParaRPr lang="zh-TW" altLang="en-US"/>
@@ -2722,7 +2582,7 @@
           <a:p>
             <a:pPr lvl="0"/>
             <a:r>
-              <a:rPr lang="en-US" altLang="zh-TW" smtClean="0"/>
+              <a:rPr lang="en-US" altLang="zh-TW"/>
               <a:t>Click to edit Master text styles</a:t>
             </a:r>
           </a:p>
@@ -2744,14 +2604,11 @@
           <a:lstStyle/>
           <a:p>
             <a:r>
-              <a:rPr lang="en-US" sz="1400" b="0" strike="noStrike" spc="-1" smtClean="0">
+              <a:rPr lang="en-US" sz="1400" b="0" strike="noStrike" spc="-1">
                 <a:latin typeface="Times New Roman"/>
               </a:rPr>
               <a:t>&lt;date/time&gt;</a:t>
             </a:r>
-            <a:endParaRPr lang="en-US" sz="1400" b="0" strike="noStrike" spc="-1">
-              <a:latin typeface="Times New Roman"/>
-            </a:endParaRPr>
           </a:p>
         </p:txBody>
       </p:sp>
@@ -2772,14 +2629,11 @@
           <a:p>
             <a:pPr algn="ctr"/>
             <a:r>
-              <a:rPr lang="en-US" sz="1400" b="0" strike="noStrike" spc="-1" smtClean="0">
+              <a:rPr lang="en-US" sz="1400" b="0" strike="noStrike" spc="-1">
                 <a:latin typeface="Times New Roman"/>
               </a:rPr>
               <a:t>&lt;footer&gt;</a:t>
             </a:r>
-            <a:endParaRPr lang="en-US" sz="1400" b="0" strike="noStrike" spc="-1">
-              <a:latin typeface="Times New Roman"/>
-            </a:endParaRPr>
           </a:p>
         </p:txBody>
       </p:sp>
@@ -2825,7 +2679,7 @@
     <p:bg>
       <p:bgPr>
         <a:blipFill dpi="0" rotWithShape="1">
-          <a:blip r:embed="rId14"/>
+          <a:blip r:embed="rId13"/>
           <a:srcRect/>
           <a:tile tx="0" ty="0" sx="100000" sy="100000" flip="none" algn="tl"/>
         </a:blipFill>
@@ -2872,10 +2726,9 @@
           <a:lstStyle/>
           <a:p>
             <a:r>
-              <a:rPr lang="zh-TW" altLang="en-US" smtClean="0"/>
+              <a:rPr lang="zh-TW" altLang="en-US"/>
               <a:t>按一下以編輯母片標題樣式</a:t>
             </a:r>
-            <a:endParaRPr lang="zh-TW" altLang="en-US"/>
           </a:p>
         </p:txBody>
       </p:sp>
@@ -2906,38 +2759,37 @@
           <a:p>
             <a:pPr lvl="0"/>
             <a:r>
-              <a:rPr lang="zh-TW" altLang="en-US" smtClean="0"/>
+              <a:rPr lang="zh-TW" altLang="en-US"/>
               <a:t>按一下以編輯母片文字樣式</a:t>
             </a:r>
           </a:p>
           <a:p>
             <a:pPr lvl="1"/>
             <a:r>
-              <a:rPr lang="zh-TW" altLang="en-US" smtClean="0"/>
+              <a:rPr lang="zh-TW" altLang="en-US"/>
               <a:t>第二層</a:t>
             </a:r>
           </a:p>
           <a:p>
             <a:pPr lvl="2"/>
             <a:r>
-              <a:rPr lang="zh-TW" altLang="en-US" smtClean="0"/>
+              <a:rPr lang="zh-TW" altLang="en-US"/>
               <a:t>第三層</a:t>
             </a:r>
           </a:p>
           <a:p>
             <a:pPr lvl="3"/>
             <a:r>
-              <a:rPr lang="zh-TW" altLang="en-US" smtClean="0"/>
+              <a:rPr lang="zh-TW" altLang="en-US"/>
               <a:t>第四層</a:t>
             </a:r>
           </a:p>
           <a:p>
             <a:pPr lvl="4"/>
             <a:r>
-              <a:rPr lang="zh-TW" altLang="en-US" smtClean="0"/>
+              <a:rPr lang="zh-TW" altLang="en-US"/>
               <a:t>第五層</a:t>
             </a:r>
-            <a:endParaRPr lang="zh-TW" altLang="en-US"/>
           </a:p>
         </p:txBody>
       </p:sp>
@@ -2975,14 +2827,11 @@
           </a:lstStyle>
           <a:p>
             <a:r>
-              <a:rPr lang="en-US" sz="1400" b="0" strike="noStrike" spc="-1" smtClean="0">
+              <a:rPr lang="en-US" sz="1400" b="0" strike="noStrike" spc="-1">
                 <a:latin typeface="Times New Roman"/>
               </a:rPr>
               <a:t>&lt;date/time&gt;</a:t>
             </a:r>
-            <a:endParaRPr lang="en-US" sz="1400" b="0" strike="noStrike" spc="-1">
-              <a:latin typeface="Times New Roman"/>
-            </a:endParaRPr>
           </a:p>
         </p:txBody>
       </p:sp>
@@ -3021,14 +2870,11 @@
           <a:p>
             <a:pPr algn="ctr"/>
             <a:r>
-              <a:rPr lang="en-US" sz="1400" b="0" strike="noStrike" spc="-1" smtClean="0">
+              <a:rPr lang="en-US" sz="1400" b="0" strike="noStrike" spc="-1">
                 <a:latin typeface="Times New Roman"/>
               </a:rPr>
               <a:t>&lt;footer&gt;</a:t>
             </a:r>
-            <a:endParaRPr lang="en-US" sz="1400" b="0" strike="noStrike" spc="-1">
-              <a:latin typeface="Times New Roman"/>
-            </a:endParaRPr>
           </a:p>
         </p:txBody>
       </p:sp>
@@ -3093,7 +2939,6 @@
     <p:sldLayoutId id="2147483670" r:id="rId9"/>
     <p:sldLayoutId id="2147483671" r:id="rId10"/>
     <p:sldLayoutId id="2147483672" r:id="rId11"/>
-    <p:sldLayoutId id="2147483673" r:id="rId12"/>
   </p:sldLayoutIdLst>
   <p:txStyles>
     <p:titleStyle>
@@ -3367,509 +3212,158 @@
       </p:grpSpPr>
       <p:sp>
         <p:nvSpPr>
-          <p:cNvPr id="41" name="TextShape 1"/>
-          <p:cNvSpPr txBox="1"/>
+          <p:cNvPr id="6" name="標題 3"/>
+          <p:cNvSpPr txBox="1">
+            <a:spLocks/>
+          </p:cNvSpPr>
           <p:nvPr/>
         </p:nvSpPr>
         <p:spPr>
           <a:xfrm>
-            <a:off x="0" y="182880"/>
-            <a:ext cx="10080000" cy="1116000"/>
+            <a:off x="-1694" y="1767900"/>
+            <a:ext cx="10080625" cy="945059"/>
           </a:xfrm>
           <a:prstGeom prst="rect">
             <a:avLst/>
           </a:prstGeom>
-          <a:noFill/>
-          <a:ln>
-            <a:noFill/>
-          </a:ln>
         </p:spPr>
         <p:txBody>
-          <a:bodyPr lIns="0" tIns="0" rIns="0" bIns="0" anchor="ctr"/>
-          <a:lstStyle/>
-          <a:p>
-            <a:pPr algn="ctr"/>
-            <a:r>
-              <a:rPr lang="zh-TW" altLang="en-US" sz="4000" b="1" dirty="0">
+          <a:bodyPr vert="horz" lIns="75605" tIns="37802" rIns="75605" bIns="37802" rtlCol="0" anchor="ctr">
+            <a:noAutofit/>
+          </a:bodyPr>
+          <a:lstStyle>
+            <a:lvl1pPr algn="ctr" defTabSz="1219170" rtl="0" eaLnBrk="1" latinLnBrk="0" hangingPunct="1">
+              <a:spcBef>
+                <a:spcPct val="0"/>
+              </a:spcBef>
+              <a:buNone/>
+              <a:defRPr sz="5867" kern="1200">
+                <a:solidFill>
+                  <a:schemeClr val="tx1"/>
+                </a:solidFill>
+                <a:latin typeface="+mj-lt"/>
+                <a:ea typeface="+mj-ea"/>
+                <a:cs typeface="+mj-cs"/>
+              </a:defRPr>
+            </a:lvl1pPr>
+          </a:lstStyle>
+          <a:p>
+            <a:r>
+              <a:rPr lang="zh-CN" altLang="en-US" sz="5953" b="1" i="1" dirty="0">
                 <a:solidFill>
                   <a:srgbClr val="000066"/>
                 </a:solidFill>
+                <a:effectLst>
+                  <a:outerShdw blurRad="38100" dist="38100" dir="2700000" algn="tl">
+                    <a:srgbClr val="000000">
+                      <a:alpha val="43137"/>
+                    </a:srgbClr>
+                  </a:outerShdw>
+                </a:effectLst>
                 <a:latin typeface="微軟正黑體" pitchFamily="34" charset="-120"/>
                 <a:ea typeface="微軟正黑體" pitchFamily="34" charset="-120"/>
               </a:rPr>
               <a:t>如鹿切慕溪水</a:t>
             </a:r>
-            <a:r>
-              <a:rPr dirty="0"/>
-              <a:t/>
-            </a:r>
-            <a:br>
-              <a:rPr dirty="0"/>
-            </a:br>
-            <a:r>
-              <a:rPr lang="en-US" sz="2800" b="1" dirty="0" smtClean="0">
-                <a:solidFill>
-                  <a:srgbClr val="660033"/>
-                </a:solidFill>
-                <a:latin typeface="Arial" panose="020B0604020202020204" pitchFamily="34" charset="0"/>
-                <a:cs typeface="Arial" panose="020B0604020202020204" pitchFamily="34" charset="0"/>
-              </a:rPr>
-              <a:t>KHÁT KHAO DÒNG NƯỚC</a:t>
-            </a:r>
-            <a:endParaRPr lang="en-US" sz="4000" b="1" strike="noStrike" spc="-1" dirty="0">
+            <a:endParaRPr lang="zh-TW" altLang="en-US" sz="5953" b="1" i="1" dirty="0">
               <a:solidFill>
-                <a:srgbClr val="660033"/>
+                <a:srgbClr val="000066"/>
               </a:solidFill>
-              <a:latin typeface="Arial" panose="020B0604020202020204" pitchFamily="34" charset="0"/>
-              <a:cs typeface="Arial" panose="020B0604020202020204" pitchFamily="34" charset="0"/>
+              <a:effectLst>
+                <a:outerShdw blurRad="38100" dist="38100" dir="2700000" algn="tl">
+                  <a:srgbClr val="000000">
+                    <a:alpha val="43137"/>
+                  </a:srgbClr>
+                </a:outerShdw>
+              </a:effectLst>
+              <a:latin typeface="微軟正黑體" pitchFamily="34" charset="-120"/>
+              <a:ea typeface="微軟正黑體" pitchFamily="34" charset="-120"/>
             </a:endParaRPr>
           </a:p>
         </p:txBody>
       </p:sp>
       <p:sp>
         <p:nvSpPr>
-          <p:cNvPr id="42" name="TextShape 2"/>
-          <p:cNvSpPr txBox="1"/>
+          <p:cNvPr id="7" name="標題 3"/>
+          <p:cNvSpPr txBox="1">
+            <a:spLocks/>
+          </p:cNvSpPr>
           <p:nvPr/>
         </p:nvSpPr>
         <p:spPr>
           <a:xfrm>
-            <a:off x="0" y="1449000"/>
-            <a:ext cx="10080000" cy="2231640"/>
+            <a:off x="-1" y="2543300"/>
+            <a:ext cx="10080625" cy="945059"/>
           </a:xfrm>
           <a:prstGeom prst="rect">
             <a:avLst/>
           </a:prstGeom>
-          <a:noFill/>
-          <a:ln>
-            <a:noFill/>
-          </a:ln>
         </p:spPr>
         <p:txBody>
-          <a:bodyPr lIns="0" tIns="0" rIns="0" bIns="0" anchor="ctr"/>
-          <a:lstStyle/>
-          <a:p>
-            <a:pPr algn="ctr">
-              <a:buNone/>
-            </a:pPr>
-            <a:r>
-              <a:rPr lang="zh-TW" altLang="en-US" sz="4800" b="1" dirty="0">
-                <a:solidFill>
-                  <a:srgbClr val="000066"/>
-                </a:solidFill>
-                <a:latin typeface="微軟正黑體" pitchFamily="34" charset="-120"/>
+          <a:bodyPr vert="horz" lIns="75605" tIns="37802" rIns="75605" bIns="37802" rtlCol="0" anchor="ctr">
+            <a:noAutofit/>
+          </a:bodyPr>
+          <a:lstStyle>
+            <a:lvl1pPr algn="ctr" defTabSz="1219170" rtl="0" eaLnBrk="1" latinLnBrk="0" hangingPunct="1">
+              <a:spcBef>
+                <a:spcPct val="0"/>
+              </a:spcBef>
+              <a:buNone/>
+              <a:defRPr sz="5867" kern="1200">
+                <a:solidFill>
+                  <a:schemeClr val="tx1"/>
+                </a:solidFill>
+                <a:latin typeface="+mj-lt"/>
+                <a:ea typeface="+mj-ea"/>
+                <a:cs typeface="+mj-cs"/>
+              </a:defRPr>
+            </a:lvl1pPr>
+          </a:lstStyle>
+          <a:p>
+            <a:r>
+              <a:rPr lang="vi-VN" sz="4465" b="1" i="1" dirty="0">
+                <a:solidFill>
+                  <a:srgbClr val="660033"/>
+                </a:solidFill>
+                <a:effectLst>
+                  <a:outerShdw blurRad="38100" dist="38100" dir="2700000" algn="tl">
+                    <a:srgbClr val="000000">
+                      <a:alpha val="43137"/>
+                    </a:srgbClr>
+                  </a:outerShdw>
+                </a:effectLst>
                 <a:ea typeface="微軟正黑體" pitchFamily="34" charset="-120"/>
-              </a:rPr>
-              <a:t>神啊  我的心切慕你</a:t>
-            </a:r>
-            <a:endParaRPr lang="en-US" altLang="zh-TW" sz="4800" b="1" dirty="0">
-              <a:solidFill>
-                <a:srgbClr val="000066"/>
-              </a:solidFill>
-              <a:latin typeface="微軟正黑體" pitchFamily="34" charset="-120"/>
-              <a:ea typeface="微軟正黑體" pitchFamily="34" charset="-120"/>
-            </a:endParaRPr>
-          </a:p>
-          <a:p>
-            <a:pPr algn="ctr">
-              <a:buNone/>
-            </a:pPr>
-            <a:r>
-              <a:rPr lang="zh-TW" altLang="en-US" sz="4800" b="1" dirty="0">
-                <a:solidFill>
-                  <a:srgbClr val="000066"/>
-                </a:solidFill>
-                <a:latin typeface="微軟正黑體" pitchFamily="34" charset="-120"/>
-                <a:ea typeface="微軟正黑體" pitchFamily="34" charset="-120"/>
-              </a:rPr>
-              <a:t>如鹿切慕溪水</a:t>
-            </a:r>
-            <a:endParaRPr lang="en-US" altLang="zh-TW" sz="4800" b="1" dirty="0">
-              <a:solidFill>
-                <a:srgbClr val="000066"/>
-              </a:solidFill>
-              <a:latin typeface="微軟正黑體" pitchFamily="34" charset="-120"/>
-              <a:ea typeface="微軟正黑體" pitchFamily="34" charset="-120"/>
-            </a:endParaRPr>
-          </a:p>
-        </p:txBody>
-      </p:sp>
-      <p:sp>
-        <p:nvSpPr>
-          <p:cNvPr id="43" name="TextShape 3"/>
-          <p:cNvSpPr txBox="1"/>
-          <p:nvPr/>
-        </p:nvSpPr>
-        <p:spPr>
-          <a:xfrm>
-            <a:off x="0" y="3140075"/>
-            <a:ext cx="10080000" cy="2011680"/>
-          </a:xfrm>
-          <a:prstGeom prst="rect">
-            <a:avLst/>
-          </a:prstGeom>
-          <a:noFill/>
-          <a:ln>
-            <a:noFill/>
-          </a:ln>
-        </p:spPr>
-        <p:txBody>
-          <a:bodyPr lIns="0" tIns="0" rIns="0" bIns="0" anchor="ctr"/>
-          <a:lstStyle/>
-          <a:p>
-            <a:pPr algn="ctr"/>
-            <a:r>
-              <a:rPr lang="en-US" sz="3200" b="1" dirty="0" err="1">
-                <a:solidFill>
-                  <a:srgbClr val="660033"/>
-                </a:solidFill>
-                <a:latin typeface="Arial" panose="020B0604020202020204" pitchFamily="34" charset="0"/>
-                <a:cs typeface="Arial" panose="020B0604020202020204" pitchFamily="34" charset="0"/>
-              </a:rPr>
-              <a:t>Nhìn</a:t>
-            </a:r>
-            <a:r>
-              <a:rPr lang="en-US" sz="3200" b="1" dirty="0">
-                <a:solidFill>
-                  <a:srgbClr val="660033"/>
-                </a:solidFill>
-                <a:latin typeface="Arial" panose="020B0604020202020204" pitchFamily="34" charset="0"/>
-                <a:cs typeface="Arial" panose="020B0604020202020204" pitchFamily="34" charset="0"/>
-              </a:rPr>
-              <a:t> </a:t>
-            </a:r>
-            <a:r>
-              <a:rPr lang="en-US" sz="3200" b="1" dirty="0" err="1">
-                <a:solidFill>
-                  <a:srgbClr val="660033"/>
-                </a:solidFill>
-                <a:latin typeface="Arial" panose="020B0604020202020204" pitchFamily="34" charset="0"/>
-                <a:cs typeface="Arial" panose="020B0604020202020204" pitchFamily="34" charset="0"/>
-              </a:rPr>
-              <a:t>nai</a:t>
-            </a:r>
-            <a:r>
-              <a:rPr lang="en-US" sz="3200" b="1" dirty="0">
-                <a:solidFill>
-                  <a:srgbClr val="660033"/>
-                </a:solidFill>
-                <a:latin typeface="Arial" panose="020B0604020202020204" pitchFamily="34" charset="0"/>
-                <a:cs typeface="Arial" panose="020B0604020202020204" pitchFamily="34" charset="0"/>
-              </a:rPr>
-              <a:t> </a:t>
-            </a:r>
-            <a:r>
-              <a:rPr lang="en-US" sz="3200" b="1" dirty="0" err="1">
-                <a:solidFill>
-                  <a:srgbClr val="660033"/>
-                </a:solidFill>
-                <a:latin typeface="Arial" panose="020B0604020202020204" pitchFamily="34" charset="0"/>
-                <a:cs typeface="Arial" panose="020B0604020202020204" pitchFamily="34" charset="0"/>
-              </a:rPr>
-              <a:t>kia</a:t>
-            </a:r>
-            <a:r>
-              <a:rPr lang="en-US" sz="3200" b="1" dirty="0">
-                <a:solidFill>
-                  <a:srgbClr val="660033"/>
-                </a:solidFill>
-                <a:latin typeface="Arial" panose="020B0604020202020204" pitchFamily="34" charset="0"/>
-                <a:cs typeface="Arial" panose="020B0604020202020204" pitchFamily="34" charset="0"/>
-              </a:rPr>
-              <a:t> </a:t>
-            </a:r>
-            <a:r>
-              <a:rPr lang="en-US" sz="3200" b="1" dirty="0" err="1">
-                <a:solidFill>
-                  <a:srgbClr val="660033"/>
-                </a:solidFill>
-                <a:latin typeface="Arial" panose="020B0604020202020204" pitchFamily="34" charset="0"/>
-                <a:cs typeface="Arial" panose="020B0604020202020204" pitchFamily="34" charset="0"/>
-              </a:rPr>
-              <a:t>khát</a:t>
-            </a:r>
-            <a:r>
-              <a:rPr lang="en-US" sz="3200" b="1" dirty="0">
-                <a:solidFill>
-                  <a:srgbClr val="660033"/>
-                </a:solidFill>
-                <a:latin typeface="Arial" panose="020B0604020202020204" pitchFamily="34" charset="0"/>
-                <a:cs typeface="Arial" panose="020B0604020202020204" pitchFamily="34" charset="0"/>
-              </a:rPr>
-              <a:t> </a:t>
-            </a:r>
-            <a:r>
-              <a:rPr lang="en-US" sz="3200" b="1" dirty="0" err="1">
-                <a:solidFill>
-                  <a:srgbClr val="660033"/>
-                </a:solidFill>
-                <a:latin typeface="Arial" panose="020B0604020202020204" pitchFamily="34" charset="0"/>
-                <a:cs typeface="Arial" panose="020B0604020202020204" pitchFamily="34" charset="0"/>
-              </a:rPr>
-              <a:t>khao</a:t>
-            </a:r>
-            <a:r>
-              <a:rPr lang="en-US" sz="3200" b="1" dirty="0">
-                <a:solidFill>
-                  <a:srgbClr val="660033"/>
-                </a:solidFill>
-                <a:latin typeface="Arial" panose="020B0604020202020204" pitchFamily="34" charset="0"/>
-                <a:cs typeface="Arial" panose="020B0604020202020204" pitchFamily="34" charset="0"/>
-              </a:rPr>
-              <a:t> </a:t>
-            </a:r>
-            <a:r>
-              <a:rPr lang="en-US" sz="3200" b="1" dirty="0" err="1">
-                <a:solidFill>
-                  <a:srgbClr val="660033"/>
-                </a:solidFill>
-                <a:latin typeface="Arial" panose="020B0604020202020204" pitchFamily="34" charset="0"/>
-                <a:cs typeface="Arial" panose="020B0604020202020204" pitchFamily="34" charset="0"/>
-              </a:rPr>
-              <a:t>dòng</a:t>
-            </a:r>
-            <a:r>
-              <a:rPr lang="en-US" sz="3200" b="1" dirty="0">
-                <a:solidFill>
-                  <a:srgbClr val="660033"/>
-                </a:solidFill>
-                <a:latin typeface="Arial" panose="020B0604020202020204" pitchFamily="34" charset="0"/>
-                <a:cs typeface="Arial" panose="020B0604020202020204" pitchFamily="34" charset="0"/>
-              </a:rPr>
-              <a:t> </a:t>
-            </a:r>
-            <a:r>
-              <a:rPr lang="en-US" sz="3200" b="1" dirty="0" err="1">
-                <a:solidFill>
-                  <a:srgbClr val="660033"/>
-                </a:solidFill>
-                <a:latin typeface="Arial" panose="020B0604020202020204" pitchFamily="34" charset="0"/>
-                <a:cs typeface="Arial" panose="020B0604020202020204" pitchFamily="34" charset="0"/>
-              </a:rPr>
-              <a:t>nước</a:t>
-            </a:r>
-            <a:r>
-              <a:rPr lang="en-US" sz="3200" b="1" dirty="0">
-                <a:solidFill>
-                  <a:srgbClr val="660033"/>
-                </a:solidFill>
-                <a:latin typeface="Arial" panose="020B0604020202020204" pitchFamily="34" charset="0"/>
-                <a:cs typeface="Arial" panose="020B0604020202020204" pitchFamily="34" charset="0"/>
-              </a:rPr>
-              <a:t> </a:t>
-            </a:r>
-            <a:r>
-              <a:rPr lang="en-US" sz="3200" b="1" dirty="0" err="1" smtClean="0">
-                <a:solidFill>
-                  <a:srgbClr val="660033"/>
-                </a:solidFill>
-                <a:latin typeface="Arial" panose="020B0604020202020204" pitchFamily="34" charset="0"/>
-                <a:cs typeface="Arial" panose="020B0604020202020204" pitchFamily="34" charset="0"/>
-              </a:rPr>
-              <a:t>mát</a:t>
-            </a:r>
-            <a:endParaRPr lang="en-US" sz="3200" b="1" dirty="0" smtClean="0">
+                <a:cs typeface="Calibri" panose="020F0502020204030204" pitchFamily="34" charset="0"/>
+              </a:rPr>
+              <a:t>KHÁT KHAO DÒNG NƯỚC</a:t>
+            </a:r>
+            <a:endParaRPr lang="zh-TW" altLang="en-US" sz="4465" b="1" i="1" dirty="0">
               <a:solidFill>
                 <a:srgbClr val="660033"/>
               </a:solidFill>
-              <a:latin typeface="Arial" panose="020B0604020202020204" pitchFamily="34" charset="0"/>
-              <a:cs typeface="Arial" panose="020B0604020202020204" pitchFamily="34" charset="0"/>
+              <a:effectLst>
+                <a:outerShdw blurRad="38100" dist="38100" dir="2700000" algn="tl">
+                  <a:srgbClr val="000000">
+                    <a:alpha val="43137"/>
+                  </a:srgbClr>
+                </a:outerShdw>
+              </a:effectLst>
+              <a:ea typeface="微軟正黑體" pitchFamily="34" charset="-120"/>
+              <a:cs typeface="Calibri" panose="020F0502020204030204" pitchFamily="34" charset="0"/>
             </a:endParaRPr>
           </a:p>
-          <a:p>
-            <a:pPr algn="ctr"/>
-            <a:r>
-              <a:rPr lang="en-US" sz="3200" b="1" dirty="0" err="1" smtClean="0">
-                <a:solidFill>
-                  <a:srgbClr val="660033"/>
-                </a:solidFill>
-                <a:latin typeface="Arial" panose="020B0604020202020204" pitchFamily="34" charset="0"/>
-                <a:cs typeface="Arial" panose="020B0604020202020204" pitchFamily="34" charset="0"/>
-              </a:rPr>
-              <a:t>Như</a:t>
-            </a:r>
-            <a:r>
-              <a:rPr lang="en-US" sz="3200" b="1" dirty="0" smtClean="0">
-                <a:solidFill>
-                  <a:srgbClr val="660033"/>
-                </a:solidFill>
-                <a:latin typeface="Arial" panose="020B0604020202020204" pitchFamily="34" charset="0"/>
-                <a:cs typeface="Arial" panose="020B0604020202020204" pitchFamily="34" charset="0"/>
-              </a:rPr>
-              <a:t> </a:t>
-            </a:r>
-            <a:r>
-              <a:rPr lang="en-US" sz="3200" b="1" dirty="0">
-                <a:solidFill>
-                  <a:srgbClr val="660033"/>
-                </a:solidFill>
-                <a:latin typeface="Arial" panose="020B0604020202020204" pitchFamily="34" charset="0"/>
-                <a:cs typeface="Arial" panose="020B0604020202020204" pitchFamily="34" charset="0"/>
-              </a:rPr>
-              <a:t>con </a:t>
-            </a:r>
-            <a:r>
-              <a:rPr lang="en-US" sz="3200" b="1" dirty="0" err="1">
-                <a:solidFill>
-                  <a:srgbClr val="660033"/>
-                </a:solidFill>
-                <a:latin typeface="Arial" panose="020B0604020202020204" pitchFamily="34" charset="0"/>
-                <a:cs typeface="Arial" panose="020B0604020202020204" pitchFamily="34" charset="0"/>
-              </a:rPr>
-              <a:t>thèm</a:t>
-            </a:r>
-            <a:r>
-              <a:rPr lang="en-US" sz="3200" b="1" dirty="0">
-                <a:solidFill>
-                  <a:srgbClr val="660033"/>
-                </a:solidFill>
-                <a:latin typeface="Arial" panose="020B0604020202020204" pitchFamily="34" charset="0"/>
-                <a:cs typeface="Arial" panose="020B0604020202020204" pitchFamily="34" charset="0"/>
-              </a:rPr>
-              <a:t> </a:t>
-            </a:r>
-            <a:r>
-              <a:rPr lang="en-US" sz="3200" b="1" dirty="0" err="1">
-                <a:solidFill>
-                  <a:srgbClr val="660033"/>
-                </a:solidFill>
-                <a:latin typeface="Arial" panose="020B0604020202020204" pitchFamily="34" charset="0"/>
-                <a:cs typeface="Arial" panose="020B0604020202020204" pitchFamily="34" charset="0"/>
-              </a:rPr>
-              <a:t>khát</a:t>
-            </a:r>
-            <a:r>
-              <a:rPr lang="en-US" sz="3200" b="1" dirty="0">
-                <a:solidFill>
-                  <a:srgbClr val="660033"/>
-                </a:solidFill>
-                <a:latin typeface="Arial" panose="020B0604020202020204" pitchFamily="34" charset="0"/>
-                <a:cs typeface="Arial" panose="020B0604020202020204" pitchFamily="34" charset="0"/>
-              </a:rPr>
-              <a:t> </a:t>
-            </a:r>
-            <a:endParaRPr lang="en-US" sz="3200" b="1" dirty="0" smtClean="0">
-              <a:solidFill>
-                <a:srgbClr val="660033"/>
-              </a:solidFill>
-              <a:latin typeface="Arial" panose="020B0604020202020204" pitchFamily="34" charset="0"/>
-              <a:cs typeface="Arial" panose="020B0604020202020204" pitchFamily="34" charset="0"/>
-            </a:endParaRPr>
-          </a:p>
-          <a:p>
-            <a:pPr algn="ctr"/>
-            <a:r>
-              <a:rPr lang="en-US" sz="3200" b="1" dirty="0" err="1" smtClean="0">
-                <a:solidFill>
-                  <a:srgbClr val="660033"/>
-                </a:solidFill>
-                <a:latin typeface="Arial" panose="020B0604020202020204" pitchFamily="34" charset="0"/>
-                <a:cs typeface="Arial" panose="020B0604020202020204" pitchFamily="34" charset="0"/>
-              </a:rPr>
-              <a:t>chính</a:t>
-            </a:r>
-            <a:r>
-              <a:rPr lang="en-US" sz="3200" b="1" dirty="0" smtClean="0">
-                <a:solidFill>
-                  <a:srgbClr val="660033"/>
-                </a:solidFill>
-                <a:latin typeface="Arial" panose="020B0604020202020204" pitchFamily="34" charset="0"/>
-                <a:cs typeface="Arial" panose="020B0604020202020204" pitchFamily="34" charset="0"/>
-              </a:rPr>
-              <a:t> </a:t>
-            </a:r>
-            <a:r>
-              <a:rPr lang="en-US" sz="3200" b="1" dirty="0" err="1">
-                <a:solidFill>
-                  <a:srgbClr val="660033"/>
-                </a:solidFill>
-                <a:latin typeface="Arial" panose="020B0604020202020204" pitchFamily="34" charset="0"/>
-                <a:cs typeface="Arial" panose="020B0604020202020204" pitchFamily="34" charset="0"/>
-              </a:rPr>
-              <a:t>Chúa</a:t>
-            </a:r>
-            <a:r>
-              <a:rPr lang="en-US" sz="3200" b="1" dirty="0">
-                <a:solidFill>
-                  <a:srgbClr val="660033"/>
-                </a:solidFill>
-                <a:latin typeface="Arial" panose="020B0604020202020204" pitchFamily="34" charset="0"/>
-                <a:cs typeface="Arial" panose="020B0604020202020204" pitchFamily="34" charset="0"/>
-              </a:rPr>
-              <a:t> Cha </a:t>
-            </a:r>
-            <a:r>
-              <a:rPr lang="en-US" sz="3200" b="1" dirty="0" err="1">
-                <a:solidFill>
-                  <a:srgbClr val="660033"/>
-                </a:solidFill>
-                <a:latin typeface="Arial" panose="020B0604020202020204" pitchFamily="34" charset="0"/>
-                <a:cs typeface="Arial" panose="020B0604020202020204" pitchFamily="34" charset="0"/>
-              </a:rPr>
-              <a:t>toàn</a:t>
-            </a:r>
-            <a:r>
-              <a:rPr lang="en-US" sz="3200" b="1" dirty="0">
-                <a:solidFill>
-                  <a:srgbClr val="660033"/>
-                </a:solidFill>
-                <a:latin typeface="Arial" panose="020B0604020202020204" pitchFamily="34" charset="0"/>
-                <a:cs typeface="Arial" panose="020B0604020202020204" pitchFamily="34" charset="0"/>
-              </a:rPr>
-              <a:t> </a:t>
-            </a:r>
-            <a:r>
-              <a:rPr lang="en-US" sz="3200" b="1" dirty="0" err="1">
-                <a:solidFill>
-                  <a:srgbClr val="660033"/>
-                </a:solidFill>
-                <a:latin typeface="Arial" panose="020B0604020202020204" pitchFamily="34" charset="0"/>
-                <a:cs typeface="Arial" panose="020B0604020202020204" pitchFamily="34" charset="0"/>
-              </a:rPr>
-              <a:t>năng</a:t>
-            </a:r>
-            <a:endParaRPr lang="en-US" sz="3200" b="1" dirty="0">
-              <a:solidFill>
-                <a:srgbClr val="660033"/>
-              </a:solidFill>
-              <a:latin typeface="Arial" panose="020B0604020202020204" pitchFamily="34" charset="0"/>
-              <a:cs typeface="Arial" panose="020B0604020202020204" pitchFamily="34" charset="0"/>
-            </a:endParaRPr>
-          </a:p>
         </p:txBody>
       </p:sp>
     </p:spTree>
+    <p:extLst>
+      <p:ext uri="{BB962C8B-B14F-4D97-AF65-F5344CB8AC3E}">
+        <p14:creationId xmlns:p14="http://schemas.microsoft.com/office/powerpoint/2010/main" val="3527098751"/>
+      </p:ext>
+    </p:extLst>
   </p:cSld>
   <p:clrMapOvr>
     <a:masterClrMapping/>
   </p:clrMapOvr>
-  <p:timing>
-    <p:tnLst>
-      <p:par>
-        <p:cTn id="1" dur="indefinite" restart="never" nodeType="tmRoot">
-          <p:childTnLst>
-            <p:seq>
-              <p:cTn id="2" dur="indefinite" nodeType="mainSeq"/>
-              <p:prevCondLst>
-                <p:cond evt="onPrev" delay="0">
-                  <p:tgtEl>
-                    <p:sldTgt/>
-                  </p:tgtEl>
-                </p:cond>
-              </p:prevCondLst>
-              <p:nextCondLst>
-                <p:cond evt="onNext" delay="0">
-                  <p:tgtEl>
-                    <p:sldTgt/>
-                  </p:tgtEl>
-                </p:cond>
-              </p:nextCondLst>
-            </p:seq>
-          </p:childTnLst>
-        </p:cTn>
-      </p:par>
-    </p:tnLst>
-  </p:timing>
 </p:sld>
 </file>
 
@@ -3892,102 +3386,40 @@
       </p:grpSpPr>
       <p:sp>
         <p:nvSpPr>
-          <p:cNvPr id="41" name="TextShape 1"/>
-          <p:cNvSpPr txBox="1"/>
-          <p:nvPr/>
+          <p:cNvPr id="6" name="內容版面配置區 4"/>
+          <p:cNvSpPr>
+            <a:spLocks noGrp="1"/>
+          </p:cNvSpPr>
+          <p:nvPr>
+            <p:ph idx="1"/>
+          </p:nvPr>
         </p:nvSpPr>
         <p:spPr>
           <a:xfrm>
-            <a:off x="0" y="182880"/>
-            <a:ext cx="10080000" cy="1116000"/>
+            <a:off x="-1" y="1767434"/>
+            <a:ext cx="10080625" cy="1089939"/>
           </a:xfrm>
-          <a:prstGeom prst="rect">
-            <a:avLst/>
-          </a:prstGeom>
-          <a:noFill/>
-          <a:ln>
-            <a:noFill/>
-          </a:ln>
         </p:spPr>
         <p:txBody>
-          <a:bodyPr lIns="0" tIns="0" rIns="0" bIns="0" anchor="ctr"/>
+          <a:bodyPr anchor="ctr">
+            <a:normAutofit/>
+          </a:bodyPr>
           <a:lstStyle/>
           <a:p>
-            <a:pPr algn="ctr"/>
-            <a:r>
-              <a:rPr lang="zh-TW" altLang="en-US" sz="4000" b="1" dirty="0">
+            <a:pPr algn="ctr">
+              <a:buNone/>
+            </a:pPr>
+            <a:r>
+              <a:rPr lang="zh-TW" altLang="en-US" sz="5400" b="1" dirty="0">
                 <a:solidFill>
                   <a:srgbClr val="000066"/>
                 </a:solidFill>
                 <a:latin typeface="微軟正黑體" pitchFamily="34" charset="-120"/>
                 <a:ea typeface="微軟正黑體" pitchFamily="34" charset="-120"/>
               </a:rPr>
-              <a:t>如鹿切慕溪水</a:t>
-            </a:r>
-            <a:r>
-              <a:rPr dirty="0"/>
-              <a:t/>
-            </a:r>
-            <a:br>
-              <a:rPr dirty="0"/>
-            </a:br>
-            <a:r>
-              <a:rPr lang="en-US" sz="2800" b="1" dirty="0" smtClean="0">
-                <a:solidFill>
-                  <a:srgbClr val="660033"/>
-                </a:solidFill>
-                <a:latin typeface="Arial" panose="020B0604020202020204" pitchFamily="34" charset="0"/>
-                <a:cs typeface="Arial" panose="020B0604020202020204" pitchFamily="34" charset="0"/>
-              </a:rPr>
-              <a:t>KHÁT KHAO DÒNG NƯỚC</a:t>
-            </a:r>
-            <a:endParaRPr lang="en-US" sz="4000" b="1" strike="noStrike" spc="-1" dirty="0">
-              <a:solidFill>
-                <a:srgbClr val="660033"/>
-              </a:solidFill>
-              <a:latin typeface="Arial" panose="020B0604020202020204" pitchFamily="34" charset="0"/>
-              <a:cs typeface="Arial" panose="020B0604020202020204" pitchFamily="34" charset="0"/>
-            </a:endParaRPr>
-          </a:p>
-        </p:txBody>
-      </p:sp>
-      <p:sp>
-        <p:nvSpPr>
-          <p:cNvPr id="42" name="TextShape 2"/>
-          <p:cNvSpPr txBox="1"/>
-          <p:nvPr/>
-        </p:nvSpPr>
-        <p:spPr>
-          <a:xfrm>
-            <a:off x="0" y="1449000"/>
-            <a:ext cx="10080000" cy="2231640"/>
-          </a:xfrm>
-          <a:prstGeom prst="rect">
-            <a:avLst/>
-          </a:prstGeom>
-          <a:noFill/>
-          <a:ln>
-            <a:noFill/>
-          </a:ln>
-        </p:spPr>
-        <p:txBody>
-          <a:bodyPr lIns="0" tIns="0" rIns="0" bIns="0" anchor="ctr"/>
-          <a:lstStyle/>
-          <a:p>
-            <a:pPr algn="ctr">
-              <a:buNone/>
-            </a:pPr>
-            <a:r>
-              <a:rPr lang="zh-TW" altLang="en-US" sz="4800" b="1" dirty="0">
-                <a:solidFill>
-                  <a:srgbClr val="000066"/>
-                </a:solidFill>
-                <a:latin typeface="微軟正黑體" pitchFamily="34" charset="-120"/>
-                <a:ea typeface="微軟正黑體" pitchFamily="34" charset="-120"/>
-              </a:rPr>
-              <a:t>惟有你是我心所愛</a:t>
-            </a:r>
-            <a:endParaRPr lang="en-US" altLang="zh-TW" sz="4800" b="1" dirty="0">
+              <a:t>神啊  我的心切慕祢</a:t>
+            </a:r>
+            <a:endParaRPr lang="en-US" altLang="zh-TW" sz="5400" b="1" dirty="0">
               <a:solidFill>
                 <a:srgbClr val="000066"/>
               </a:solidFill>
@@ -3995,310 +3427,250 @@
               <a:ea typeface="微軟正黑體" pitchFamily="34" charset="-120"/>
             </a:endParaRPr>
           </a:p>
-          <a:p>
-            <a:pPr algn="ctr">
+        </p:txBody>
+      </p:sp>
+      <p:sp>
+        <p:nvSpPr>
+          <p:cNvPr id="7" name="內容版面配置區 4"/>
+          <p:cNvSpPr txBox="1">
+            <a:spLocks/>
+          </p:cNvSpPr>
+          <p:nvPr/>
+        </p:nvSpPr>
+        <p:spPr>
+          <a:xfrm>
+            <a:off x="-1" y="2552543"/>
+            <a:ext cx="10080625" cy="1089939"/>
+          </a:xfrm>
+          <a:prstGeom prst="rect">
+            <a:avLst/>
+          </a:prstGeom>
+        </p:spPr>
+        <p:txBody>
+          <a:bodyPr vert="horz" lIns="75605" tIns="37802" rIns="75605" bIns="37802" rtlCol="0" anchor="ctr">
+            <a:normAutofit/>
+          </a:bodyPr>
+          <a:lstStyle>
+            <a:lvl1pPr marL="457189" indent="-457189" algn="l" defTabSz="1219170" rtl="0" eaLnBrk="1" latinLnBrk="0" hangingPunct="1">
+              <a:spcBef>
+                <a:spcPct val="20000"/>
+              </a:spcBef>
+              <a:buFont typeface="Arial" pitchFamily="34" charset="0"/>
+              <a:buChar char="•"/>
+              <a:defRPr sz="4267" kern="1200">
+                <a:solidFill>
+                  <a:schemeClr val="tx1"/>
+                </a:solidFill>
+                <a:latin typeface="+mn-lt"/>
+                <a:ea typeface="+mn-ea"/>
+                <a:cs typeface="+mn-cs"/>
+              </a:defRPr>
+            </a:lvl1pPr>
+            <a:lvl2pPr marL="990575" indent="-380990" algn="l" defTabSz="1219170" rtl="0" eaLnBrk="1" latinLnBrk="0" hangingPunct="1">
+              <a:spcBef>
+                <a:spcPct val="20000"/>
+              </a:spcBef>
+              <a:buFont typeface="Arial" pitchFamily="34" charset="0"/>
+              <a:buChar char="–"/>
+              <a:defRPr sz="3733" kern="1200">
+                <a:solidFill>
+                  <a:schemeClr val="tx1"/>
+                </a:solidFill>
+                <a:latin typeface="+mn-lt"/>
+                <a:ea typeface="+mn-ea"/>
+                <a:cs typeface="+mn-cs"/>
+              </a:defRPr>
+            </a:lvl2pPr>
+            <a:lvl3pPr marL="1523962" indent="-304792" algn="l" defTabSz="1219170" rtl="0" eaLnBrk="1" latinLnBrk="0" hangingPunct="1">
+              <a:spcBef>
+                <a:spcPct val="20000"/>
+              </a:spcBef>
+              <a:buFont typeface="Arial" pitchFamily="34" charset="0"/>
+              <a:buChar char="•"/>
+              <a:defRPr sz="3200" kern="1200">
+                <a:solidFill>
+                  <a:schemeClr val="tx1"/>
+                </a:solidFill>
+                <a:latin typeface="+mn-lt"/>
+                <a:ea typeface="+mn-ea"/>
+                <a:cs typeface="+mn-cs"/>
+              </a:defRPr>
+            </a:lvl3pPr>
+            <a:lvl4pPr marL="2133547" indent="-304792" algn="l" defTabSz="1219170" rtl="0" eaLnBrk="1" latinLnBrk="0" hangingPunct="1">
+              <a:spcBef>
+                <a:spcPct val="20000"/>
+              </a:spcBef>
+              <a:buFont typeface="Arial" pitchFamily="34" charset="0"/>
+              <a:buChar char="–"/>
+              <a:defRPr sz="2667" kern="1200">
+                <a:solidFill>
+                  <a:schemeClr val="tx1"/>
+                </a:solidFill>
+                <a:latin typeface="+mn-lt"/>
+                <a:ea typeface="+mn-ea"/>
+                <a:cs typeface="+mn-cs"/>
+              </a:defRPr>
+            </a:lvl4pPr>
+            <a:lvl5pPr marL="2743131" indent="-304792" algn="l" defTabSz="1219170" rtl="0" eaLnBrk="1" latinLnBrk="0" hangingPunct="1">
+              <a:spcBef>
+                <a:spcPct val="20000"/>
+              </a:spcBef>
+              <a:buFont typeface="Arial" pitchFamily="34" charset="0"/>
+              <a:buChar char="»"/>
+              <a:defRPr sz="2667" kern="1200">
+                <a:solidFill>
+                  <a:schemeClr val="tx1"/>
+                </a:solidFill>
+                <a:latin typeface="+mn-lt"/>
+                <a:ea typeface="+mn-ea"/>
+                <a:cs typeface="+mn-cs"/>
+              </a:defRPr>
+            </a:lvl5pPr>
+            <a:lvl6pPr marL="3352716" indent="-304792" algn="l" defTabSz="1219170" rtl="0" eaLnBrk="1" latinLnBrk="0" hangingPunct="1">
+              <a:spcBef>
+                <a:spcPct val="20000"/>
+              </a:spcBef>
+              <a:buFont typeface="Arial" pitchFamily="34" charset="0"/>
+              <a:buChar char="•"/>
+              <a:defRPr sz="2667" kern="1200">
+                <a:solidFill>
+                  <a:schemeClr val="tx1"/>
+                </a:solidFill>
+                <a:latin typeface="+mn-lt"/>
+                <a:ea typeface="+mn-ea"/>
+                <a:cs typeface="+mn-cs"/>
+              </a:defRPr>
+            </a:lvl6pPr>
+            <a:lvl7pPr marL="3962301" indent="-304792" algn="l" defTabSz="1219170" rtl="0" eaLnBrk="1" latinLnBrk="0" hangingPunct="1">
+              <a:spcBef>
+                <a:spcPct val="20000"/>
+              </a:spcBef>
+              <a:buFont typeface="Arial" pitchFamily="34" charset="0"/>
+              <a:buChar char="•"/>
+              <a:defRPr sz="2667" kern="1200">
+                <a:solidFill>
+                  <a:schemeClr val="tx1"/>
+                </a:solidFill>
+                <a:latin typeface="+mn-lt"/>
+                <a:ea typeface="+mn-ea"/>
+                <a:cs typeface="+mn-cs"/>
+              </a:defRPr>
+            </a:lvl7pPr>
+            <a:lvl8pPr marL="4571886" indent="-304792" algn="l" defTabSz="1219170" rtl="0" eaLnBrk="1" latinLnBrk="0" hangingPunct="1">
+              <a:spcBef>
+                <a:spcPct val="20000"/>
+              </a:spcBef>
+              <a:buFont typeface="Arial" pitchFamily="34" charset="0"/>
+              <a:buChar char="•"/>
+              <a:defRPr sz="2667" kern="1200">
+                <a:solidFill>
+                  <a:schemeClr val="tx1"/>
+                </a:solidFill>
+                <a:latin typeface="+mn-lt"/>
+                <a:ea typeface="+mn-ea"/>
+                <a:cs typeface="+mn-cs"/>
+              </a:defRPr>
+            </a:lvl8pPr>
+            <a:lvl9pPr marL="5181470" indent="-304792" algn="l" defTabSz="1219170" rtl="0" eaLnBrk="1" latinLnBrk="0" hangingPunct="1">
+              <a:spcBef>
+                <a:spcPct val="20000"/>
+              </a:spcBef>
+              <a:buFont typeface="Arial" pitchFamily="34" charset="0"/>
+              <a:buChar char="•"/>
+              <a:defRPr sz="2667" kern="1200">
+                <a:solidFill>
+                  <a:schemeClr val="tx1"/>
+                </a:solidFill>
+                <a:latin typeface="+mn-lt"/>
+                <a:ea typeface="+mn-ea"/>
+                <a:cs typeface="+mn-cs"/>
+              </a:defRPr>
+            </a:lvl9pPr>
+          </a:lstStyle>
+          <a:p>
+            <a:pPr marL="0" indent="0" algn="ctr">
               <a:buNone/>
             </a:pPr>
             <a:r>
-              <a:rPr lang="zh-TW" altLang="en-US" sz="4800" b="1" dirty="0">
-                <a:solidFill>
-                  <a:srgbClr val="000066"/>
-                </a:solidFill>
-                <a:latin typeface="微軟正黑體" pitchFamily="34" charset="-120"/>
+              <a:rPr lang="vi-VN" sz="3307" b="1" dirty="0">
+                <a:solidFill>
+                  <a:srgbClr val="660033"/>
+                </a:solidFill>
+                <a:latin typeface="+mj-lt"/>
                 <a:ea typeface="微軟正黑體" pitchFamily="34" charset="-120"/>
-              </a:rPr>
-              <a:t>我渴慕來敬拜你</a:t>
-            </a:r>
-            <a:endParaRPr lang="en-US" sz="4800" b="1" dirty="0">
+                <a:cs typeface="Calibri" panose="020F0502020204030204" pitchFamily="34" charset="0"/>
+              </a:rPr>
+              <a:t>Nhìn nai kia khát khao dòng nước mát</a:t>
+            </a:r>
+            <a:endParaRPr lang="en-US" sz="3307" b="1" dirty="0">
               <a:solidFill>
-                <a:srgbClr val="000066"/>
+                <a:srgbClr val="660033"/>
               </a:solidFill>
-              <a:latin typeface="微軟正黑體" pitchFamily="34" charset="-120"/>
+              <a:latin typeface="+mj-lt"/>
               <a:ea typeface="微軟正黑體" pitchFamily="34" charset="-120"/>
+              <a:cs typeface="Calibri" panose="020F0502020204030204" pitchFamily="34" charset="0"/>
             </a:endParaRPr>
           </a:p>
         </p:txBody>
       </p:sp>
       <p:sp>
         <p:nvSpPr>
-          <p:cNvPr id="43" name="TextShape 3"/>
+          <p:cNvPr id="8" name="TextBox 7"/>
           <p:cNvSpPr txBox="1"/>
           <p:nvPr/>
         </p:nvSpPr>
         <p:spPr>
           <a:xfrm>
-            <a:off x="0" y="3140075"/>
-            <a:ext cx="10080000" cy="2011680"/>
+            <a:off x="-1" y="4343568"/>
+            <a:ext cx="10080625" cy="448584"/>
           </a:xfrm>
           <a:prstGeom prst="rect">
             <a:avLst/>
           </a:prstGeom>
           <a:noFill/>
-          <a:ln>
-            <a:noFill/>
-          </a:ln>
         </p:spPr>
         <p:txBody>
-          <a:bodyPr lIns="0" tIns="0" rIns="0" bIns="0" anchor="ctr"/>
+          <a:bodyPr wrap="square" rtlCol="0">
+            <a:spAutoFit/>
+          </a:bodyPr>
           <a:lstStyle/>
           <a:p>
             <a:pPr algn="ctr"/>
             <a:r>
-              <a:rPr lang="en-US" sz="3200" b="1" dirty="0" err="1">
-                <a:solidFill>
-                  <a:srgbClr val="660033"/>
-                </a:solidFill>
-                <a:latin typeface="Arial" panose="020B0604020202020204" pitchFamily="34" charset="0"/>
-                <a:cs typeface="Arial" panose="020B0604020202020204" pitchFamily="34" charset="0"/>
-              </a:rPr>
-              <a:t>Lòng</a:t>
-            </a:r>
-            <a:r>
-              <a:rPr lang="en-US" sz="3200" b="1" dirty="0">
-                <a:solidFill>
-                  <a:srgbClr val="660033"/>
-                </a:solidFill>
-                <a:latin typeface="Arial" panose="020B0604020202020204" pitchFamily="34" charset="0"/>
-                <a:cs typeface="Arial" panose="020B0604020202020204" pitchFamily="34" charset="0"/>
-              </a:rPr>
-              <a:t> con </a:t>
-            </a:r>
-            <a:r>
-              <a:rPr lang="en-US" sz="3200" b="1" dirty="0" err="1">
-                <a:solidFill>
-                  <a:srgbClr val="660033"/>
-                </a:solidFill>
-                <a:latin typeface="Arial" panose="020B0604020202020204" pitchFamily="34" charset="0"/>
-                <a:cs typeface="Arial" panose="020B0604020202020204" pitchFamily="34" charset="0"/>
-              </a:rPr>
-              <a:t>đây</a:t>
-            </a:r>
-            <a:r>
-              <a:rPr lang="en-US" sz="3200" b="1" dirty="0">
-                <a:solidFill>
-                  <a:srgbClr val="660033"/>
-                </a:solidFill>
-                <a:latin typeface="Arial" panose="020B0604020202020204" pitchFamily="34" charset="0"/>
-                <a:cs typeface="Arial" panose="020B0604020202020204" pitchFamily="34" charset="0"/>
-              </a:rPr>
-              <a:t> </a:t>
-            </a:r>
-            <a:r>
-              <a:rPr lang="en-US" sz="3200" b="1" dirty="0" err="1">
-                <a:solidFill>
-                  <a:srgbClr val="660033"/>
-                </a:solidFill>
-                <a:latin typeface="Arial" panose="020B0604020202020204" pitchFamily="34" charset="0"/>
-                <a:cs typeface="Arial" panose="020B0604020202020204" pitchFamily="34" charset="0"/>
-              </a:rPr>
-              <a:t>chỉ</a:t>
-            </a:r>
-            <a:r>
-              <a:rPr lang="en-US" sz="3200" b="1" dirty="0">
-                <a:solidFill>
-                  <a:srgbClr val="660033"/>
-                </a:solidFill>
-                <a:latin typeface="Arial" panose="020B0604020202020204" pitchFamily="34" charset="0"/>
-                <a:cs typeface="Arial" panose="020B0604020202020204" pitchFamily="34" charset="0"/>
-              </a:rPr>
-              <a:t> </a:t>
-            </a:r>
-            <a:r>
-              <a:rPr lang="en-US" sz="3200" b="1" dirty="0" err="1">
-                <a:solidFill>
-                  <a:srgbClr val="660033"/>
-                </a:solidFill>
-                <a:latin typeface="Arial" panose="020B0604020202020204" pitchFamily="34" charset="0"/>
-                <a:cs typeface="Arial" panose="020B0604020202020204" pitchFamily="34" charset="0"/>
-              </a:rPr>
-              <a:t>mong</a:t>
-            </a:r>
-            <a:r>
-              <a:rPr lang="en-US" sz="3200" b="1" dirty="0">
-                <a:solidFill>
-                  <a:srgbClr val="660033"/>
-                </a:solidFill>
-                <a:latin typeface="Arial" panose="020B0604020202020204" pitchFamily="34" charset="0"/>
-                <a:cs typeface="Arial" panose="020B0604020202020204" pitchFamily="34" charset="0"/>
-              </a:rPr>
-              <a:t> </a:t>
-            </a:r>
-            <a:r>
-              <a:rPr lang="en-US" sz="3200" b="1" dirty="0" err="1">
-                <a:solidFill>
-                  <a:srgbClr val="660033"/>
-                </a:solidFill>
-                <a:latin typeface="Arial" panose="020B0604020202020204" pitchFamily="34" charset="0"/>
-                <a:cs typeface="Arial" panose="020B0604020202020204" pitchFamily="34" charset="0"/>
-              </a:rPr>
-              <a:t>chờ</a:t>
-            </a:r>
-            <a:endParaRPr lang="en-US" sz="3200" b="1" dirty="0">
+              <a:rPr lang="en-US" sz="2315" b="1" dirty="0">
+                <a:solidFill>
+                  <a:srgbClr val="000066"/>
+                </a:solidFill>
+                <a:latin typeface="Microsoft JhengHei" panose="020B0604030504040204" pitchFamily="34" charset="-120"/>
+                <a:ea typeface="Microsoft JhengHei" panose="020B0604030504040204" pitchFamily="34" charset="-120"/>
+              </a:rPr>
+              <a:t>( </a:t>
+            </a:r>
+            <a:r>
+              <a:rPr lang="zh-CN" altLang="en-US" sz="2315" b="1" dirty="0">
+                <a:solidFill>
+                  <a:srgbClr val="000066"/>
+                </a:solidFill>
+                <a:latin typeface="Microsoft JhengHei" panose="020B0604030504040204" pitchFamily="34" charset="-120"/>
+                <a:ea typeface="Microsoft JhengHei" panose="020B0604030504040204" pitchFamily="34" charset="-120"/>
+              </a:rPr>
+              <a:t>正歌</a:t>
+            </a:r>
+            <a:r>
+              <a:rPr lang="en-US" sz="2315" b="1" dirty="0">
+                <a:solidFill>
+                  <a:srgbClr val="000066"/>
+                </a:solidFill>
+                <a:latin typeface="Microsoft JhengHei" panose="020B0604030504040204" pitchFamily="34" charset="-120"/>
+                <a:ea typeface="Microsoft JhengHei" panose="020B0604030504040204" pitchFamily="34" charset="-120"/>
+              </a:rPr>
+              <a:t> )</a:t>
+            </a:r>
+            <a:endParaRPr lang="vi-VN" sz="2315" b="1" dirty="0">
               <a:solidFill>
-                <a:srgbClr val="660033"/>
+                <a:srgbClr val="000066"/>
               </a:solidFill>
-              <a:latin typeface="Arial" panose="020B0604020202020204" pitchFamily="34" charset="0"/>
-              <a:cs typeface="Arial" panose="020B0604020202020204" pitchFamily="34" charset="0"/>
-            </a:endParaRPr>
-          </a:p>
-          <a:p>
-            <a:pPr algn="ctr"/>
-            <a:r>
-              <a:rPr lang="en-US" sz="3200" b="1" dirty="0" err="1">
-                <a:solidFill>
-                  <a:srgbClr val="660033"/>
-                </a:solidFill>
-                <a:latin typeface="Arial" panose="020B0604020202020204" pitchFamily="34" charset="0"/>
-                <a:cs typeface="Arial" panose="020B0604020202020204" pitchFamily="34" charset="0"/>
-              </a:rPr>
-              <a:t>Được</a:t>
-            </a:r>
-            <a:r>
-              <a:rPr lang="en-US" sz="3200" b="1" dirty="0">
-                <a:solidFill>
-                  <a:srgbClr val="660033"/>
-                </a:solidFill>
-                <a:latin typeface="Arial" panose="020B0604020202020204" pitchFamily="34" charset="0"/>
-                <a:cs typeface="Arial" panose="020B0604020202020204" pitchFamily="34" charset="0"/>
-              </a:rPr>
-              <a:t> </a:t>
-            </a:r>
-            <a:r>
-              <a:rPr lang="en-US" sz="3200" b="1" dirty="0" err="1">
-                <a:solidFill>
-                  <a:srgbClr val="660033"/>
-                </a:solidFill>
-                <a:latin typeface="Arial" panose="020B0604020202020204" pitchFamily="34" charset="0"/>
-                <a:cs typeface="Arial" panose="020B0604020202020204" pitchFamily="34" charset="0"/>
-              </a:rPr>
-              <a:t>đến</a:t>
-            </a:r>
-            <a:r>
-              <a:rPr lang="en-US" sz="3200" b="1" dirty="0">
-                <a:solidFill>
-                  <a:srgbClr val="660033"/>
-                </a:solidFill>
-                <a:latin typeface="Arial" panose="020B0604020202020204" pitchFamily="34" charset="0"/>
-                <a:cs typeface="Arial" panose="020B0604020202020204" pitchFamily="34" charset="0"/>
-              </a:rPr>
-              <a:t> </a:t>
-            </a:r>
-            <a:r>
-              <a:rPr lang="en-US" sz="3200" b="1" dirty="0" err="1">
-                <a:solidFill>
-                  <a:srgbClr val="660033"/>
-                </a:solidFill>
-                <a:latin typeface="Arial" panose="020B0604020202020204" pitchFamily="34" charset="0"/>
-                <a:cs typeface="Arial" panose="020B0604020202020204" pitchFamily="34" charset="0"/>
-              </a:rPr>
-              <a:t>bên</a:t>
-            </a:r>
-            <a:r>
-              <a:rPr lang="en-US" sz="3200" b="1" dirty="0">
-                <a:solidFill>
-                  <a:srgbClr val="660033"/>
-                </a:solidFill>
-                <a:latin typeface="Arial" panose="020B0604020202020204" pitchFamily="34" charset="0"/>
-                <a:cs typeface="Arial" panose="020B0604020202020204" pitchFamily="34" charset="0"/>
-              </a:rPr>
-              <a:t> Cha </a:t>
-            </a:r>
-            <a:r>
-              <a:rPr lang="en-US" sz="3200" b="1" dirty="0" err="1">
-                <a:solidFill>
-                  <a:srgbClr val="660033"/>
-                </a:solidFill>
-                <a:latin typeface="Arial" panose="020B0604020202020204" pitchFamily="34" charset="0"/>
-                <a:cs typeface="Arial" panose="020B0604020202020204" pitchFamily="34" charset="0"/>
-              </a:rPr>
-              <a:t>và</a:t>
-            </a:r>
-            <a:r>
-              <a:rPr lang="en-US" sz="3200" b="1" dirty="0">
-                <a:solidFill>
-                  <a:srgbClr val="660033"/>
-                </a:solidFill>
-                <a:latin typeface="Arial" panose="020B0604020202020204" pitchFamily="34" charset="0"/>
-                <a:cs typeface="Arial" panose="020B0604020202020204" pitchFamily="34" charset="0"/>
-              </a:rPr>
-              <a:t> </a:t>
-            </a:r>
-            <a:r>
-              <a:rPr lang="en-US" sz="3200" b="1" dirty="0" err="1">
-                <a:solidFill>
-                  <a:srgbClr val="660033"/>
-                </a:solidFill>
-                <a:latin typeface="Arial" panose="020B0604020202020204" pitchFamily="34" charset="0"/>
-                <a:cs typeface="Arial" panose="020B0604020202020204" pitchFamily="34" charset="0"/>
-              </a:rPr>
-              <a:t>thờ</a:t>
-            </a:r>
-            <a:r>
-              <a:rPr lang="en-US" sz="3200" b="1" dirty="0">
-                <a:solidFill>
-                  <a:srgbClr val="660033"/>
-                </a:solidFill>
-                <a:latin typeface="Arial" panose="020B0604020202020204" pitchFamily="34" charset="0"/>
-                <a:cs typeface="Arial" panose="020B0604020202020204" pitchFamily="34" charset="0"/>
-              </a:rPr>
-              <a:t> </a:t>
-            </a:r>
-            <a:r>
-              <a:rPr lang="en-US" sz="3200" b="1" dirty="0" err="1">
-                <a:solidFill>
-                  <a:srgbClr val="660033"/>
-                </a:solidFill>
-                <a:latin typeface="Arial" panose="020B0604020202020204" pitchFamily="34" charset="0"/>
-                <a:cs typeface="Arial" panose="020B0604020202020204" pitchFamily="34" charset="0"/>
-              </a:rPr>
-              <a:t>kính</a:t>
-            </a:r>
-            <a:r>
-              <a:rPr lang="en-US" sz="3200" b="1" dirty="0">
-                <a:solidFill>
-                  <a:srgbClr val="660033"/>
-                </a:solidFill>
-                <a:latin typeface="Arial" panose="020B0604020202020204" pitchFamily="34" charset="0"/>
-                <a:cs typeface="Arial" panose="020B0604020202020204" pitchFamily="34" charset="0"/>
-              </a:rPr>
-              <a:t> Cha </a:t>
-            </a:r>
-            <a:r>
-              <a:rPr lang="en-US" sz="3200" b="1" dirty="0" err="1">
-                <a:solidFill>
-                  <a:srgbClr val="660033"/>
-                </a:solidFill>
-                <a:latin typeface="Arial" panose="020B0604020202020204" pitchFamily="34" charset="0"/>
-                <a:cs typeface="Arial" panose="020B0604020202020204" pitchFamily="34" charset="0"/>
-              </a:rPr>
-              <a:t>đời</a:t>
-            </a:r>
-            <a:r>
-              <a:rPr lang="en-US" sz="3200" b="1" dirty="0">
-                <a:solidFill>
-                  <a:srgbClr val="660033"/>
-                </a:solidFill>
-                <a:latin typeface="Arial" panose="020B0604020202020204" pitchFamily="34" charset="0"/>
-                <a:cs typeface="Arial" panose="020B0604020202020204" pitchFamily="34" charset="0"/>
-              </a:rPr>
-              <a:t> </a:t>
-            </a:r>
-            <a:r>
-              <a:rPr lang="en-US" sz="3200" b="1" dirty="0" err="1">
-                <a:solidFill>
-                  <a:srgbClr val="660033"/>
-                </a:solidFill>
-                <a:latin typeface="Arial" panose="020B0604020202020204" pitchFamily="34" charset="0"/>
-                <a:cs typeface="Arial" panose="020B0604020202020204" pitchFamily="34" charset="0"/>
-              </a:rPr>
-              <a:t>đời</a:t>
-            </a:r>
-            <a:endParaRPr lang="en-US" sz="3200" b="1" dirty="0">
-              <a:solidFill>
-                <a:srgbClr val="660033"/>
-              </a:solidFill>
-              <a:latin typeface="Arial" panose="020B0604020202020204" pitchFamily="34" charset="0"/>
-              <a:cs typeface="Arial" panose="020B0604020202020204" pitchFamily="34" charset="0"/>
+              <a:ea typeface="Microsoft JhengHei" panose="020B0604030504040204" pitchFamily="34" charset="-120"/>
             </a:endParaRPr>
           </a:p>
         </p:txBody>
@@ -4306,40 +3678,13 @@
     </p:spTree>
     <p:extLst>
       <p:ext uri="{BB962C8B-B14F-4D97-AF65-F5344CB8AC3E}">
-        <p14:creationId xmlns:p14="http://schemas.microsoft.com/office/powerpoint/2010/main" val="3598058818"/>
+        <p14:creationId xmlns:p14="http://schemas.microsoft.com/office/powerpoint/2010/main" val="1297194273"/>
       </p:ext>
     </p:extLst>
   </p:cSld>
   <p:clrMapOvr>
     <a:masterClrMapping/>
   </p:clrMapOvr>
-  <p:timing>
-    <p:tnLst>
-      <p:par>
-        <p:cTn id="1" dur="indefinite" restart="never" nodeType="tmRoot">
-          <p:childTnLst>
-            <p:seq>
-              <p:cTn id="2" dur="indefinite" nodeType="mainSeq"/>
-              <p:prevCondLst>
-                <p:cond evt="onPrev" delay="0">
-                  <p:tgtEl>
-                    <p:sldTgt/>
-                  </p:tgtEl>
-                </p:cond>
-              </p:prevCondLst>
-              <p:nextCondLst>
-                <p:cond evt="onNext" delay="0">
-                  <p:tgtEl>
-                    <p:sldTgt/>
-                  </p:tgtEl>
-                </p:cond>
-              </p:nextCondLst>
-            </p:seq>
-          </p:childTnLst>
-        </p:cTn>
-      </p:par>
-    </p:tnLst>
-  </p:timing>
 </p:sld>
 </file>
 
@@ -4348,7 +3693,13 @@
   <p:cSld>
     <p:spTree>
       <p:nvGrpSpPr>
-        <p:cNvPr id="1" name=""/>
+        <p:cNvPr id="1" name="">
+          <a:extLst>
+            <a:ext uri="{FF2B5EF4-FFF2-40B4-BE49-F238E27FC236}">
+              <a16:creationId xmlns:a16="http://schemas.microsoft.com/office/drawing/2014/main" id="{7EC966FD-B33E-5569-30CB-09EAB4DDE2E8}"/>
+            </a:ext>
+          </a:extLst>
+        </p:cNvPr>
         <p:cNvGrpSpPr/>
         <p:nvPr/>
       </p:nvGrpSpPr>
@@ -4362,453 +3713,294 @@
       </p:grpSpPr>
       <p:sp>
         <p:nvSpPr>
-          <p:cNvPr id="41" name="TextShape 1"/>
+          <p:cNvPr id="6" name="內容版面配置區 4">
+            <a:extLst>
+              <a:ext uri="{FF2B5EF4-FFF2-40B4-BE49-F238E27FC236}">
+                <a16:creationId xmlns:a16="http://schemas.microsoft.com/office/drawing/2014/main" id="{BBC022AF-831A-2979-BA9C-A32BD8486667}"/>
+              </a:ext>
+            </a:extLst>
+          </p:cNvPr>
+          <p:cNvSpPr>
+            <a:spLocks noGrp="1"/>
+          </p:cNvSpPr>
+          <p:nvPr>
+            <p:ph idx="1"/>
+          </p:nvPr>
+        </p:nvSpPr>
+        <p:spPr>
+          <a:xfrm>
+            <a:off x="-1" y="1767434"/>
+            <a:ext cx="10080625" cy="1089939"/>
+          </a:xfrm>
+        </p:spPr>
+        <p:txBody>
+          <a:bodyPr anchor="ctr">
+            <a:normAutofit/>
+          </a:bodyPr>
+          <a:lstStyle/>
+          <a:p>
+            <a:pPr algn="ctr">
+              <a:buNone/>
+            </a:pPr>
+            <a:r>
+              <a:rPr lang="zh-TW" altLang="en-US" sz="5400" b="1" dirty="0">
+                <a:solidFill>
+                  <a:srgbClr val="000066"/>
+                </a:solidFill>
+                <a:latin typeface="微軟正黑體" pitchFamily="34" charset="-120"/>
+                <a:ea typeface="微軟正黑體" pitchFamily="34" charset="-120"/>
+              </a:rPr>
+              <a:t>如鹿切慕溪水</a:t>
+            </a:r>
+          </a:p>
+        </p:txBody>
+      </p:sp>
+      <p:sp>
+        <p:nvSpPr>
+          <p:cNvPr id="7" name="內容版面配置區 4">
+            <a:extLst>
+              <a:ext uri="{FF2B5EF4-FFF2-40B4-BE49-F238E27FC236}">
+                <a16:creationId xmlns:a16="http://schemas.microsoft.com/office/drawing/2014/main" id="{7CD6F76F-7168-505F-CF43-D1531C3F3C43}"/>
+              </a:ext>
+            </a:extLst>
+          </p:cNvPr>
+          <p:cNvSpPr txBox="1">
+            <a:spLocks/>
+          </p:cNvSpPr>
+          <p:nvPr/>
+        </p:nvSpPr>
+        <p:spPr>
+          <a:xfrm>
+            <a:off x="-1" y="2552543"/>
+            <a:ext cx="10080625" cy="1089939"/>
+          </a:xfrm>
+          <a:prstGeom prst="rect">
+            <a:avLst/>
+          </a:prstGeom>
+        </p:spPr>
+        <p:txBody>
+          <a:bodyPr vert="horz" lIns="75605" tIns="37802" rIns="75605" bIns="37802" rtlCol="0" anchor="ctr">
+            <a:normAutofit/>
+          </a:bodyPr>
+          <a:lstStyle>
+            <a:lvl1pPr marL="457189" indent="-457189" algn="l" defTabSz="1219170" rtl="0" eaLnBrk="1" latinLnBrk="0" hangingPunct="1">
+              <a:spcBef>
+                <a:spcPct val="20000"/>
+              </a:spcBef>
+              <a:buFont typeface="Arial" pitchFamily="34" charset="0"/>
+              <a:buChar char="•"/>
+              <a:defRPr sz="4267" kern="1200">
+                <a:solidFill>
+                  <a:schemeClr val="tx1"/>
+                </a:solidFill>
+                <a:latin typeface="+mn-lt"/>
+                <a:ea typeface="+mn-ea"/>
+                <a:cs typeface="+mn-cs"/>
+              </a:defRPr>
+            </a:lvl1pPr>
+            <a:lvl2pPr marL="990575" indent="-380990" algn="l" defTabSz="1219170" rtl="0" eaLnBrk="1" latinLnBrk="0" hangingPunct="1">
+              <a:spcBef>
+                <a:spcPct val="20000"/>
+              </a:spcBef>
+              <a:buFont typeface="Arial" pitchFamily="34" charset="0"/>
+              <a:buChar char="–"/>
+              <a:defRPr sz="3733" kern="1200">
+                <a:solidFill>
+                  <a:schemeClr val="tx1"/>
+                </a:solidFill>
+                <a:latin typeface="+mn-lt"/>
+                <a:ea typeface="+mn-ea"/>
+                <a:cs typeface="+mn-cs"/>
+              </a:defRPr>
+            </a:lvl2pPr>
+            <a:lvl3pPr marL="1523962" indent="-304792" algn="l" defTabSz="1219170" rtl="0" eaLnBrk="1" latinLnBrk="0" hangingPunct="1">
+              <a:spcBef>
+                <a:spcPct val="20000"/>
+              </a:spcBef>
+              <a:buFont typeface="Arial" pitchFamily="34" charset="0"/>
+              <a:buChar char="•"/>
+              <a:defRPr sz="3200" kern="1200">
+                <a:solidFill>
+                  <a:schemeClr val="tx1"/>
+                </a:solidFill>
+                <a:latin typeface="+mn-lt"/>
+                <a:ea typeface="+mn-ea"/>
+                <a:cs typeface="+mn-cs"/>
+              </a:defRPr>
+            </a:lvl3pPr>
+            <a:lvl4pPr marL="2133547" indent="-304792" algn="l" defTabSz="1219170" rtl="0" eaLnBrk="1" latinLnBrk="0" hangingPunct="1">
+              <a:spcBef>
+                <a:spcPct val="20000"/>
+              </a:spcBef>
+              <a:buFont typeface="Arial" pitchFamily="34" charset="0"/>
+              <a:buChar char="–"/>
+              <a:defRPr sz="2667" kern="1200">
+                <a:solidFill>
+                  <a:schemeClr val="tx1"/>
+                </a:solidFill>
+                <a:latin typeface="+mn-lt"/>
+                <a:ea typeface="+mn-ea"/>
+                <a:cs typeface="+mn-cs"/>
+              </a:defRPr>
+            </a:lvl4pPr>
+            <a:lvl5pPr marL="2743131" indent="-304792" algn="l" defTabSz="1219170" rtl="0" eaLnBrk="1" latinLnBrk="0" hangingPunct="1">
+              <a:spcBef>
+                <a:spcPct val="20000"/>
+              </a:spcBef>
+              <a:buFont typeface="Arial" pitchFamily="34" charset="0"/>
+              <a:buChar char="»"/>
+              <a:defRPr sz="2667" kern="1200">
+                <a:solidFill>
+                  <a:schemeClr val="tx1"/>
+                </a:solidFill>
+                <a:latin typeface="+mn-lt"/>
+                <a:ea typeface="+mn-ea"/>
+                <a:cs typeface="+mn-cs"/>
+              </a:defRPr>
+            </a:lvl5pPr>
+            <a:lvl6pPr marL="3352716" indent="-304792" algn="l" defTabSz="1219170" rtl="0" eaLnBrk="1" latinLnBrk="0" hangingPunct="1">
+              <a:spcBef>
+                <a:spcPct val="20000"/>
+              </a:spcBef>
+              <a:buFont typeface="Arial" pitchFamily="34" charset="0"/>
+              <a:buChar char="•"/>
+              <a:defRPr sz="2667" kern="1200">
+                <a:solidFill>
+                  <a:schemeClr val="tx1"/>
+                </a:solidFill>
+                <a:latin typeface="+mn-lt"/>
+                <a:ea typeface="+mn-ea"/>
+                <a:cs typeface="+mn-cs"/>
+              </a:defRPr>
+            </a:lvl6pPr>
+            <a:lvl7pPr marL="3962301" indent="-304792" algn="l" defTabSz="1219170" rtl="0" eaLnBrk="1" latinLnBrk="0" hangingPunct="1">
+              <a:spcBef>
+                <a:spcPct val="20000"/>
+              </a:spcBef>
+              <a:buFont typeface="Arial" pitchFamily="34" charset="0"/>
+              <a:buChar char="•"/>
+              <a:defRPr sz="2667" kern="1200">
+                <a:solidFill>
+                  <a:schemeClr val="tx1"/>
+                </a:solidFill>
+                <a:latin typeface="+mn-lt"/>
+                <a:ea typeface="+mn-ea"/>
+                <a:cs typeface="+mn-cs"/>
+              </a:defRPr>
+            </a:lvl7pPr>
+            <a:lvl8pPr marL="4571886" indent="-304792" algn="l" defTabSz="1219170" rtl="0" eaLnBrk="1" latinLnBrk="0" hangingPunct="1">
+              <a:spcBef>
+                <a:spcPct val="20000"/>
+              </a:spcBef>
+              <a:buFont typeface="Arial" pitchFamily="34" charset="0"/>
+              <a:buChar char="•"/>
+              <a:defRPr sz="2667" kern="1200">
+                <a:solidFill>
+                  <a:schemeClr val="tx1"/>
+                </a:solidFill>
+                <a:latin typeface="+mn-lt"/>
+                <a:ea typeface="+mn-ea"/>
+                <a:cs typeface="+mn-cs"/>
+              </a:defRPr>
+            </a:lvl8pPr>
+            <a:lvl9pPr marL="5181470" indent="-304792" algn="l" defTabSz="1219170" rtl="0" eaLnBrk="1" latinLnBrk="0" hangingPunct="1">
+              <a:spcBef>
+                <a:spcPct val="20000"/>
+              </a:spcBef>
+              <a:buFont typeface="Arial" pitchFamily="34" charset="0"/>
+              <a:buChar char="•"/>
+              <a:defRPr sz="2667" kern="1200">
+                <a:solidFill>
+                  <a:schemeClr val="tx1"/>
+                </a:solidFill>
+                <a:latin typeface="+mn-lt"/>
+                <a:ea typeface="+mn-ea"/>
+                <a:cs typeface="+mn-cs"/>
+              </a:defRPr>
+            </a:lvl9pPr>
+          </a:lstStyle>
+          <a:p>
+            <a:pPr marL="0" indent="0" algn="ctr">
+              <a:buNone/>
+            </a:pPr>
+            <a:r>
+              <a:rPr lang="vi-VN" sz="3307" b="1" dirty="0">
+                <a:solidFill>
+                  <a:srgbClr val="660033"/>
+                </a:solidFill>
+                <a:latin typeface="+mj-lt"/>
+                <a:ea typeface="微軟正黑體" pitchFamily="34" charset="-120"/>
+                <a:cs typeface="Calibri" panose="020F0502020204030204" pitchFamily="34" charset="0"/>
+              </a:rPr>
+              <a:t>Như con thèm khát chính Chúa Cha toàn năng</a:t>
+            </a:r>
+          </a:p>
+        </p:txBody>
+      </p:sp>
+      <p:sp>
+        <p:nvSpPr>
+          <p:cNvPr id="8" name="TextBox 7">
+            <a:extLst>
+              <a:ext uri="{FF2B5EF4-FFF2-40B4-BE49-F238E27FC236}">
+                <a16:creationId xmlns:a16="http://schemas.microsoft.com/office/drawing/2014/main" id="{05E45F9B-7780-4B20-9884-8AF0B0E0EAAF}"/>
+              </a:ext>
+            </a:extLst>
+          </p:cNvPr>
           <p:cNvSpPr txBox="1"/>
           <p:nvPr/>
         </p:nvSpPr>
         <p:spPr>
           <a:xfrm>
-            <a:off x="0" y="182880"/>
-            <a:ext cx="10080000" cy="1116000"/>
+            <a:off x="-1" y="4343568"/>
+            <a:ext cx="10080625" cy="448584"/>
           </a:xfrm>
           <a:prstGeom prst="rect">
             <a:avLst/>
           </a:prstGeom>
           <a:noFill/>
-          <a:ln>
-            <a:noFill/>
-          </a:ln>
         </p:spPr>
         <p:txBody>
-          <a:bodyPr lIns="0" tIns="0" rIns="0" bIns="0" anchor="ctr"/>
+          <a:bodyPr wrap="square" rtlCol="0">
+            <a:spAutoFit/>
+          </a:bodyPr>
           <a:lstStyle/>
           <a:p>
             <a:pPr algn="ctr"/>
             <a:r>
-              <a:rPr lang="zh-TW" altLang="en-US" sz="4000" b="1" dirty="0">
+              <a:rPr lang="en-US" sz="2315" b="1" dirty="0">
                 <a:solidFill>
                   <a:srgbClr val="000066"/>
                 </a:solidFill>
-                <a:latin typeface="微軟正黑體" pitchFamily="34" charset="-120"/>
-                <a:ea typeface="微軟正黑體" pitchFamily="34" charset="-120"/>
-              </a:rPr>
-              <a:t>如鹿切慕溪水</a:t>
-            </a:r>
-            <a:r>
-              <a:rPr dirty="0"/>
-              <a:t/>
-            </a:r>
-            <a:br>
-              <a:rPr dirty="0"/>
-            </a:br>
-            <a:r>
-              <a:rPr lang="en-US" sz="2800" b="1" dirty="0" smtClean="0">
-                <a:solidFill>
-                  <a:srgbClr val="660033"/>
-                </a:solidFill>
-                <a:latin typeface="Arial" panose="020B0604020202020204" pitchFamily="34" charset="0"/>
-                <a:cs typeface="Arial" panose="020B0604020202020204" pitchFamily="34" charset="0"/>
-              </a:rPr>
-              <a:t>KHÁT KHAO DÒNG NƯỚC</a:t>
-            </a:r>
-            <a:endParaRPr lang="en-US" sz="4000" b="1" strike="noStrike" spc="-1" dirty="0">
-              <a:solidFill>
-                <a:srgbClr val="660033"/>
-              </a:solidFill>
-              <a:latin typeface="Arial" panose="020B0604020202020204" pitchFamily="34" charset="0"/>
-              <a:cs typeface="Arial" panose="020B0604020202020204" pitchFamily="34" charset="0"/>
-            </a:endParaRPr>
-          </a:p>
-        </p:txBody>
-      </p:sp>
-      <p:sp>
-        <p:nvSpPr>
-          <p:cNvPr id="42" name="TextShape 2"/>
-          <p:cNvSpPr txBox="1"/>
-          <p:nvPr/>
-        </p:nvSpPr>
-        <p:spPr>
-          <a:xfrm>
-            <a:off x="0" y="1449000"/>
-            <a:ext cx="10080000" cy="2231640"/>
-          </a:xfrm>
-          <a:prstGeom prst="rect">
-            <a:avLst/>
-          </a:prstGeom>
-          <a:noFill/>
-          <a:ln>
-            <a:noFill/>
-          </a:ln>
-        </p:spPr>
-        <p:txBody>
-          <a:bodyPr lIns="0" tIns="0" rIns="0" bIns="0" anchor="ctr"/>
-          <a:lstStyle/>
-          <a:p>
-            <a:pPr algn="ctr">
-              <a:buNone/>
-            </a:pPr>
-            <a:r>
-              <a:rPr lang="zh-TW" altLang="en-US" sz="4800" b="1" dirty="0">
+                <a:latin typeface="Microsoft JhengHei" panose="020B0604030504040204" pitchFamily="34" charset="-120"/>
+                <a:ea typeface="Microsoft JhengHei" panose="020B0604030504040204" pitchFamily="34" charset="-120"/>
+              </a:rPr>
+              <a:t>( </a:t>
+            </a:r>
+            <a:r>
+              <a:rPr lang="zh-CN" altLang="en-US" sz="2315" b="1" dirty="0">
                 <a:solidFill>
                   <a:srgbClr val="000066"/>
                 </a:solidFill>
-                <a:latin typeface="微軟正黑體" pitchFamily="34" charset="-120"/>
-                <a:ea typeface="微軟正黑體" pitchFamily="34" charset="-120"/>
-              </a:rPr>
-              <a:t>你是我的力量盾牌</a:t>
-            </a:r>
-            <a:endParaRPr lang="en-US" altLang="zh-TW" sz="4800" b="1" dirty="0">
+                <a:latin typeface="Microsoft JhengHei" panose="020B0604030504040204" pitchFamily="34" charset="-120"/>
+                <a:ea typeface="Microsoft JhengHei" panose="020B0604030504040204" pitchFamily="34" charset="-120"/>
+              </a:rPr>
+              <a:t>正歌</a:t>
+            </a:r>
+            <a:r>
+              <a:rPr lang="en-US" sz="2315" b="1" dirty="0">
+                <a:solidFill>
+                  <a:srgbClr val="000066"/>
+                </a:solidFill>
+                <a:latin typeface="Microsoft JhengHei" panose="020B0604030504040204" pitchFamily="34" charset="-120"/>
+                <a:ea typeface="Microsoft JhengHei" panose="020B0604030504040204" pitchFamily="34" charset="-120"/>
+              </a:rPr>
+              <a:t> )</a:t>
+            </a:r>
+            <a:endParaRPr lang="vi-VN" sz="2315" b="1" dirty="0">
               <a:solidFill>
                 <a:srgbClr val="000066"/>
               </a:solidFill>
-              <a:latin typeface="微軟正黑體" pitchFamily="34" charset="-120"/>
-              <a:ea typeface="微軟正黑體" pitchFamily="34" charset="-120"/>
-            </a:endParaRPr>
-          </a:p>
-          <a:p>
-            <a:pPr algn="ctr">
-              <a:buNone/>
-            </a:pPr>
-            <a:r>
-              <a:rPr lang="zh-TW" altLang="en-US" sz="4800" b="1" dirty="0">
-                <a:solidFill>
-                  <a:srgbClr val="000066"/>
-                </a:solidFill>
-                <a:latin typeface="微軟正黑體" pitchFamily="34" charset="-120"/>
-                <a:ea typeface="微軟正黑體" pitchFamily="34" charset="-120"/>
-              </a:rPr>
-              <a:t>我靈單單降服於你</a:t>
-            </a:r>
-            <a:endParaRPr lang="en-US" altLang="zh-TW" sz="4800" b="1" dirty="0">
-              <a:solidFill>
-                <a:srgbClr val="000066"/>
-              </a:solidFill>
-              <a:latin typeface="微軟正黑體" pitchFamily="34" charset="-120"/>
-              <a:ea typeface="微軟正黑體" pitchFamily="34" charset="-120"/>
-            </a:endParaRPr>
-          </a:p>
-        </p:txBody>
-      </p:sp>
-      <p:sp>
-        <p:nvSpPr>
-          <p:cNvPr id="43" name="TextShape 3"/>
-          <p:cNvSpPr txBox="1"/>
-          <p:nvPr/>
-        </p:nvSpPr>
-        <p:spPr>
-          <a:xfrm>
-            <a:off x="0" y="3140075"/>
-            <a:ext cx="10080000" cy="2011680"/>
-          </a:xfrm>
-          <a:prstGeom prst="rect">
-            <a:avLst/>
-          </a:prstGeom>
-          <a:noFill/>
-          <a:ln>
-            <a:noFill/>
-          </a:ln>
-        </p:spPr>
-        <p:txBody>
-          <a:bodyPr lIns="0" tIns="0" rIns="0" bIns="0" anchor="ctr"/>
-          <a:lstStyle/>
-          <a:p>
-            <a:pPr algn="ctr"/>
-            <a:r>
-              <a:rPr lang="en-US" sz="3200" b="1" dirty="0" err="1">
-                <a:solidFill>
-                  <a:srgbClr val="660033"/>
-                </a:solidFill>
-                <a:latin typeface="Arial" panose="020B0604020202020204" pitchFamily="34" charset="0"/>
-                <a:cs typeface="Arial" panose="020B0604020202020204" pitchFamily="34" charset="0"/>
-              </a:rPr>
-              <a:t>Tâm</a:t>
-            </a:r>
-            <a:r>
-              <a:rPr lang="en-US" sz="3200" b="1" dirty="0">
-                <a:solidFill>
-                  <a:srgbClr val="660033"/>
-                </a:solidFill>
-                <a:latin typeface="Arial" panose="020B0604020202020204" pitchFamily="34" charset="0"/>
-                <a:cs typeface="Arial" panose="020B0604020202020204" pitchFamily="34" charset="0"/>
-              </a:rPr>
-              <a:t> </a:t>
-            </a:r>
-            <a:r>
-              <a:rPr lang="en-US" sz="3200" b="1" dirty="0" err="1">
-                <a:solidFill>
-                  <a:srgbClr val="660033"/>
-                </a:solidFill>
-                <a:latin typeface="Arial" panose="020B0604020202020204" pitchFamily="34" charset="0"/>
-                <a:cs typeface="Arial" panose="020B0604020202020204" pitchFamily="34" charset="0"/>
-              </a:rPr>
-              <a:t>linh</a:t>
-            </a:r>
-            <a:r>
-              <a:rPr lang="en-US" sz="3200" b="1" dirty="0">
-                <a:solidFill>
-                  <a:srgbClr val="660033"/>
-                </a:solidFill>
-                <a:latin typeface="Arial" panose="020B0604020202020204" pitchFamily="34" charset="0"/>
-                <a:cs typeface="Arial" panose="020B0604020202020204" pitchFamily="34" charset="0"/>
-              </a:rPr>
-              <a:t> con </a:t>
-            </a:r>
-            <a:r>
-              <a:rPr lang="en-US" sz="3200" b="1" dirty="0" err="1">
-                <a:solidFill>
-                  <a:srgbClr val="660033"/>
-                </a:solidFill>
-                <a:latin typeface="Arial" panose="020B0604020202020204" pitchFamily="34" charset="0"/>
-                <a:cs typeface="Arial" panose="020B0604020202020204" pitchFamily="34" charset="0"/>
-              </a:rPr>
-              <a:t>chỉ</a:t>
-            </a:r>
-            <a:r>
-              <a:rPr lang="en-US" sz="3200" b="1" dirty="0">
-                <a:solidFill>
-                  <a:srgbClr val="660033"/>
-                </a:solidFill>
-                <a:latin typeface="Arial" panose="020B0604020202020204" pitchFamily="34" charset="0"/>
-                <a:cs typeface="Arial" panose="020B0604020202020204" pitchFamily="34" charset="0"/>
-              </a:rPr>
-              <a:t> </a:t>
-            </a:r>
-            <a:r>
-              <a:rPr lang="en-US" sz="3200" b="1" dirty="0" err="1">
-                <a:solidFill>
-                  <a:srgbClr val="660033"/>
-                </a:solidFill>
-                <a:latin typeface="Arial" panose="020B0604020202020204" pitchFamily="34" charset="0"/>
-                <a:cs typeface="Arial" panose="020B0604020202020204" pitchFamily="34" charset="0"/>
-              </a:rPr>
-              <a:t>mong</a:t>
-            </a:r>
-            <a:r>
-              <a:rPr lang="en-US" sz="3200" b="1" dirty="0">
-                <a:solidFill>
-                  <a:srgbClr val="660033"/>
-                </a:solidFill>
-                <a:latin typeface="Arial" panose="020B0604020202020204" pitchFamily="34" charset="0"/>
-                <a:cs typeface="Arial" panose="020B0604020202020204" pitchFamily="34" charset="0"/>
-              </a:rPr>
-              <a:t> </a:t>
-            </a:r>
-            <a:r>
-              <a:rPr lang="en-US" sz="3200" b="1" dirty="0" err="1">
-                <a:solidFill>
-                  <a:srgbClr val="660033"/>
-                </a:solidFill>
-                <a:latin typeface="Arial" panose="020B0604020202020204" pitchFamily="34" charset="0"/>
-                <a:cs typeface="Arial" panose="020B0604020202020204" pitchFamily="34" charset="0"/>
-              </a:rPr>
-              <a:t>nương</a:t>
-            </a:r>
-            <a:r>
-              <a:rPr lang="en-US" sz="3200" b="1" dirty="0">
-                <a:solidFill>
-                  <a:srgbClr val="660033"/>
-                </a:solidFill>
-                <a:latin typeface="Arial" panose="020B0604020202020204" pitchFamily="34" charset="0"/>
-                <a:cs typeface="Arial" panose="020B0604020202020204" pitchFamily="34" charset="0"/>
-              </a:rPr>
-              <a:t> </a:t>
-            </a:r>
-            <a:r>
-              <a:rPr lang="en-US" sz="3200" b="1" dirty="0" err="1">
-                <a:solidFill>
-                  <a:srgbClr val="660033"/>
-                </a:solidFill>
-                <a:latin typeface="Arial" panose="020B0604020202020204" pitchFamily="34" charset="0"/>
-                <a:cs typeface="Arial" panose="020B0604020202020204" pitchFamily="34" charset="0"/>
-              </a:rPr>
-              <a:t>nơi</a:t>
-            </a:r>
-            <a:r>
-              <a:rPr lang="en-US" sz="3200" b="1" dirty="0">
-                <a:solidFill>
-                  <a:srgbClr val="660033"/>
-                </a:solidFill>
-                <a:latin typeface="Arial" panose="020B0604020202020204" pitchFamily="34" charset="0"/>
-                <a:cs typeface="Arial" panose="020B0604020202020204" pitchFamily="34" charset="0"/>
-              </a:rPr>
-              <a:t> </a:t>
-            </a:r>
-            <a:r>
-              <a:rPr lang="en-US" sz="3200" b="1" dirty="0" err="1">
-                <a:solidFill>
-                  <a:srgbClr val="660033"/>
-                </a:solidFill>
-                <a:latin typeface="Arial" panose="020B0604020202020204" pitchFamily="34" charset="0"/>
-                <a:cs typeface="Arial" panose="020B0604020202020204" pitchFamily="34" charset="0"/>
-              </a:rPr>
-              <a:t>Ngài</a:t>
-            </a:r>
-            <a:endParaRPr lang="en-US" sz="3200" b="1" dirty="0">
-              <a:solidFill>
-                <a:srgbClr val="660033"/>
-              </a:solidFill>
-              <a:latin typeface="Arial" panose="020B0604020202020204" pitchFamily="34" charset="0"/>
-              <a:cs typeface="Arial" panose="020B0604020202020204" pitchFamily="34" charset="0"/>
-            </a:endParaRPr>
-          </a:p>
-          <a:p>
-            <a:pPr algn="ctr"/>
-            <a:r>
-              <a:rPr lang="en-US" sz="3200" b="1" dirty="0" err="1">
-                <a:solidFill>
-                  <a:srgbClr val="660033"/>
-                </a:solidFill>
-                <a:latin typeface="Arial" panose="020B0604020202020204" pitchFamily="34" charset="0"/>
-                <a:cs typeface="Arial" panose="020B0604020202020204" pitchFamily="34" charset="0"/>
-              </a:rPr>
-              <a:t>Vì</a:t>
-            </a:r>
-            <a:r>
-              <a:rPr lang="en-US" sz="3200" b="1" dirty="0">
-                <a:solidFill>
-                  <a:srgbClr val="660033"/>
-                </a:solidFill>
-                <a:latin typeface="Arial" panose="020B0604020202020204" pitchFamily="34" charset="0"/>
-                <a:cs typeface="Arial" panose="020B0604020202020204" pitchFamily="34" charset="0"/>
-              </a:rPr>
-              <a:t> </a:t>
-            </a:r>
-            <a:r>
-              <a:rPr lang="en-US" sz="3200" b="1" dirty="0" err="1">
-                <a:solidFill>
-                  <a:srgbClr val="660033"/>
-                </a:solidFill>
-                <a:latin typeface="Arial" panose="020B0604020202020204" pitchFamily="34" charset="0"/>
-                <a:cs typeface="Arial" panose="020B0604020202020204" pitchFamily="34" charset="0"/>
-              </a:rPr>
-              <a:t>chính</a:t>
-            </a:r>
-            <a:r>
-              <a:rPr lang="en-US" sz="3200" b="1" dirty="0">
-                <a:solidFill>
-                  <a:srgbClr val="660033"/>
-                </a:solidFill>
-                <a:latin typeface="Arial" panose="020B0604020202020204" pitchFamily="34" charset="0"/>
-                <a:cs typeface="Arial" panose="020B0604020202020204" pitchFamily="34" charset="0"/>
-              </a:rPr>
-              <a:t> </a:t>
-            </a:r>
-            <a:r>
-              <a:rPr lang="en-US" sz="3200" b="1" dirty="0" err="1">
-                <a:solidFill>
-                  <a:srgbClr val="660033"/>
-                </a:solidFill>
-                <a:latin typeface="Arial" panose="020B0604020202020204" pitchFamily="34" charset="0"/>
-                <a:cs typeface="Arial" panose="020B0604020202020204" pitchFamily="34" charset="0"/>
-              </a:rPr>
-              <a:t>sức</a:t>
-            </a:r>
-            <a:r>
-              <a:rPr lang="en-US" sz="3200" b="1" dirty="0">
-                <a:solidFill>
-                  <a:srgbClr val="660033"/>
-                </a:solidFill>
-                <a:latin typeface="Arial" panose="020B0604020202020204" pitchFamily="34" charset="0"/>
-                <a:cs typeface="Arial" panose="020B0604020202020204" pitchFamily="34" charset="0"/>
-              </a:rPr>
-              <a:t> </a:t>
-            </a:r>
-            <a:r>
-              <a:rPr lang="en-US" sz="3200" b="1" dirty="0" err="1">
-                <a:solidFill>
-                  <a:srgbClr val="660033"/>
-                </a:solidFill>
-                <a:latin typeface="Arial" panose="020B0604020202020204" pitchFamily="34" charset="0"/>
-                <a:cs typeface="Arial" panose="020B0604020202020204" pitchFamily="34" charset="0"/>
-              </a:rPr>
-              <a:t>Chúa</a:t>
-            </a:r>
-            <a:r>
-              <a:rPr lang="en-US" sz="3200" b="1" dirty="0">
-                <a:solidFill>
-                  <a:srgbClr val="660033"/>
-                </a:solidFill>
-                <a:latin typeface="Arial" panose="020B0604020202020204" pitchFamily="34" charset="0"/>
-                <a:cs typeface="Arial" panose="020B0604020202020204" pitchFamily="34" charset="0"/>
-              </a:rPr>
-              <a:t> </a:t>
-            </a:r>
-            <a:r>
-              <a:rPr lang="en-US" sz="3200" b="1" dirty="0" err="1">
-                <a:solidFill>
-                  <a:srgbClr val="660033"/>
-                </a:solidFill>
-                <a:latin typeface="Arial" panose="020B0604020202020204" pitchFamily="34" charset="0"/>
-                <a:cs typeface="Arial" panose="020B0604020202020204" pitchFamily="34" charset="0"/>
-              </a:rPr>
-              <a:t>dẫn</a:t>
-            </a:r>
-            <a:r>
-              <a:rPr lang="en-US" sz="3200" b="1" dirty="0">
-                <a:solidFill>
-                  <a:srgbClr val="660033"/>
-                </a:solidFill>
-                <a:latin typeface="Arial" panose="020B0604020202020204" pitchFamily="34" charset="0"/>
-                <a:cs typeface="Arial" panose="020B0604020202020204" pitchFamily="34" charset="0"/>
-              </a:rPr>
-              <a:t> </a:t>
-            </a:r>
-            <a:r>
-              <a:rPr lang="en-US" sz="3200" b="1" dirty="0" err="1">
-                <a:solidFill>
-                  <a:srgbClr val="660033"/>
-                </a:solidFill>
-                <a:latin typeface="Arial" panose="020B0604020202020204" pitchFamily="34" charset="0"/>
-                <a:cs typeface="Arial" panose="020B0604020202020204" pitchFamily="34" charset="0"/>
-              </a:rPr>
-              <a:t>đưa</a:t>
-            </a:r>
-            <a:r>
-              <a:rPr lang="en-US" sz="3200" b="1" dirty="0">
-                <a:solidFill>
-                  <a:srgbClr val="660033"/>
-                </a:solidFill>
-                <a:latin typeface="Arial" panose="020B0604020202020204" pitchFamily="34" charset="0"/>
-                <a:cs typeface="Arial" panose="020B0604020202020204" pitchFamily="34" charset="0"/>
-              </a:rPr>
-              <a:t> con </a:t>
-            </a:r>
-            <a:r>
-              <a:rPr lang="en-US" sz="3200" b="1" dirty="0" err="1">
-                <a:solidFill>
-                  <a:srgbClr val="660033"/>
-                </a:solidFill>
-                <a:latin typeface="Arial" panose="020B0604020202020204" pitchFamily="34" charset="0"/>
-                <a:cs typeface="Arial" panose="020B0604020202020204" pitchFamily="34" charset="0"/>
-              </a:rPr>
-              <a:t>mỗi</a:t>
-            </a:r>
-            <a:r>
-              <a:rPr lang="en-US" sz="3200" b="1" dirty="0">
-                <a:solidFill>
-                  <a:srgbClr val="660033"/>
-                </a:solidFill>
-                <a:latin typeface="Arial" panose="020B0604020202020204" pitchFamily="34" charset="0"/>
-                <a:cs typeface="Arial" panose="020B0604020202020204" pitchFamily="34" charset="0"/>
-              </a:rPr>
-              <a:t> </a:t>
-            </a:r>
-            <a:r>
-              <a:rPr lang="en-US" sz="3200" b="1" dirty="0" err="1">
-                <a:solidFill>
-                  <a:srgbClr val="660033"/>
-                </a:solidFill>
-                <a:latin typeface="Arial" panose="020B0604020202020204" pitchFamily="34" charset="0"/>
-                <a:cs typeface="Arial" panose="020B0604020202020204" pitchFamily="34" charset="0"/>
-              </a:rPr>
-              <a:t>ngày</a:t>
-            </a:r>
-            <a:endParaRPr lang="en-US" sz="3200" b="1" dirty="0">
-              <a:solidFill>
-                <a:srgbClr val="660033"/>
-              </a:solidFill>
-              <a:latin typeface="Arial" panose="020B0604020202020204" pitchFamily="34" charset="0"/>
-              <a:cs typeface="Arial" panose="020B0604020202020204" pitchFamily="34" charset="0"/>
+              <a:ea typeface="Microsoft JhengHei" panose="020B0604030504040204" pitchFamily="34" charset="-120"/>
             </a:endParaRPr>
           </a:p>
         </p:txBody>
@@ -4816,40 +4008,13 @@
     </p:spTree>
     <p:extLst>
       <p:ext uri="{BB962C8B-B14F-4D97-AF65-F5344CB8AC3E}">
-        <p14:creationId xmlns:p14="http://schemas.microsoft.com/office/powerpoint/2010/main" val="1003880030"/>
+        <p14:creationId xmlns:p14="http://schemas.microsoft.com/office/powerpoint/2010/main" val="2558895392"/>
       </p:ext>
     </p:extLst>
   </p:cSld>
   <p:clrMapOvr>
     <a:masterClrMapping/>
   </p:clrMapOvr>
-  <p:timing>
-    <p:tnLst>
-      <p:par>
-        <p:cTn id="1" dur="indefinite" restart="never" nodeType="tmRoot">
-          <p:childTnLst>
-            <p:seq>
-              <p:cTn id="2" dur="indefinite" nodeType="mainSeq"/>
-              <p:prevCondLst>
-                <p:cond evt="onPrev" delay="0">
-                  <p:tgtEl>
-                    <p:sldTgt/>
-                  </p:tgtEl>
-                </p:cond>
-              </p:prevCondLst>
-              <p:nextCondLst>
-                <p:cond evt="onNext" delay="0">
-                  <p:tgtEl>
-                    <p:sldTgt/>
-                  </p:tgtEl>
-                </p:cond>
-              </p:nextCondLst>
-            </p:seq>
-          </p:childTnLst>
-        </p:cTn>
-      </p:par>
-    </p:tnLst>
-  </p:timing>
 </p:sld>
 </file>
 
@@ -4858,7 +4023,13 @@
   <p:cSld>
     <p:spTree>
       <p:nvGrpSpPr>
-        <p:cNvPr id="1" name=""/>
+        <p:cNvPr id="1" name="">
+          <a:extLst>
+            <a:ext uri="{FF2B5EF4-FFF2-40B4-BE49-F238E27FC236}">
+              <a16:creationId xmlns:a16="http://schemas.microsoft.com/office/drawing/2014/main" id="{D4955FB9-4CCE-6ACA-E012-92EC5FCF9514}"/>
+            </a:ext>
+          </a:extLst>
+        </p:cNvPr>
         <p:cNvGrpSpPr/>
         <p:nvPr/>
       </p:nvGrpSpPr>
@@ -4872,102 +4043,492 @@
       </p:grpSpPr>
       <p:sp>
         <p:nvSpPr>
-          <p:cNvPr id="41" name="TextShape 1"/>
+          <p:cNvPr id="6" name="內容版面配置區 4">
+            <a:extLst>
+              <a:ext uri="{FF2B5EF4-FFF2-40B4-BE49-F238E27FC236}">
+                <a16:creationId xmlns:a16="http://schemas.microsoft.com/office/drawing/2014/main" id="{99B56849-3CA4-D9DA-A931-ACE6CE154292}"/>
+              </a:ext>
+            </a:extLst>
+          </p:cNvPr>
+          <p:cNvSpPr>
+            <a:spLocks noGrp="1"/>
+          </p:cNvSpPr>
+          <p:nvPr>
+            <p:ph idx="1"/>
+          </p:nvPr>
+        </p:nvSpPr>
+        <p:spPr>
+          <a:xfrm>
+            <a:off x="-1" y="1767434"/>
+            <a:ext cx="10080625" cy="1089939"/>
+          </a:xfrm>
+        </p:spPr>
+        <p:txBody>
+          <a:bodyPr anchor="ctr">
+            <a:normAutofit/>
+          </a:bodyPr>
+          <a:lstStyle/>
+          <a:p>
+            <a:pPr algn="ctr">
+              <a:buNone/>
+            </a:pPr>
+            <a:r>
+              <a:rPr lang="zh-TW" altLang="en-US" sz="5400" b="1" dirty="0">
+                <a:solidFill>
+                  <a:srgbClr val="000066"/>
+                </a:solidFill>
+                <a:latin typeface="微軟正黑體" pitchFamily="34" charset="-120"/>
+                <a:ea typeface="微軟正黑體" pitchFamily="34" charset="-120"/>
+              </a:rPr>
+              <a:t>惟有祢是我心</a:t>
+            </a:r>
+          </a:p>
+        </p:txBody>
+      </p:sp>
+      <p:sp>
+        <p:nvSpPr>
+          <p:cNvPr id="7" name="內容版面配置區 4">
+            <a:extLst>
+              <a:ext uri="{FF2B5EF4-FFF2-40B4-BE49-F238E27FC236}">
+                <a16:creationId xmlns:a16="http://schemas.microsoft.com/office/drawing/2014/main" id="{9EE01375-919D-395F-A528-09F09B60BDF5}"/>
+              </a:ext>
+            </a:extLst>
+          </p:cNvPr>
+          <p:cNvSpPr txBox="1">
+            <a:spLocks/>
+          </p:cNvSpPr>
+          <p:nvPr/>
+        </p:nvSpPr>
+        <p:spPr>
+          <a:xfrm>
+            <a:off x="-1" y="2552543"/>
+            <a:ext cx="10080625" cy="1089939"/>
+          </a:xfrm>
+          <a:prstGeom prst="rect">
+            <a:avLst/>
+          </a:prstGeom>
+        </p:spPr>
+        <p:txBody>
+          <a:bodyPr vert="horz" lIns="75605" tIns="37802" rIns="75605" bIns="37802" rtlCol="0" anchor="ctr">
+            <a:normAutofit/>
+          </a:bodyPr>
+          <a:lstStyle>
+            <a:lvl1pPr marL="457189" indent="-457189" algn="l" defTabSz="1219170" rtl="0" eaLnBrk="1" latinLnBrk="0" hangingPunct="1">
+              <a:spcBef>
+                <a:spcPct val="20000"/>
+              </a:spcBef>
+              <a:buFont typeface="Arial" pitchFamily="34" charset="0"/>
+              <a:buChar char="•"/>
+              <a:defRPr sz="4267" kern="1200">
+                <a:solidFill>
+                  <a:schemeClr val="tx1"/>
+                </a:solidFill>
+                <a:latin typeface="+mn-lt"/>
+                <a:ea typeface="+mn-ea"/>
+                <a:cs typeface="+mn-cs"/>
+              </a:defRPr>
+            </a:lvl1pPr>
+            <a:lvl2pPr marL="990575" indent="-380990" algn="l" defTabSz="1219170" rtl="0" eaLnBrk="1" latinLnBrk="0" hangingPunct="1">
+              <a:spcBef>
+                <a:spcPct val="20000"/>
+              </a:spcBef>
+              <a:buFont typeface="Arial" pitchFamily="34" charset="0"/>
+              <a:buChar char="–"/>
+              <a:defRPr sz="3733" kern="1200">
+                <a:solidFill>
+                  <a:schemeClr val="tx1"/>
+                </a:solidFill>
+                <a:latin typeface="+mn-lt"/>
+                <a:ea typeface="+mn-ea"/>
+                <a:cs typeface="+mn-cs"/>
+              </a:defRPr>
+            </a:lvl2pPr>
+            <a:lvl3pPr marL="1523962" indent="-304792" algn="l" defTabSz="1219170" rtl="0" eaLnBrk="1" latinLnBrk="0" hangingPunct="1">
+              <a:spcBef>
+                <a:spcPct val="20000"/>
+              </a:spcBef>
+              <a:buFont typeface="Arial" pitchFamily="34" charset="0"/>
+              <a:buChar char="•"/>
+              <a:defRPr sz="3200" kern="1200">
+                <a:solidFill>
+                  <a:schemeClr val="tx1"/>
+                </a:solidFill>
+                <a:latin typeface="+mn-lt"/>
+                <a:ea typeface="+mn-ea"/>
+                <a:cs typeface="+mn-cs"/>
+              </a:defRPr>
+            </a:lvl3pPr>
+            <a:lvl4pPr marL="2133547" indent="-304792" algn="l" defTabSz="1219170" rtl="0" eaLnBrk="1" latinLnBrk="0" hangingPunct="1">
+              <a:spcBef>
+                <a:spcPct val="20000"/>
+              </a:spcBef>
+              <a:buFont typeface="Arial" pitchFamily="34" charset="0"/>
+              <a:buChar char="–"/>
+              <a:defRPr sz="2667" kern="1200">
+                <a:solidFill>
+                  <a:schemeClr val="tx1"/>
+                </a:solidFill>
+                <a:latin typeface="+mn-lt"/>
+                <a:ea typeface="+mn-ea"/>
+                <a:cs typeface="+mn-cs"/>
+              </a:defRPr>
+            </a:lvl4pPr>
+            <a:lvl5pPr marL="2743131" indent="-304792" algn="l" defTabSz="1219170" rtl="0" eaLnBrk="1" latinLnBrk="0" hangingPunct="1">
+              <a:spcBef>
+                <a:spcPct val="20000"/>
+              </a:spcBef>
+              <a:buFont typeface="Arial" pitchFamily="34" charset="0"/>
+              <a:buChar char="»"/>
+              <a:defRPr sz="2667" kern="1200">
+                <a:solidFill>
+                  <a:schemeClr val="tx1"/>
+                </a:solidFill>
+                <a:latin typeface="+mn-lt"/>
+                <a:ea typeface="+mn-ea"/>
+                <a:cs typeface="+mn-cs"/>
+              </a:defRPr>
+            </a:lvl5pPr>
+            <a:lvl6pPr marL="3352716" indent="-304792" algn="l" defTabSz="1219170" rtl="0" eaLnBrk="1" latinLnBrk="0" hangingPunct="1">
+              <a:spcBef>
+                <a:spcPct val="20000"/>
+              </a:spcBef>
+              <a:buFont typeface="Arial" pitchFamily="34" charset="0"/>
+              <a:buChar char="•"/>
+              <a:defRPr sz="2667" kern="1200">
+                <a:solidFill>
+                  <a:schemeClr val="tx1"/>
+                </a:solidFill>
+                <a:latin typeface="+mn-lt"/>
+                <a:ea typeface="+mn-ea"/>
+                <a:cs typeface="+mn-cs"/>
+              </a:defRPr>
+            </a:lvl6pPr>
+            <a:lvl7pPr marL="3962301" indent="-304792" algn="l" defTabSz="1219170" rtl="0" eaLnBrk="1" latinLnBrk="0" hangingPunct="1">
+              <a:spcBef>
+                <a:spcPct val="20000"/>
+              </a:spcBef>
+              <a:buFont typeface="Arial" pitchFamily="34" charset="0"/>
+              <a:buChar char="•"/>
+              <a:defRPr sz="2667" kern="1200">
+                <a:solidFill>
+                  <a:schemeClr val="tx1"/>
+                </a:solidFill>
+                <a:latin typeface="+mn-lt"/>
+                <a:ea typeface="+mn-ea"/>
+                <a:cs typeface="+mn-cs"/>
+              </a:defRPr>
+            </a:lvl7pPr>
+            <a:lvl8pPr marL="4571886" indent="-304792" algn="l" defTabSz="1219170" rtl="0" eaLnBrk="1" latinLnBrk="0" hangingPunct="1">
+              <a:spcBef>
+                <a:spcPct val="20000"/>
+              </a:spcBef>
+              <a:buFont typeface="Arial" pitchFamily="34" charset="0"/>
+              <a:buChar char="•"/>
+              <a:defRPr sz="2667" kern="1200">
+                <a:solidFill>
+                  <a:schemeClr val="tx1"/>
+                </a:solidFill>
+                <a:latin typeface="+mn-lt"/>
+                <a:ea typeface="+mn-ea"/>
+                <a:cs typeface="+mn-cs"/>
+              </a:defRPr>
+            </a:lvl8pPr>
+            <a:lvl9pPr marL="5181470" indent="-304792" algn="l" defTabSz="1219170" rtl="0" eaLnBrk="1" latinLnBrk="0" hangingPunct="1">
+              <a:spcBef>
+                <a:spcPct val="20000"/>
+              </a:spcBef>
+              <a:buFont typeface="Arial" pitchFamily="34" charset="0"/>
+              <a:buChar char="•"/>
+              <a:defRPr sz="2667" kern="1200">
+                <a:solidFill>
+                  <a:schemeClr val="tx1"/>
+                </a:solidFill>
+                <a:latin typeface="+mn-lt"/>
+                <a:ea typeface="+mn-ea"/>
+                <a:cs typeface="+mn-cs"/>
+              </a:defRPr>
+            </a:lvl9pPr>
+          </a:lstStyle>
+          <a:p>
+            <a:pPr marL="0" indent="0" algn="ctr">
+              <a:buNone/>
+            </a:pPr>
+            <a:r>
+              <a:rPr lang="en-US" sz="3307" b="1" dirty="0" err="1">
+                <a:solidFill>
+                  <a:srgbClr val="660033"/>
+                </a:solidFill>
+                <a:latin typeface="Times New Roman" panose="02020603050405020304" pitchFamily="18" charset="0"/>
+                <a:ea typeface="微軟正黑體" pitchFamily="34" charset="-120"/>
+                <a:cs typeface="Times New Roman" panose="02020603050405020304" pitchFamily="18" charset="0"/>
+              </a:rPr>
+              <a:t>Lòng</a:t>
+            </a:r>
+            <a:r>
+              <a:rPr lang="en-US" sz="3307" b="1" dirty="0">
+                <a:solidFill>
+                  <a:srgbClr val="660033"/>
+                </a:solidFill>
+                <a:latin typeface="Times New Roman" panose="02020603050405020304" pitchFamily="18" charset="0"/>
+                <a:ea typeface="微軟正黑體" pitchFamily="34" charset="-120"/>
+                <a:cs typeface="Times New Roman" panose="02020603050405020304" pitchFamily="18" charset="0"/>
+              </a:rPr>
+              <a:t> con </a:t>
+            </a:r>
+            <a:r>
+              <a:rPr lang="en-US" sz="3307" b="1" dirty="0" err="1">
+                <a:solidFill>
+                  <a:srgbClr val="660033"/>
+                </a:solidFill>
+                <a:latin typeface="Times New Roman" panose="02020603050405020304" pitchFamily="18" charset="0"/>
+                <a:ea typeface="微軟正黑體" pitchFamily="34" charset="-120"/>
+                <a:cs typeface="Times New Roman" panose="02020603050405020304" pitchFamily="18" charset="0"/>
+              </a:rPr>
+              <a:t>đây</a:t>
+            </a:r>
+            <a:r>
+              <a:rPr lang="en-US" sz="3307" b="1" dirty="0">
+                <a:solidFill>
+                  <a:srgbClr val="660033"/>
+                </a:solidFill>
+                <a:latin typeface="Times New Roman" panose="02020603050405020304" pitchFamily="18" charset="0"/>
+                <a:ea typeface="微軟正黑體" pitchFamily="34" charset="-120"/>
+                <a:cs typeface="Times New Roman" panose="02020603050405020304" pitchFamily="18" charset="0"/>
+              </a:rPr>
+              <a:t> </a:t>
+            </a:r>
+            <a:r>
+              <a:rPr lang="en-US" sz="3307" b="1" dirty="0" err="1">
+                <a:solidFill>
+                  <a:srgbClr val="660033"/>
+                </a:solidFill>
+                <a:latin typeface="Times New Roman" panose="02020603050405020304" pitchFamily="18" charset="0"/>
+                <a:ea typeface="微軟正黑體" pitchFamily="34" charset="-120"/>
+                <a:cs typeface="Times New Roman" panose="02020603050405020304" pitchFamily="18" charset="0"/>
+              </a:rPr>
+              <a:t>chỉ</a:t>
+            </a:r>
+            <a:r>
+              <a:rPr lang="en-US" sz="3307" b="1" dirty="0">
+                <a:solidFill>
+                  <a:srgbClr val="660033"/>
+                </a:solidFill>
+                <a:latin typeface="Times New Roman" panose="02020603050405020304" pitchFamily="18" charset="0"/>
+                <a:ea typeface="微軟正黑體" pitchFamily="34" charset="-120"/>
+                <a:cs typeface="Times New Roman" panose="02020603050405020304" pitchFamily="18" charset="0"/>
+              </a:rPr>
+              <a:t> </a:t>
+            </a:r>
+            <a:r>
+              <a:rPr lang="en-US" sz="3307" b="1" dirty="0" err="1">
+                <a:solidFill>
+                  <a:srgbClr val="660033"/>
+                </a:solidFill>
+                <a:latin typeface="Times New Roman" panose="02020603050405020304" pitchFamily="18" charset="0"/>
+                <a:ea typeface="微軟正黑體" pitchFamily="34" charset="-120"/>
+                <a:cs typeface="Times New Roman" panose="02020603050405020304" pitchFamily="18" charset="0"/>
+              </a:rPr>
+              <a:t>mong</a:t>
+            </a:r>
+            <a:r>
+              <a:rPr lang="en-US" sz="3307" b="1" dirty="0">
+                <a:solidFill>
+                  <a:srgbClr val="660033"/>
+                </a:solidFill>
+                <a:latin typeface="Times New Roman" panose="02020603050405020304" pitchFamily="18" charset="0"/>
+                <a:ea typeface="微軟正黑體" pitchFamily="34" charset="-120"/>
+                <a:cs typeface="Times New Roman" panose="02020603050405020304" pitchFamily="18" charset="0"/>
+              </a:rPr>
+              <a:t> </a:t>
+            </a:r>
+            <a:r>
+              <a:rPr lang="en-US" sz="3307" b="1" dirty="0" err="1">
+                <a:solidFill>
+                  <a:srgbClr val="660033"/>
+                </a:solidFill>
+                <a:latin typeface="Times New Roman" panose="02020603050405020304" pitchFamily="18" charset="0"/>
+                <a:ea typeface="微軟正黑體" pitchFamily="34" charset="-120"/>
+                <a:cs typeface="Times New Roman" panose="02020603050405020304" pitchFamily="18" charset="0"/>
+              </a:rPr>
+              <a:t>chờ</a:t>
+            </a:r>
+            <a:endParaRPr lang="en-US" sz="3307" b="1" dirty="0">
+              <a:solidFill>
+                <a:srgbClr val="660033"/>
+              </a:solidFill>
+              <a:latin typeface="Times New Roman" panose="02020603050405020304" pitchFamily="18" charset="0"/>
+              <a:ea typeface="微軟正黑體" pitchFamily="34" charset="-120"/>
+              <a:cs typeface="Times New Roman" panose="02020603050405020304" pitchFamily="18" charset="0"/>
+            </a:endParaRPr>
+          </a:p>
+        </p:txBody>
+      </p:sp>
+      <p:sp>
+        <p:nvSpPr>
+          <p:cNvPr id="8" name="TextBox 7">
+            <a:extLst>
+              <a:ext uri="{FF2B5EF4-FFF2-40B4-BE49-F238E27FC236}">
+                <a16:creationId xmlns:a16="http://schemas.microsoft.com/office/drawing/2014/main" id="{6DB29412-3D74-B8DC-8FBE-52E07C4FFCA8}"/>
+              </a:ext>
+            </a:extLst>
+          </p:cNvPr>
           <p:cNvSpPr txBox="1"/>
           <p:nvPr/>
         </p:nvSpPr>
         <p:spPr>
           <a:xfrm>
-            <a:off x="0" y="182880"/>
-            <a:ext cx="10080000" cy="1116000"/>
+            <a:off x="-1" y="4343568"/>
+            <a:ext cx="10080625" cy="448584"/>
           </a:xfrm>
           <a:prstGeom prst="rect">
             <a:avLst/>
           </a:prstGeom>
           <a:noFill/>
-          <a:ln>
-            <a:noFill/>
-          </a:ln>
         </p:spPr>
         <p:txBody>
-          <a:bodyPr lIns="0" tIns="0" rIns="0" bIns="0" anchor="ctr"/>
+          <a:bodyPr wrap="square" rtlCol="0">
+            <a:spAutoFit/>
+          </a:bodyPr>
           <a:lstStyle/>
           <a:p>
             <a:pPr algn="ctr"/>
             <a:r>
-              <a:rPr lang="zh-TW" altLang="en-US" sz="4000" b="1" dirty="0">
+              <a:rPr lang="en-US" sz="2315" b="1" dirty="0">
+                <a:solidFill>
+                  <a:srgbClr val="000066"/>
+                </a:solidFill>
+                <a:latin typeface="Microsoft JhengHei" panose="020B0604030504040204" pitchFamily="34" charset="-120"/>
+                <a:ea typeface="Microsoft JhengHei" panose="020B0604030504040204" pitchFamily="34" charset="-120"/>
+              </a:rPr>
+              <a:t>( </a:t>
+            </a:r>
+            <a:r>
+              <a:rPr lang="zh-CN" altLang="en-US" sz="2315" b="1" dirty="0">
+                <a:solidFill>
+                  <a:srgbClr val="000066"/>
+                </a:solidFill>
+                <a:latin typeface="Microsoft JhengHei" panose="020B0604030504040204" pitchFamily="34" charset="-120"/>
+                <a:ea typeface="Microsoft JhengHei" panose="020B0604030504040204" pitchFamily="34" charset="-120"/>
+              </a:rPr>
+              <a:t>正歌</a:t>
+            </a:r>
+            <a:r>
+              <a:rPr lang="en-US" sz="2315" b="1" dirty="0">
+                <a:solidFill>
+                  <a:srgbClr val="000066"/>
+                </a:solidFill>
+                <a:latin typeface="Microsoft JhengHei" panose="020B0604030504040204" pitchFamily="34" charset="-120"/>
+                <a:ea typeface="Microsoft JhengHei" panose="020B0604030504040204" pitchFamily="34" charset="-120"/>
+              </a:rPr>
+              <a:t> )</a:t>
+            </a:r>
+            <a:endParaRPr lang="vi-VN" sz="2315" b="1" dirty="0">
+              <a:solidFill>
+                <a:srgbClr val="000066"/>
+              </a:solidFill>
+              <a:ea typeface="Microsoft JhengHei" panose="020B0604030504040204" pitchFamily="34" charset="-120"/>
+            </a:endParaRPr>
+          </a:p>
+        </p:txBody>
+      </p:sp>
+    </p:spTree>
+    <p:extLst>
+      <p:ext uri="{BB962C8B-B14F-4D97-AF65-F5344CB8AC3E}">
+        <p14:creationId xmlns:p14="http://schemas.microsoft.com/office/powerpoint/2010/main" val="3586241949"/>
+      </p:ext>
+    </p:extLst>
+  </p:cSld>
+  <p:clrMapOvr>
+    <a:masterClrMapping/>
+  </p:clrMapOvr>
+</p:sld>
+</file>
+
+<file path=ppt/slides/slide5.xml><?xml version="1.0" encoding="utf-8"?>
+<p:sld xmlns:a="http://schemas.openxmlformats.org/drawingml/2006/main" xmlns:r="http://schemas.openxmlformats.org/officeDocument/2006/relationships" xmlns:p="http://schemas.openxmlformats.org/presentationml/2006/main">
+  <p:cSld>
+    <p:spTree>
+      <p:nvGrpSpPr>
+        <p:cNvPr id="1" name="">
+          <a:extLst>
+            <a:ext uri="{FF2B5EF4-FFF2-40B4-BE49-F238E27FC236}">
+              <a16:creationId xmlns:a16="http://schemas.microsoft.com/office/drawing/2014/main" id="{08CDDFA8-4CD2-E21A-8F7A-B0840FED378F}"/>
+            </a:ext>
+          </a:extLst>
+        </p:cNvPr>
+        <p:cNvGrpSpPr/>
+        <p:nvPr/>
+      </p:nvGrpSpPr>
+      <p:grpSpPr>
+        <a:xfrm>
+          <a:off x="0" y="0"/>
+          <a:ext cx="0" cy="0"/>
+          <a:chOff x="0" y="0"/>
+          <a:chExt cx="0" cy="0"/>
+        </a:xfrm>
+      </p:grpSpPr>
+      <p:sp>
+        <p:nvSpPr>
+          <p:cNvPr id="6" name="內容版面配置區 4">
+            <a:extLst>
+              <a:ext uri="{FF2B5EF4-FFF2-40B4-BE49-F238E27FC236}">
+                <a16:creationId xmlns:a16="http://schemas.microsoft.com/office/drawing/2014/main" id="{33CCCA57-E3DF-36F5-0199-558B50D18061}"/>
+              </a:ext>
+            </a:extLst>
+          </p:cNvPr>
+          <p:cNvSpPr>
+            <a:spLocks noGrp="1"/>
+          </p:cNvSpPr>
+          <p:nvPr>
+            <p:ph idx="1"/>
+          </p:nvPr>
+        </p:nvSpPr>
+        <p:spPr>
+          <a:xfrm>
+            <a:off x="-1" y="1767434"/>
+            <a:ext cx="10080625" cy="1089939"/>
+          </a:xfrm>
+        </p:spPr>
+        <p:txBody>
+          <a:bodyPr anchor="ctr">
+            <a:normAutofit/>
+          </a:bodyPr>
+          <a:lstStyle/>
+          <a:p>
+            <a:pPr algn="ctr">
+              <a:buNone/>
+            </a:pPr>
+            <a:r>
+              <a:rPr lang="zh-TW" altLang="en-US" sz="5400" b="1" dirty="0">
                 <a:solidFill>
                   <a:srgbClr val="000066"/>
                 </a:solidFill>
                 <a:latin typeface="微軟正黑體" pitchFamily="34" charset="-120"/>
                 <a:ea typeface="微軟正黑體" pitchFamily="34" charset="-120"/>
               </a:rPr>
-              <a:t>如鹿切慕溪水</a:t>
-            </a:r>
-            <a:r>
-              <a:rPr dirty="0"/>
-              <a:t/>
-            </a:r>
-            <a:br>
-              <a:rPr dirty="0"/>
-            </a:br>
-            <a:r>
-              <a:rPr lang="en-US" sz="2800" b="1" dirty="0" smtClean="0">
-                <a:solidFill>
-                  <a:srgbClr val="660033"/>
-                </a:solidFill>
-                <a:latin typeface="Arial" panose="020B0604020202020204" pitchFamily="34" charset="0"/>
-                <a:cs typeface="Arial" panose="020B0604020202020204" pitchFamily="34" charset="0"/>
-              </a:rPr>
-              <a:t>KHÁT KHAO DÒNG NƯỚC</a:t>
-            </a:r>
-            <a:endParaRPr lang="en-US" sz="4000" b="1" strike="noStrike" spc="-1" dirty="0">
-              <a:solidFill>
-                <a:srgbClr val="660033"/>
-              </a:solidFill>
-              <a:latin typeface="Arial" panose="020B0604020202020204" pitchFamily="34" charset="0"/>
-              <a:cs typeface="Arial" panose="020B0604020202020204" pitchFamily="34" charset="0"/>
-            </a:endParaRPr>
-          </a:p>
-        </p:txBody>
-      </p:sp>
-      <p:sp>
-        <p:nvSpPr>
-          <p:cNvPr id="42" name="TextShape 2"/>
-          <p:cNvSpPr txBox="1"/>
-          <p:nvPr/>
-        </p:nvSpPr>
-        <p:spPr>
-          <a:xfrm>
-            <a:off x="0" y="1449000"/>
-            <a:ext cx="10080000" cy="1843475"/>
-          </a:xfrm>
-          <a:prstGeom prst="rect">
-            <a:avLst/>
-          </a:prstGeom>
-          <a:noFill/>
-          <a:ln>
-            <a:noFill/>
-          </a:ln>
-        </p:spPr>
-        <p:txBody>
-          <a:bodyPr lIns="0" tIns="0" rIns="0" bIns="0" anchor="ctr"/>
-          <a:lstStyle/>
-          <a:p>
-            <a:pPr algn="ctr">
-              <a:buNone/>
-            </a:pPr>
-            <a:r>
-              <a:rPr lang="zh-TW" altLang="en-US" sz="4800" b="1" dirty="0">
+              <a:t>所愛</a:t>
+            </a:r>
+            <a:r>
+              <a:rPr lang="en-US" altLang="zh-TW" sz="5400" b="1" dirty="0">
                 <a:solidFill>
                   <a:srgbClr val="000066"/>
                 </a:solidFill>
                 <a:latin typeface="微軟正黑體" pitchFamily="34" charset="-120"/>
                 <a:ea typeface="微軟正黑體" pitchFamily="34" charset="-120"/>
               </a:rPr>
-              <a:t>惟有你是我心所愛</a:t>
-            </a:r>
-            <a:endParaRPr lang="en-US" altLang="zh-TW" sz="4800" b="1" dirty="0">
+              <a:t>  </a:t>
+            </a:r>
+            <a:r>
+              <a:rPr lang="zh-TW" altLang="en-US" sz="5400" b="1" dirty="0">
+                <a:solidFill>
+                  <a:srgbClr val="000066"/>
+                </a:solidFill>
+                <a:latin typeface="微軟正黑體" pitchFamily="34" charset="-120"/>
+                <a:ea typeface="微軟正黑體" pitchFamily="34" charset="-120"/>
+              </a:rPr>
+              <a:t>我渴慕來敬拜祢</a:t>
+            </a:r>
+            <a:endParaRPr lang="en-US" sz="5400" b="1" dirty="0">
               <a:solidFill>
                 <a:srgbClr val="000066"/>
               </a:solidFill>
@@ -4975,310 +4536,254 @@
               <a:ea typeface="微軟正黑體" pitchFamily="34" charset="-120"/>
             </a:endParaRPr>
           </a:p>
-          <a:p>
-            <a:pPr algn="ctr">
+        </p:txBody>
+      </p:sp>
+      <p:sp>
+        <p:nvSpPr>
+          <p:cNvPr id="7" name="內容版面配置區 4">
+            <a:extLst>
+              <a:ext uri="{FF2B5EF4-FFF2-40B4-BE49-F238E27FC236}">
+                <a16:creationId xmlns:a16="http://schemas.microsoft.com/office/drawing/2014/main" id="{D24B8036-DC63-3D55-7C25-C750335DC820}"/>
+              </a:ext>
+            </a:extLst>
+          </p:cNvPr>
+          <p:cNvSpPr txBox="1">
+            <a:spLocks/>
+          </p:cNvSpPr>
+          <p:nvPr/>
+        </p:nvSpPr>
+        <p:spPr>
+          <a:xfrm>
+            <a:off x="-1" y="2552543"/>
+            <a:ext cx="10080625" cy="1089939"/>
+          </a:xfrm>
+          <a:prstGeom prst="rect">
+            <a:avLst/>
+          </a:prstGeom>
+        </p:spPr>
+        <p:txBody>
+          <a:bodyPr vert="horz" lIns="75605" tIns="37802" rIns="75605" bIns="37802" rtlCol="0" anchor="ctr">
+            <a:normAutofit/>
+          </a:bodyPr>
+          <a:lstStyle>
+            <a:lvl1pPr marL="457189" indent="-457189" algn="l" defTabSz="1219170" rtl="0" eaLnBrk="1" latinLnBrk="0" hangingPunct="1">
+              <a:spcBef>
+                <a:spcPct val="20000"/>
+              </a:spcBef>
+              <a:buFont typeface="Arial" pitchFamily="34" charset="0"/>
+              <a:buChar char="•"/>
+              <a:defRPr sz="4267" kern="1200">
+                <a:solidFill>
+                  <a:schemeClr val="tx1"/>
+                </a:solidFill>
+                <a:latin typeface="+mn-lt"/>
+                <a:ea typeface="+mn-ea"/>
+                <a:cs typeface="+mn-cs"/>
+              </a:defRPr>
+            </a:lvl1pPr>
+            <a:lvl2pPr marL="990575" indent="-380990" algn="l" defTabSz="1219170" rtl="0" eaLnBrk="1" latinLnBrk="0" hangingPunct="1">
+              <a:spcBef>
+                <a:spcPct val="20000"/>
+              </a:spcBef>
+              <a:buFont typeface="Arial" pitchFamily="34" charset="0"/>
+              <a:buChar char="–"/>
+              <a:defRPr sz="3733" kern="1200">
+                <a:solidFill>
+                  <a:schemeClr val="tx1"/>
+                </a:solidFill>
+                <a:latin typeface="+mn-lt"/>
+                <a:ea typeface="+mn-ea"/>
+                <a:cs typeface="+mn-cs"/>
+              </a:defRPr>
+            </a:lvl2pPr>
+            <a:lvl3pPr marL="1523962" indent="-304792" algn="l" defTabSz="1219170" rtl="0" eaLnBrk="1" latinLnBrk="0" hangingPunct="1">
+              <a:spcBef>
+                <a:spcPct val="20000"/>
+              </a:spcBef>
+              <a:buFont typeface="Arial" pitchFamily="34" charset="0"/>
+              <a:buChar char="•"/>
+              <a:defRPr sz="3200" kern="1200">
+                <a:solidFill>
+                  <a:schemeClr val="tx1"/>
+                </a:solidFill>
+                <a:latin typeface="+mn-lt"/>
+                <a:ea typeface="+mn-ea"/>
+                <a:cs typeface="+mn-cs"/>
+              </a:defRPr>
+            </a:lvl3pPr>
+            <a:lvl4pPr marL="2133547" indent="-304792" algn="l" defTabSz="1219170" rtl="0" eaLnBrk="1" latinLnBrk="0" hangingPunct="1">
+              <a:spcBef>
+                <a:spcPct val="20000"/>
+              </a:spcBef>
+              <a:buFont typeface="Arial" pitchFamily="34" charset="0"/>
+              <a:buChar char="–"/>
+              <a:defRPr sz="2667" kern="1200">
+                <a:solidFill>
+                  <a:schemeClr val="tx1"/>
+                </a:solidFill>
+                <a:latin typeface="+mn-lt"/>
+                <a:ea typeface="+mn-ea"/>
+                <a:cs typeface="+mn-cs"/>
+              </a:defRPr>
+            </a:lvl4pPr>
+            <a:lvl5pPr marL="2743131" indent="-304792" algn="l" defTabSz="1219170" rtl="0" eaLnBrk="1" latinLnBrk="0" hangingPunct="1">
+              <a:spcBef>
+                <a:spcPct val="20000"/>
+              </a:spcBef>
+              <a:buFont typeface="Arial" pitchFamily="34" charset="0"/>
+              <a:buChar char="»"/>
+              <a:defRPr sz="2667" kern="1200">
+                <a:solidFill>
+                  <a:schemeClr val="tx1"/>
+                </a:solidFill>
+                <a:latin typeface="+mn-lt"/>
+                <a:ea typeface="+mn-ea"/>
+                <a:cs typeface="+mn-cs"/>
+              </a:defRPr>
+            </a:lvl5pPr>
+            <a:lvl6pPr marL="3352716" indent="-304792" algn="l" defTabSz="1219170" rtl="0" eaLnBrk="1" latinLnBrk="0" hangingPunct="1">
+              <a:spcBef>
+                <a:spcPct val="20000"/>
+              </a:spcBef>
+              <a:buFont typeface="Arial" pitchFamily="34" charset="0"/>
+              <a:buChar char="•"/>
+              <a:defRPr sz="2667" kern="1200">
+                <a:solidFill>
+                  <a:schemeClr val="tx1"/>
+                </a:solidFill>
+                <a:latin typeface="+mn-lt"/>
+                <a:ea typeface="+mn-ea"/>
+                <a:cs typeface="+mn-cs"/>
+              </a:defRPr>
+            </a:lvl6pPr>
+            <a:lvl7pPr marL="3962301" indent="-304792" algn="l" defTabSz="1219170" rtl="0" eaLnBrk="1" latinLnBrk="0" hangingPunct="1">
+              <a:spcBef>
+                <a:spcPct val="20000"/>
+              </a:spcBef>
+              <a:buFont typeface="Arial" pitchFamily="34" charset="0"/>
+              <a:buChar char="•"/>
+              <a:defRPr sz="2667" kern="1200">
+                <a:solidFill>
+                  <a:schemeClr val="tx1"/>
+                </a:solidFill>
+                <a:latin typeface="+mn-lt"/>
+                <a:ea typeface="+mn-ea"/>
+                <a:cs typeface="+mn-cs"/>
+              </a:defRPr>
+            </a:lvl7pPr>
+            <a:lvl8pPr marL="4571886" indent="-304792" algn="l" defTabSz="1219170" rtl="0" eaLnBrk="1" latinLnBrk="0" hangingPunct="1">
+              <a:spcBef>
+                <a:spcPct val="20000"/>
+              </a:spcBef>
+              <a:buFont typeface="Arial" pitchFamily="34" charset="0"/>
+              <a:buChar char="•"/>
+              <a:defRPr sz="2667" kern="1200">
+                <a:solidFill>
+                  <a:schemeClr val="tx1"/>
+                </a:solidFill>
+                <a:latin typeface="+mn-lt"/>
+                <a:ea typeface="+mn-ea"/>
+                <a:cs typeface="+mn-cs"/>
+              </a:defRPr>
+            </a:lvl8pPr>
+            <a:lvl9pPr marL="5181470" indent="-304792" algn="l" defTabSz="1219170" rtl="0" eaLnBrk="1" latinLnBrk="0" hangingPunct="1">
+              <a:spcBef>
+                <a:spcPct val="20000"/>
+              </a:spcBef>
+              <a:buFont typeface="Arial" pitchFamily="34" charset="0"/>
+              <a:buChar char="•"/>
+              <a:defRPr sz="2667" kern="1200">
+                <a:solidFill>
+                  <a:schemeClr val="tx1"/>
+                </a:solidFill>
+                <a:latin typeface="+mn-lt"/>
+                <a:ea typeface="+mn-ea"/>
+                <a:cs typeface="+mn-cs"/>
+              </a:defRPr>
+            </a:lvl9pPr>
+          </a:lstStyle>
+          <a:p>
+            <a:pPr marL="0" indent="0" algn="ctr">
               <a:buNone/>
             </a:pPr>
             <a:r>
-              <a:rPr lang="zh-TW" altLang="en-US" sz="4800" b="1" dirty="0">
-                <a:solidFill>
-                  <a:srgbClr val="000066"/>
-                </a:solidFill>
-                <a:latin typeface="微軟正黑體" pitchFamily="34" charset="-120"/>
+              <a:rPr lang="vi-VN" sz="3307" b="1" dirty="0">
+                <a:solidFill>
+                  <a:srgbClr val="660033"/>
+                </a:solidFill>
+                <a:latin typeface="Times New Roman" panose="02020603050405020304" pitchFamily="18" charset="0"/>
                 <a:ea typeface="微軟正黑體" pitchFamily="34" charset="-120"/>
-              </a:rPr>
-              <a:t>我渴慕來敬拜你</a:t>
-            </a:r>
-            <a:endParaRPr lang="en-US" sz="4800" b="1" dirty="0">
-              <a:solidFill>
-                <a:srgbClr val="000066"/>
-              </a:solidFill>
-              <a:latin typeface="微軟正黑體" pitchFamily="34" charset="-120"/>
-              <a:ea typeface="微軟正黑體" pitchFamily="34" charset="-120"/>
-            </a:endParaRPr>
-          </a:p>
-        </p:txBody>
-      </p:sp>
-      <p:sp>
-        <p:nvSpPr>
-          <p:cNvPr id="43" name="TextShape 3"/>
+                <a:cs typeface="Times New Roman" panose="02020603050405020304" pitchFamily="18" charset="0"/>
+              </a:rPr>
+              <a:t>Được đến bên Cha và thờ kính Cha đời đời</a:t>
+            </a:r>
+          </a:p>
+        </p:txBody>
+      </p:sp>
+      <p:sp>
+        <p:nvSpPr>
+          <p:cNvPr id="8" name="TextBox 7">
+            <a:extLst>
+              <a:ext uri="{FF2B5EF4-FFF2-40B4-BE49-F238E27FC236}">
+                <a16:creationId xmlns:a16="http://schemas.microsoft.com/office/drawing/2014/main" id="{09F3ED03-373B-BFFE-E2DA-54C63FC1D306}"/>
+              </a:ext>
+            </a:extLst>
+          </p:cNvPr>
           <p:cNvSpPr txBox="1"/>
           <p:nvPr/>
         </p:nvSpPr>
         <p:spPr>
           <a:xfrm>
-            <a:off x="0" y="3442595"/>
-            <a:ext cx="10080000" cy="1709160"/>
+            <a:off x="-1" y="4343568"/>
+            <a:ext cx="10080625" cy="448584"/>
           </a:xfrm>
           <a:prstGeom prst="rect">
             <a:avLst/>
           </a:prstGeom>
           <a:noFill/>
-          <a:ln>
-            <a:noFill/>
-          </a:ln>
         </p:spPr>
         <p:txBody>
-          <a:bodyPr lIns="0" tIns="0" rIns="0" bIns="0" anchor="ctr"/>
+          <a:bodyPr wrap="square" rtlCol="0">
+            <a:spAutoFit/>
+          </a:bodyPr>
           <a:lstStyle/>
           <a:p>
             <a:pPr algn="ctr"/>
             <a:r>
-              <a:rPr lang="en-US" sz="3200" b="1" dirty="0" err="1">
-                <a:solidFill>
-                  <a:srgbClr val="660033"/>
-                </a:solidFill>
-                <a:latin typeface="Arial" panose="020B0604020202020204" pitchFamily="34" charset="0"/>
-                <a:cs typeface="Arial" panose="020B0604020202020204" pitchFamily="34" charset="0"/>
-              </a:rPr>
-              <a:t>Lòng</a:t>
-            </a:r>
-            <a:r>
-              <a:rPr lang="en-US" sz="3200" b="1" dirty="0">
-                <a:solidFill>
-                  <a:srgbClr val="660033"/>
-                </a:solidFill>
-                <a:latin typeface="Arial" panose="020B0604020202020204" pitchFamily="34" charset="0"/>
-                <a:cs typeface="Arial" panose="020B0604020202020204" pitchFamily="34" charset="0"/>
-              </a:rPr>
-              <a:t> con </a:t>
-            </a:r>
-            <a:r>
-              <a:rPr lang="en-US" sz="3200" b="1" dirty="0" err="1">
-                <a:solidFill>
-                  <a:srgbClr val="660033"/>
-                </a:solidFill>
-                <a:latin typeface="Arial" panose="020B0604020202020204" pitchFamily="34" charset="0"/>
-                <a:cs typeface="Arial" panose="020B0604020202020204" pitchFamily="34" charset="0"/>
-              </a:rPr>
-              <a:t>đây</a:t>
-            </a:r>
-            <a:r>
-              <a:rPr lang="en-US" sz="3200" b="1" dirty="0">
-                <a:solidFill>
-                  <a:srgbClr val="660033"/>
-                </a:solidFill>
-                <a:latin typeface="Arial" panose="020B0604020202020204" pitchFamily="34" charset="0"/>
-                <a:cs typeface="Arial" panose="020B0604020202020204" pitchFamily="34" charset="0"/>
-              </a:rPr>
-              <a:t> </a:t>
-            </a:r>
-            <a:r>
-              <a:rPr lang="en-US" sz="3200" b="1" dirty="0" err="1">
-                <a:solidFill>
-                  <a:srgbClr val="660033"/>
-                </a:solidFill>
-                <a:latin typeface="Arial" panose="020B0604020202020204" pitchFamily="34" charset="0"/>
-                <a:cs typeface="Arial" panose="020B0604020202020204" pitchFamily="34" charset="0"/>
-              </a:rPr>
-              <a:t>chỉ</a:t>
-            </a:r>
-            <a:r>
-              <a:rPr lang="en-US" sz="3200" b="1" dirty="0">
-                <a:solidFill>
-                  <a:srgbClr val="660033"/>
-                </a:solidFill>
-                <a:latin typeface="Arial" panose="020B0604020202020204" pitchFamily="34" charset="0"/>
-                <a:cs typeface="Arial" panose="020B0604020202020204" pitchFamily="34" charset="0"/>
-              </a:rPr>
-              <a:t> </a:t>
-            </a:r>
-            <a:r>
-              <a:rPr lang="en-US" sz="3200" b="1" dirty="0" err="1">
-                <a:solidFill>
-                  <a:srgbClr val="660033"/>
-                </a:solidFill>
-                <a:latin typeface="Arial" panose="020B0604020202020204" pitchFamily="34" charset="0"/>
-                <a:cs typeface="Arial" panose="020B0604020202020204" pitchFamily="34" charset="0"/>
-              </a:rPr>
-              <a:t>mong</a:t>
-            </a:r>
-            <a:r>
-              <a:rPr lang="en-US" sz="3200" b="1" dirty="0">
-                <a:solidFill>
-                  <a:srgbClr val="660033"/>
-                </a:solidFill>
-                <a:latin typeface="Arial" panose="020B0604020202020204" pitchFamily="34" charset="0"/>
-                <a:cs typeface="Arial" panose="020B0604020202020204" pitchFamily="34" charset="0"/>
-              </a:rPr>
-              <a:t> </a:t>
-            </a:r>
-            <a:r>
-              <a:rPr lang="en-US" sz="3200" b="1" dirty="0" err="1">
-                <a:solidFill>
-                  <a:srgbClr val="660033"/>
-                </a:solidFill>
-                <a:latin typeface="Arial" panose="020B0604020202020204" pitchFamily="34" charset="0"/>
-                <a:cs typeface="Arial" panose="020B0604020202020204" pitchFamily="34" charset="0"/>
-              </a:rPr>
-              <a:t>chờ</a:t>
-            </a:r>
-            <a:endParaRPr lang="en-US" sz="3200" b="1" dirty="0">
+              <a:rPr lang="en-US" sz="2315" b="1" dirty="0">
+                <a:solidFill>
+                  <a:srgbClr val="000066"/>
+                </a:solidFill>
+                <a:latin typeface="Microsoft JhengHei" panose="020B0604030504040204" pitchFamily="34" charset="-120"/>
+                <a:ea typeface="Microsoft JhengHei" panose="020B0604030504040204" pitchFamily="34" charset="-120"/>
+              </a:rPr>
+              <a:t>( </a:t>
+            </a:r>
+            <a:r>
+              <a:rPr lang="zh-CN" altLang="en-US" sz="2315" b="1" dirty="0">
+                <a:solidFill>
+                  <a:srgbClr val="000066"/>
+                </a:solidFill>
+                <a:latin typeface="Microsoft JhengHei" panose="020B0604030504040204" pitchFamily="34" charset="-120"/>
+                <a:ea typeface="Microsoft JhengHei" panose="020B0604030504040204" pitchFamily="34" charset="-120"/>
+              </a:rPr>
+              <a:t>正歌</a:t>
+            </a:r>
+            <a:r>
+              <a:rPr lang="en-US" sz="2315" b="1" dirty="0">
+                <a:solidFill>
+                  <a:srgbClr val="000066"/>
+                </a:solidFill>
+                <a:latin typeface="Microsoft JhengHei" panose="020B0604030504040204" pitchFamily="34" charset="-120"/>
+                <a:ea typeface="Microsoft JhengHei" panose="020B0604030504040204" pitchFamily="34" charset="-120"/>
+              </a:rPr>
+              <a:t> )</a:t>
+            </a:r>
+            <a:endParaRPr lang="vi-VN" sz="2315" b="1" dirty="0">
               <a:solidFill>
-                <a:srgbClr val="660033"/>
+                <a:srgbClr val="000066"/>
               </a:solidFill>
-              <a:latin typeface="Arial" panose="020B0604020202020204" pitchFamily="34" charset="0"/>
-              <a:cs typeface="Arial" panose="020B0604020202020204" pitchFamily="34" charset="0"/>
-            </a:endParaRPr>
-          </a:p>
-          <a:p>
-            <a:pPr algn="ctr"/>
-            <a:r>
-              <a:rPr lang="en-US" sz="3200" b="1" dirty="0" err="1">
-                <a:solidFill>
-                  <a:srgbClr val="660033"/>
-                </a:solidFill>
-                <a:latin typeface="Arial" panose="020B0604020202020204" pitchFamily="34" charset="0"/>
-                <a:cs typeface="Arial" panose="020B0604020202020204" pitchFamily="34" charset="0"/>
-              </a:rPr>
-              <a:t>Được</a:t>
-            </a:r>
-            <a:r>
-              <a:rPr lang="en-US" sz="3200" b="1" dirty="0">
-                <a:solidFill>
-                  <a:srgbClr val="660033"/>
-                </a:solidFill>
-                <a:latin typeface="Arial" panose="020B0604020202020204" pitchFamily="34" charset="0"/>
-                <a:cs typeface="Arial" panose="020B0604020202020204" pitchFamily="34" charset="0"/>
-              </a:rPr>
-              <a:t> </a:t>
-            </a:r>
-            <a:r>
-              <a:rPr lang="en-US" sz="3200" b="1" dirty="0" err="1">
-                <a:solidFill>
-                  <a:srgbClr val="660033"/>
-                </a:solidFill>
-                <a:latin typeface="Arial" panose="020B0604020202020204" pitchFamily="34" charset="0"/>
-                <a:cs typeface="Arial" panose="020B0604020202020204" pitchFamily="34" charset="0"/>
-              </a:rPr>
-              <a:t>đến</a:t>
-            </a:r>
-            <a:r>
-              <a:rPr lang="en-US" sz="3200" b="1" dirty="0">
-                <a:solidFill>
-                  <a:srgbClr val="660033"/>
-                </a:solidFill>
-                <a:latin typeface="Arial" panose="020B0604020202020204" pitchFamily="34" charset="0"/>
-                <a:cs typeface="Arial" panose="020B0604020202020204" pitchFamily="34" charset="0"/>
-              </a:rPr>
-              <a:t> </a:t>
-            </a:r>
-            <a:r>
-              <a:rPr lang="en-US" sz="3200" b="1" dirty="0" err="1">
-                <a:solidFill>
-                  <a:srgbClr val="660033"/>
-                </a:solidFill>
-                <a:latin typeface="Arial" panose="020B0604020202020204" pitchFamily="34" charset="0"/>
-                <a:cs typeface="Arial" panose="020B0604020202020204" pitchFamily="34" charset="0"/>
-              </a:rPr>
-              <a:t>bên</a:t>
-            </a:r>
-            <a:r>
-              <a:rPr lang="en-US" sz="3200" b="1" dirty="0">
-                <a:solidFill>
-                  <a:srgbClr val="660033"/>
-                </a:solidFill>
-                <a:latin typeface="Arial" panose="020B0604020202020204" pitchFamily="34" charset="0"/>
-                <a:cs typeface="Arial" panose="020B0604020202020204" pitchFamily="34" charset="0"/>
-              </a:rPr>
-              <a:t> Cha </a:t>
-            </a:r>
-            <a:r>
-              <a:rPr lang="en-US" sz="3200" b="1" dirty="0" err="1">
-                <a:solidFill>
-                  <a:srgbClr val="660033"/>
-                </a:solidFill>
-                <a:latin typeface="Arial" panose="020B0604020202020204" pitchFamily="34" charset="0"/>
-                <a:cs typeface="Arial" panose="020B0604020202020204" pitchFamily="34" charset="0"/>
-              </a:rPr>
-              <a:t>và</a:t>
-            </a:r>
-            <a:r>
-              <a:rPr lang="en-US" sz="3200" b="1" dirty="0">
-                <a:solidFill>
-                  <a:srgbClr val="660033"/>
-                </a:solidFill>
-                <a:latin typeface="Arial" panose="020B0604020202020204" pitchFamily="34" charset="0"/>
-                <a:cs typeface="Arial" panose="020B0604020202020204" pitchFamily="34" charset="0"/>
-              </a:rPr>
-              <a:t> </a:t>
-            </a:r>
-            <a:r>
-              <a:rPr lang="en-US" sz="3200" b="1" dirty="0" err="1">
-                <a:solidFill>
-                  <a:srgbClr val="660033"/>
-                </a:solidFill>
-                <a:latin typeface="Arial" panose="020B0604020202020204" pitchFamily="34" charset="0"/>
-                <a:cs typeface="Arial" panose="020B0604020202020204" pitchFamily="34" charset="0"/>
-              </a:rPr>
-              <a:t>thờ</a:t>
-            </a:r>
-            <a:r>
-              <a:rPr lang="en-US" sz="3200" b="1" dirty="0">
-                <a:solidFill>
-                  <a:srgbClr val="660033"/>
-                </a:solidFill>
-                <a:latin typeface="Arial" panose="020B0604020202020204" pitchFamily="34" charset="0"/>
-                <a:cs typeface="Arial" panose="020B0604020202020204" pitchFamily="34" charset="0"/>
-              </a:rPr>
-              <a:t> </a:t>
-            </a:r>
-            <a:r>
-              <a:rPr lang="en-US" sz="3200" b="1" dirty="0" err="1">
-                <a:solidFill>
-                  <a:srgbClr val="660033"/>
-                </a:solidFill>
-                <a:latin typeface="Arial" panose="020B0604020202020204" pitchFamily="34" charset="0"/>
-                <a:cs typeface="Arial" panose="020B0604020202020204" pitchFamily="34" charset="0"/>
-              </a:rPr>
-              <a:t>kính</a:t>
-            </a:r>
-            <a:r>
-              <a:rPr lang="en-US" sz="3200" b="1" dirty="0">
-                <a:solidFill>
-                  <a:srgbClr val="660033"/>
-                </a:solidFill>
-                <a:latin typeface="Arial" panose="020B0604020202020204" pitchFamily="34" charset="0"/>
-                <a:cs typeface="Arial" panose="020B0604020202020204" pitchFamily="34" charset="0"/>
-              </a:rPr>
-              <a:t> Cha </a:t>
-            </a:r>
-            <a:r>
-              <a:rPr lang="en-US" sz="3200" b="1" dirty="0" err="1">
-                <a:solidFill>
-                  <a:srgbClr val="660033"/>
-                </a:solidFill>
-                <a:latin typeface="Arial" panose="020B0604020202020204" pitchFamily="34" charset="0"/>
-                <a:cs typeface="Arial" panose="020B0604020202020204" pitchFamily="34" charset="0"/>
-              </a:rPr>
-              <a:t>đời</a:t>
-            </a:r>
-            <a:r>
-              <a:rPr lang="en-US" sz="3200" b="1" dirty="0">
-                <a:solidFill>
-                  <a:srgbClr val="660033"/>
-                </a:solidFill>
-                <a:latin typeface="Arial" panose="020B0604020202020204" pitchFamily="34" charset="0"/>
-                <a:cs typeface="Arial" panose="020B0604020202020204" pitchFamily="34" charset="0"/>
-              </a:rPr>
-              <a:t> </a:t>
-            </a:r>
-            <a:r>
-              <a:rPr lang="en-US" sz="3200" b="1" dirty="0" err="1">
-                <a:solidFill>
-                  <a:srgbClr val="660033"/>
-                </a:solidFill>
-                <a:latin typeface="Arial" panose="020B0604020202020204" pitchFamily="34" charset="0"/>
-                <a:cs typeface="Arial" panose="020B0604020202020204" pitchFamily="34" charset="0"/>
-              </a:rPr>
-              <a:t>đời</a:t>
-            </a:r>
-            <a:endParaRPr lang="en-US" sz="3200" b="1" dirty="0">
-              <a:solidFill>
-                <a:srgbClr val="660033"/>
-              </a:solidFill>
-              <a:latin typeface="Arial" panose="020B0604020202020204" pitchFamily="34" charset="0"/>
-              <a:cs typeface="Arial" panose="020B0604020202020204" pitchFamily="34" charset="0"/>
+              <a:ea typeface="Microsoft JhengHei" panose="020B0604030504040204" pitchFamily="34" charset="-120"/>
             </a:endParaRPr>
           </a:p>
         </p:txBody>
@@ -5286,40 +4791,1439 @@
     </p:spTree>
     <p:extLst>
       <p:ext uri="{BB962C8B-B14F-4D97-AF65-F5344CB8AC3E}">
-        <p14:creationId xmlns:p14="http://schemas.microsoft.com/office/powerpoint/2010/main" val="2827992100"/>
+        <p14:creationId xmlns:p14="http://schemas.microsoft.com/office/powerpoint/2010/main" val="708395640"/>
       </p:ext>
     </p:extLst>
   </p:cSld>
   <p:clrMapOvr>
     <a:masterClrMapping/>
   </p:clrMapOvr>
-  <p:timing>
-    <p:tnLst>
-      <p:par>
-        <p:cTn id="1" dur="indefinite" restart="never" nodeType="tmRoot">
-          <p:childTnLst>
-            <p:seq>
-              <p:cTn id="2" dur="indefinite" nodeType="mainSeq"/>
-              <p:prevCondLst>
-                <p:cond evt="onPrev" delay="0">
-                  <p:tgtEl>
-                    <p:sldTgt/>
-                  </p:tgtEl>
-                </p:cond>
-              </p:prevCondLst>
-              <p:nextCondLst>
-                <p:cond evt="onNext" delay="0">
-                  <p:tgtEl>
-                    <p:sldTgt/>
-                  </p:tgtEl>
-                </p:cond>
-              </p:nextCondLst>
-            </p:seq>
-          </p:childTnLst>
-        </p:cTn>
-      </p:par>
-    </p:tnLst>
-  </p:timing>
+</p:sld>
+</file>
+
+<file path=ppt/slides/slide6.xml><?xml version="1.0" encoding="utf-8"?>
+<p:sld xmlns:a="http://schemas.openxmlformats.org/drawingml/2006/main" xmlns:r="http://schemas.openxmlformats.org/officeDocument/2006/relationships" xmlns:p="http://schemas.openxmlformats.org/presentationml/2006/main">
+  <p:cSld>
+    <p:spTree>
+      <p:nvGrpSpPr>
+        <p:cNvPr id="1" name="">
+          <a:extLst>
+            <a:ext uri="{FF2B5EF4-FFF2-40B4-BE49-F238E27FC236}">
+              <a16:creationId xmlns:a16="http://schemas.microsoft.com/office/drawing/2014/main" id="{24040D13-D41C-3DDA-9ABA-77B14D6DC3A4}"/>
+            </a:ext>
+          </a:extLst>
+        </p:cNvPr>
+        <p:cNvGrpSpPr/>
+        <p:nvPr/>
+      </p:nvGrpSpPr>
+      <p:grpSpPr>
+        <a:xfrm>
+          <a:off x="0" y="0"/>
+          <a:ext cx="0" cy="0"/>
+          <a:chOff x="0" y="0"/>
+          <a:chExt cx="0" cy="0"/>
+        </a:xfrm>
+      </p:grpSpPr>
+      <p:sp>
+        <p:nvSpPr>
+          <p:cNvPr id="6" name="內容版面配置區 4">
+            <a:extLst>
+              <a:ext uri="{FF2B5EF4-FFF2-40B4-BE49-F238E27FC236}">
+                <a16:creationId xmlns:a16="http://schemas.microsoft.com/office/drawing/2014/main" id="{4C13C22D-AB0E-3855-6806-C745A894DAF3}"/>
+              </a:ext>
+            </a:extLst>
+          </p:cNvPr>
+          <p:cNvSpPr>
+            <a:spLocks noGrp="1"/>
+          </p:cNvSpPr>
+          <p:nvPr>
+            <p:ph idx="1"/>
+          </p:nvPr>
+        </p:nvSpPr>
+        <p:spPr>
+          <a:xfrm>
+            <a:off x="-1" y="1767434"/>
+            <a:ext cx="10080625" cy="1089939"/>
+          </a:xfrm>
+        </p:spPr>
+        <p:txBody>
+          <a:bodyPr anchor="ctr">
+            <a:normAutofit/>
+          </a:bodyPr>
+          <a:lstStyle/>
+          <a:p>
+            <a:pPr algn="ctr">
+              <a:buNone/>
+            </a:pPr>
+            <a:r>
+              <a:rPr lang="zh-TW" altLang="en-US" sz="5400" b="1" dirty="0">
+                <a:solidFill>
+                  <a:srgbClr val="000066"/>
+                </a:solidFill>
+                <a:latin typeface="微軟正黑體" pitchFamily="34" charset="-120"/>
+                <a:ea typeface="微軟正黑體" pitchFamily="34" charset="-120"/>
+              </a:rPr>
+              <a:t>祢是我的力量盾牌</a:t>
+            </a:r>
+          </a:p>
+        </p:txBody>
+      </p:sp>
+      <p:sp>
+        <p:nvSpPr>
+          <p:cNvPr id="7" name="內容版面配置區 4">
+            <a:extLst>
+              <a:ext uri="{FF2B5EF4-FFF2-40B4-BE49-F238E27FC236}">
+                <a16:creationId xmlns:a16="http://schemas.microsoft.com/office/drawing/2014/main" id="{A563E251-BA0F-20D4-151D-CB4A96B05A4E}"/>
+              </a:ext>
+            </a:extLst>
+          </p:cNvPr>
+          <p:cNvSpPr txBox="1">
+            <a:spLocks/>
+          </p:cNvSpPr>
+          <p:nvPr/>
+        </p:nvSpPr>
+        <p:spPr>
+          <a:xfrm>
+            <a:off x="-1" y="2552543"/>
+            <a:ext cx="10080625" cy="1089939"/>
+          </a:xfrm>
+          <a:prstGeom prst="rect">
+            <a:avLst/>
+          </a:prstGeom>
+        </p:spPr>
+        <p:txBody>
+          <a:bodyPr vert="horz" lIns="75605" tIns="37802" rIns="75605" bIns="37802" rtlCol="0" anchor="ctr">
+            <a:normAutofit/>
+          </a:bodyPr>
+          <a:lstStyle>
+            <a:lvl1pPr marL="457189" indent="-457189" algn="l" defTabSz="1219170" rtl="0" eaLnBrk="1" latinLnBrk="0" hangingPunct="1">
+              <a:spcBef>
+                <a:spcPct val="20000"/>
+              </a:spcBef>
+              <a:buFont typeface="Arial" pitchFamily="34" charset="0"/>
+              <a:buChar char="•"/>
+              <a:defRPr sz="4267" kern="1200">
+                <a:solidFill>
+                  <a:schemeClr val="tx1"/>
+                </a:solidFill>
+                <a:latin typeface="+mn-lt"/>
+                <a:ea typeface="+mn-ea"/>
+                <a:cs typeface="+mn-cs"/>
+              </a:defRPr>
+            </a:lvl1pPr>
+            <a:lvl2pPr marL="990575" indent="-380990" algn="l" defTabSz="1219170" rtl="0" eaLnBrk="1" latinLnBrk="0" hangingPunct="1">
+              <a:spcBef>
+                <a:spcPct val="20000"/>
+              </a:spcBef>
+              <a:buFont typeface="Arial" pitchFamily="34" charset="0"/>
+              <a:buChar char="–"/>
+              <a:defRPr sz="3733" kern="1200">
+                <a:solidFill>
+                  <a:schemeClr val="tx1"/>
+                </a:solidFill>
+                <a:latin typeface="+mn-lt"/>
+                <a:ea typeface="+mn-ea"/>
+                <a:cs typeface="+mn-cs"/>
+              </a:defRPr>
+            </a:lvl2pPr>
+            <a:lvl3pPr marL="1523962" indent="-304792" algn="l" defTabSz="1219170" rtl="0" eaLnBrk="1" latinLnBrk="0" hangingPunct="1">
+              <a:spcBef>
+                <a:spcPct val="20000"/>
+              </a:spcBef>
+              <a:buFont typeface="Arial" pitchFamily="34" charset="0"/>
+              <a:buChar char="•"/>
+              <a:defRPr sz="3200" kern="1200">
+                <a:solidFill>
+                  <a:schemeClr val="tx1"/>
+                </a:solidFill>
+                <a:latin typeface="+mn-lt"/>
+                <a:ea typeface="+mn-ea"/>
+                <a:cs typeface="+mn-cs"/>
+              </a:defRPr>
+            </a:lvl3pPr>
+            <a:lvl4pPr marL="2133547" indent="-304792" algn="l" defTabSz="1219170" rtl="0" eaLnBrk="1" latinLnBrk="0" hangingPunct="1">
+              <a:spcBef>
+                <a:spcPct val="20000"/>
+              </a:spcBef>
+              <a:buFont typeface="Arial" pitchFamily="34" charset="0"/>
+              <a:buChar char="–"/>
+              <a:defRPr sz="2667" kern="1200">
+                <a:solidFill>
+                  <a:schemeClr val="tx1"/>
+                </a:solidFill>
+                <a:latin typeface="+mn-lt"/>
+                <a:ea typeface="+mn-ea"/>
+                <a:cs typeface="+mn-cs"/>
+              </a:defRPr>
+            </a:lvl4pPr>
+            <a:lvl5pPr marL="2743131" indent="-304792" algn="l" defTabSz="1219170" rtl="0" eaLnBrk="1" latinLnBrk="0" hangingPunct="1">
+              <a:spcBef>
+                <a:spcPct val="20000"/>
+              </a:spcBef>
+              <a:buFont typeface="Arial" pitchFamily="34" charset="0"/>
+              <a:buChar char="»"/>
+              <a:defRPr sz="2667" kern="1200">
+                <a:solidFill>
+                  <a:schemeClr val="tx1"/>
+                </a:solidFill>
+                <a:latin typeface="+mn-lt"/>
+                <a:ea typeface="+mn-ea"/>
+                <a:cs typeface="+mn-cs"/>
+              </a:defRPr>
+            </a:lvl5pPr>
+            <a:lvl6pPr marL="3352716" indent="-304792" algn="l" defTabSz="1219170" rtl="0" eaLnBrk="1" latinLnBrk="0" hangingPunct="1">
+              <a:spcBef>
+                <a:spcPct val="20000"/>
+              </a:spcBef>
+              <a:buFont typeface="Arial" pitchFamily="34" charset="0"/>
+              <a:buChar char="•"/>
+              <a:defRPr sz="2667" kern="1200">
+                <a:solidFill>
+                  <a:schemeClr val="tx1"/>
+                </a:solidFill>
+                <a:latin typeface="+mn-lt"/>
+                <a:ea typeface="+mn-ea"/>
+                <a:cs typeface="+mn-cs"/>
+              </a:defRPr>
+            </a:lvl6pPr>
+            <a:lvl7pPr marL="3962301" indent="-304792" algn="l" defTabSz="1219170" rtl="0" eaLnBrk="1" latinLnBrk="0" hangingPunct="1">
+              <a:spcBef>
+                <a:spcPct val="20000"/>
+              </a:spcBef>
+              <a:buFont typeface="Arial" pitchFamily="34" charset="0"/>
+              <a:buChar char="•"/>
+              <a:defRPr sz="2667" kern="1200">
+                <a:solidFill>
+                  <a:schemeClr val="tx1"/>
+                </a:solidFill>
+                <a:latin typeface="+mn-lt"/>
+                <a:ea typeface="+mn-ea"/>
+                <a:cs typeface="+mn-cs"/>
+              </a:defRPr>
+            </a:lvl7pPr>
+            <a:lvl8pPr marL="4571886" indent="-304792" algn="l" defTabSz="1219170" rtl="0" eaLnBrk="1" latinLnBrk="0" hangingPunct="1">
+              <a:spcBef>
+                <a:spcPct val="20000"/>
+              </a:spcBef>
+              <a:buFont typeface="Arial" pitchFamily="34" charset="0"/>
+              <a:buChar char="•"/>
+              <a:defRPr sz="2667" kern="1200">
+                <a:solidFill>
+                  <a:schemeClr val="tx1"/>
+                </a:solidFill>
+                <a:latin typeface="+mn-lt"/>
+                <a:ea typeface="+mn-ea"/>
+                <a:cs typeface="+mn-cs"/>
+              </a:defRPr>
+            </a:lvl8pPr>
+            <a:lvl9pPr marL="5181470" indent="-304792" algn="l" defTabSz="1219170" rtl="0" eaLnBrk="1" latinLnBrk="0" hangingPunct="1">
+              <a:spcBef>
+                <a:spcPct val="20000"/>
+              </a:spcBef>
+              <a:buFont typeface="Arial" pitchFamily="34" charset="0"/>
+              <a:buChar char="•"/>
+              <a:defRPr sz="2667" kern="1200">
+                <a:solidFill>
+                  <a:schemeClr val="tx1"/>
+                </a:solidFill>
+                <a:latin typeface="+mn-lt"/>
+                <a:ea typeface="+mn-ea"/>
+                <a:cs typeface="+mn-cs"/>
+              </a:defRPr>
+            </a:lvl9pPr>
+          </a:lstStyle>
+          <a:p>
+            <a:pPr marL="0" indent="0" algn="ctr">
+              <a:buNone/>
+            </a:pPr>
+            <a:r>
+              <a:rPr lang="vi-VN" sz="3307" b="1" dirty="0">
+                <a:solidFill>
+                  <a:srgbClr val="660033"/>
+                </a:solidFill>
+                <a:latin typeface="Times New Roman" panose="02020603050405020304" pitchFamily="18" charset="0"/>
+                <a:ea typeface="微軟正黑體" pitchFamily="34" charset="-120"/>
+                <a:cs typeface="Times New Roman" panose="02020603050405020304" pitchFamily="18" charset="0"/>
+              </a:rPr>
+              <a:t>Tâm linh con chỉ mong nương nơi Ngài</a:t>
+            </a:r>
+          </a:p>
+        </p:txBody>
+      </p:sp>
+      <p:sp>
+        <p:nvSpPr>
+          <p:cNvPr id="8" name="TextBox 7">
+            <a:extLst>
+              <a:ext uri="{FF2B5EF4-FFF2-40B4-BE49-F238E27FC236}">
+                <a16:creationId xmlns:a16="http://schemas.microsoft.com/office/drawing/2014/main" id="{BF4B16BC-846C-C350-6A62-950864DF8719}"/>
+              </a:ext>
+            </a:extLst>
+          </p:cNvPr>
+          <p:cNvSpPr txBox="1"/>
+          <p:nvPr/>
+        </p:nvSpPr>
+        <p:spPr>
+          <a:xfrm>
+            <a:off x="-1" y="4343568"/>
+            <a:ext cx="10080625" cy="448584"/>
+          </a:xfrm>
+          <a:prstGeom prst="rect">
+            <a:avLst/>
+          </a:prstGeom>
+          <a:noFill/>
+        </p:spPr>
+        <p:txBody>
+          <a:bodyPr wrap="square" rtlCol="0">
+            <a:spAutoFit/>
+          </a:bodyPr>
+          <a:lstStyle/>
+          <a:p>
+            <a:pPr algn="ctr"/>
+            <a:r>
+              <a:rPr lang="en-US" sz="2315" b="1" dirty="0">
+                <a:solidFill>
+                  <a:srgbClr val="000066"/>
+                </a:solidFill>
+                <a:latin typeface="Microsoft JhengHei" panose="020B0604030504040204" pitchFamily="34" charset="-120"/>
+                <a:ea typeface="Microsoft JhengHei" panose="020B0604030504040204" pitchFamily="34" charset="-120"/>
+              </a:rPr>
+              <a:t>( </a:t>
+            </a:r>
+            <a:r>
+              <a:rPr lang="zh-CN" altLang="en-US" sz="2315" b="1" dirty="0">
+                <a:solidFill>
+                  <a:srgbClr val="000066"/>
+                </a:solidFill>
+                <a:latin typeface="Microsoft JhengHei" panose="020B0604030504040204" pitchFamily="34" charset="-120"/>
+                <a:ea typeface="Microsoft JhengHei" panose="020B0604030504040204" pitchFamily="34" charset="-120"/>
+              </a:rPr>
+              <a:t>副歌</a:t>
+            </a:r>
+            <a:r>
+              <a:rPr lang="en-US" sz="2315" b="1" dirty="0">
+                <a:solidFill>
+                  <a:srgbClr val="000066"/>
+                </a:solidFill>
+                <a:latin typeface="Microsoft JhengHei" panose="020B0604030504040204" pitchFamily="34" charset="-120"/>
+                <a:ea typeface="Microsoft JhengHei" panose="020B0604030504040204" pitchFamily="34" charset="-120"/>
+              </a:rPr>
+              <a:t> )</a:t>
+            </a:r>
+            <a:endParaRPr lang="vi-VN" sz="2315" b="1" dirty="0">
+              <a:solidFill>
+                <a:srgbClr val="000066"/>
+              </a:solidFill>
+              <a:ea typeface="Microsoft JhengHei" panose="020B0604030504040204" pitchFamily="34" charset="-120"/>
+            </a:endParaRPr>
+          </a:p>
+        </p:txBody>
+      </p:sp>
+    </p:spTree>
+    <p:extLst>
+      <p:ext uri="{BB962C8B-B14F-4D97-AF65-F5344CB8AC3E}">
+        <p14:creationId xmlns:p14="http://schemas.microsoft.com/office/powerpoint/2010/main" val="3344676335"/>
+      </p:ext>
+    </p:extLst>
+  </p:cSld>
+  <p:clrMapOvr>
+    <a:masterClrMapping/>
+  </p:clrMapOvr>
+</p:sld>
+</file>
+
+<file path=ppt/slides/slide7.xml><?xml version="1.0" encoding="utf-8"?>
+<p:sld xmlns:a="http://schemas.openxmlformats.org/drawingml/2006/main" xmlns:r="http://schemas.openxmlformats.org/officeDocument/2006/relationships" xmlns:p="http://schemas.openxmlformats.org/presentationml/2006/main">
+  <p:cSld>
+    <p:spTree>
+      <p:nvGrpSpPr>
+        <p:cNvPr id="1" name="">
+          <a:extLst>
+            <a:ext uri="{FF2B5EF4-FFF2-40B4-BE49-F238E27FC236}">
+              <a16:creationId xmlns:a16="http://schemas.microsoft.com/office/drawing/2014/main" id="{F149D8EA-4238-4658-AEC7-086F11F8EC8C}"/>
+            </a:ext>
+          </a:extLst>
+        </p:cNvPr>
+        <p:cNvGrpSpPr/>
+        <p:nvPr/>
+      </p:nvGrpSpPr>
+      <p:grpSpPr>
+        <a:xfrm>
+          <a:off x="0" y="0"/>
+          <a:ext cx="0" cy="0"/>
+          <a:chOff x="0" y="0"/>
+          <a:chExt cx="0" cy="0"/>
+        </a:xfrm>
+      </p:grpSpPr>
+      <p:sp>
+        <p:nvSpPr>
+          <p:cNvPr id="6" name="內容版面配置區 4">
+            <a:extLst>
+              <a:ext uri="{FF2B5EF4-FFF2-40B4-BE49-F238E27FC236}">
+                <a16:creationId xmlns:a16="http://schemas.microsoft.com/office/drawing/2014/main" id="{E4370AB5-DD7E-C06A-A4E8-DFD0BB08925D}"/>
+              </a:ext>
+            </a:extLst>
+          </p:cNvPr>
+          <p:cNvSpPr>
+            <a:spLocks noGrp="1"/>
+          </p:cNvSpPr>
+          <p:nvPr>
+            <p:ph idx="1"/>
+          </p:nvPr>
+        </p:nvSpPr>
+        <p:spPr>
+          <a:xfrm>
+            <a:off x="-1" y="1767434"/>
+            <a:ext cx="10080625" cy="1089939"/>
+          </a:xfrm>
+        </p:spPr>
+        <p:txBody>
+          <a:bodyPr anchor="ctr">
+            <a:normAutofit/>
+          </a:bodyPr>
+          <a:lstStyle/>
+          <a:p>
+            <a:pPr algn="ctr">
+              <a:buNone/>
+            </a:pPr>
+            <a:r>
+              <a:rPr lang="zh-TW" altLang="en-US" sz="5400" b="1" dirty="0">
+                <a:solidFill>
+                  <a:srgbClr val="000066"/>
+                </a:solidFill>
+                <a:latin typeface="微軟正黑體" pitchFamily="34" charset="-120"/>
+                <a:ea typeface="微軟正黑體" pitchFamily="34" charset="-120"/>
+              </a:rPr>
+              <a:t>我靈單單降服於祢</a:t>
+            </a:r>
+          </a:p>
+        </p:txBody>
+      </p:sp>
+      <p:sp>
+        <p:nvSpPr>
+          <p:cNvPr id="7" name="內容版面配置區 4">
+            <a:extLst>
+              <a:ext uri="{FF2B5EF4-FFF2-40B4-BE49-F238E27FC236}">
+                <a16:creationId xmlns:a16="http://schemas.microsoft.com/office/drawing/2014/main" id="{C30FCB52-141B-2C72-E52A-35428D3D2A85}"/>
+              </a:ext>
+            </a:extLst>
+          </p:cNvPr>
+          <p:cNvSpPr txBox="1">
+            <a:spLocks/>
+          </p:cNvSpPr>
+          <p:nvPr/>
+        </p:nvSpPr>
+        <p:spPr>
+          <a:xfrm>
+            <a:off x="-1" y="2552543"/>
+            <a:ext cx="10080625" cy="1089939"/>
+          </a:xfrm>
+          <a:prstGeom prst="rect">
+            <a:avLst/>
+          </a:prstGeom>
+        </p:spPr>
+        <p:txBody>
+          <a:bodyPr vert="horz" lIns="75605" tIns="37802" rIns="75605" bIns="37802" rtlCol="0" anchor="ctr">
+            <a:normAutofit/>
+          </a:bodyPr>
+          <a:lstStyle>
+            <a:lvl1pPr marL="457189" indent="-457189" algn="l" defTabSz="1219170" rtl="0" eaLnBrk="1" latinLnBrk="0" hangingPunct="1">
+              <a:spcBef>
+                <a:spcPct val="20000"/>
+              </a:spcBef>
+              <a:buFont typeface="Arial" pitchFamily="34" charset="0"/>
+              <a:buChar char="•"/>
+              <a:defRPr sz="4267" kern="1200">
+                <a:solidFill>
+                  <a:schemeClr val="tx1"/>
+                </a:solidFill>
+                <a:latin typeface="+mn-lt"/>
+                <a:ea typeface="+mn-ea"/>
+                <a:cs typeface="+mn-cs"/>
+              </a:defRPr>
+            </a:lvl1pPr>
+            <a:lvl2pPr marL="990575" indent="-380990" algn="l" defTabSz="1219170" rtl="0" eaLnBrk="1" latinLnBrk="0" hangingPunct="1">
+              <a:spcBef>
+                <a:spcPct val="20000"/>
+              </a:spcBef>
+              <a:buFont typeface="Arial" pitchFamily="34" charset="0"/>
+              <a:buChar char="–"/>
+              <a:defRPr sz="3733" kern="1200">
+                <a:solidFill>
+                  <a:schemeClr val="tx1"/>
+                </a:solidFill>
+                <a:latin typeface="+mn-lt"/>
+                <a:ea typeface="+mn-ea"/>
+                <a:cs typeface="+mn-cs"/>
+              </a:defRPr>
+            </a:lvl2pPr>
+            <a:lvl3pPr marL="1523962" indent="-304792" algn="l" defTabSz="1219170" rtl="0" eaLnBrk="1" latinLnBrk="0" hangingPunct="1">
+              <a:spcBef>
+                <a:spcPct val="20000"/>
+              </a:spcBef>
+              <a:buFont typeface="Arial" pitchFamily="34" charset="0"/>
+              <a:buChar char="•"/>
+              <a:defRPr sz="3200" kern="1200">
+                <a:solidFill>
+                  <a:schemeClr val="tx1"/>
+                </a:solidFill>
+                <a:latin typeface="+mn-lt"/>
+                <a:ea typeface="+mn-ea"/>
+                <a:cs typeface="+mn-cs"/>
+              </a:defRPr>
+            </a:lvl3pPr>
+            <a:lvl4pPr marL="2133547" indent="-304792" algn="l" defTabSz="1219170" rtl="0" eaLnBrk="1" latinLnBrk="0" hangingPunct="1">
+              <a:spcBef>
+                <a:spcPct val="20000"/>
+              </a:spcBef>
+              <a:buFont typeface="Arial" pitchFamily="34" charset="0"/>
+              <a:buChar char="–"/>
+              <a:defRPr sz="2667" kern="1200">
+                <a:solidFill>
+                  <a:schemeClr val="tx1"/>
+                </a:solidFill>
+                <a:latin typeface="+mn-lt"/>
+                <a:ea typeface="+mn-ea"/>
+                <a:cs typeface="+mn-cs"/>
+              </a:defRPr>
+            </a:lvl4pPr>
+            <a:lvl5pPr marL="2743131" indent="-304792" algn="l" defTabSz="1219170" rtl="0" eaLnBrk="1" latinLnBrk="0" hangingPunct="1">
+              <a:spcBef>
+                <a:spcPct val="20000"/>
+              </a:spcBef>
+              <a:buFont typeface="Arial" pitchFamily="34" charset="0"/>
+              <a:buChar char="»"/>
+              <a:defRPr sz="2667" kern="1200">
+                <a:solidFill>
+                  <a:schemeClr val="tx1"/>
+                </a:solidFill>
+                <a:latin typeface="+mn-lt"/>
+                <a:ea typeface="+mn-ea"/>
+                <a:cs typeface="+mn-cs"/>
+              </a:defRPr>
+            </a:lvl5pPr>
+            <a:lvl6pPr marL="3352716" indent="-304792" algn="l" defTabSz="1219170" rtl="0" eaLnBrk="1" latinLnBrk="0" hangingPunct="1">
+              <a:spcBef>
+                <a:spcPct val="20000"/>
+              </a:spcBef>
+              <a:buFont typeface="Arial" pitchFamily="34" charset="0"/>
+              <a:buChar char="•"/>
+              <a:defRPr sz="2667" kern="1200">
+                <a:solidFill>
+                  <a:schemeClr val="tx1"/>
+                </a:solidFill>
+                <a:latin typeface="+mn-lt"/>
+                <a:ea typeface="+mn-ea"/>
+                <a:cs typeface="+mn-cs"/>
+              </a:defRPr>
+            </a:lvl6pPr>
+            <a:lvl7pPr marL="3962301" indent="-304792" algn="l" defTabSz="1219170" rtl="0" eaLnBrk="1" latinLnBrk="0" hangingPunct="1">
+              <a:spcBef>
+                <a:spcPct val="20000"/>
+              </a:spcBef>
+              <a:buFont typeface="Arial" pitchFamily="34" charset="0"/>
+              <a:buChar char="•"/>
+              <a:defRPr sz="2667" kern="1200">
+                <a:solidFill>
+                  <a:schemeClr val="tx1"/>
+                </a:solidFill>
+                <a:latin typeface="+mn-lt"/>
+                <a:ea typeface="+mn-ea"/>
+                <a:cs typeface="+mn-cs"/>
+              </a:defRPr>
+            </a:lvl7pPr>
+            <a:lvl8pPr marL="4571886" indent="-304792" algn="l" defTabSz="1219170" rtl="0" eaLnBrk="1" latinLnBrk="0" hangingPunct="1">
+              <a:spcBef>
+                <a:spcPct val="20000"/>
+              </a:spcBef>
+              <a:buFont typeface="Arial" pitchFamily="34" charset="0"/>
+              <a:buChar char="•"/>
+              <a:defRPr sz="2667" kern="1200">
+                <a:solidFill>
+                  <a:schemeClr val="tx1"/>
+                </a:solidFill>
+                <a:latin typeface="+mn-lt"/>
+                <a:ea typeface="+mn-ea"/>
+                <a:cs typeface="+mn-cs"/>
+              </a:defRPr>
+            </a:lvl8pPr>
+            <a:lvl9pPr marL="5181470" indent="-304792" algn="l" defTabSz="1219170" rtl="0" eaLnBrk="1" latinLnBrk="0" hangingPunct="1">
+              <a:spcBef>
+                <a:spcPct val="20000"/>
+              </a:spcBef>
+              <a:buFont typeface="Arial" pitchFamily="34" charset="0"/>
+              <a:buChar char="•"/>
+              <a:defRPr sz="2667" kern="1200">
+                <a:solidFill>
+                  <a:schemeClr val="tx1"/>
+                </a:solidFill>
+                <a:latin typeface="+mn-lt"/>
+                <a:ea typeface="+mn-ea"/>
+                <a:cs typeface="+mn-cs"/>
+              </a:defRPr>
+            </a:lvl9pPr>
+          </a:lstStyle>
+          <a:p>
+            <a:pPr marL="0" indent="0" algn="ctr">
+              <a:buNone/>
+            </a:pPr>
+            <a:r>
+              <a:rPr lang="vi-VN" sz="3307" b="1" dirty="0">
+                <a:solidFill>
+                  <a:srgbClr val="660033"/>
+                </a:solidFill>
+                <a:latin typeface="Times New Roman" panose="02020603050405020304" pitchFamily="18" charset="0"/>
+                <a:ea typeface="微軟正黑體" pitchFamily="34" charset="-120"/>
+                <a:cs typeface="Times New Roman" panose="02020603050405020304" pitchFamily="18" charset="0"/>
+              </a:rPr>
+              <a:t>Vì chính sức Chúa dẫn đưa con mỗi ngày</a:t>
+            </a:r>
+          </a:p>
+        </p:txBody>
+      </p:sp>
+      <p:sp>
+        <p:nvSpPr>
+          <p:cNvPr id="8" name="TextBox 7">
+            <a:extLst>
+              <a:ext uri="{FF2B5EF4-FFF2-40B4-BE49-F238E27FC236}">
+                <a16:creationId xmlns:a16="http://schemas.microsoft.com/office/drawing/2014/main" id="{9C08F8FE-A0F5-DB9A-68E3-5D0E625CE8F5}"/>
+              </a:ext>
+            </a:extLst>
+          </p:cNvPr>
+          <p:cNvSpPr txBox="1"/>
+          <p:nvPr/>
+        </p:nvSpPr>
+        <p:spPr>
+          <a:xfrm>
+            <a:off x="-1" y="4343568"/>
+            <a:ext cx="10080625" cy="448584"/>
+          </a:xfrm>
+          <a:prstGeom prst="rect">
+            <a:avLst/>
+          </a:prstGeom>
+          <a:noFill/>
+        </p:spPr>
+        <p:txBody>
+          <a:bodyPr wrap="square" rtlCol="0">
+            <a:spAutoFit/>
+          </a:bodyPr>
+          <a:lstStyle/>
+          <a:p>
+            <a:pPr algn="ctr"/>
+            <a:r>
+              <a:rPr lang="en-US" sz="2315" b="1" dirty="0">
+                <a:solidFill>
+                  <a:srgbClr val="000066"/>
+                </a:solidFill>
+                <a:latin typeface="Microsoft JhengHei" panose="020B0604030504040204" pitchFamily="34" charset="-120"/>
+                <a:ea typeface="Microsoft JhengHei" panose="020B0604030504040204" pitchFamily="34" charset="-120"/>
+              </a:rPr>
+              <a:t>( </a:t>
+            </a:r>
+            <a:r>
+              <a:rPr lang="zh-CN" altLang="en-US" sz="2315" b="1" dirty="0">
+                <a:solidFill>
+                  <a:srgbClr val="000066"/>
+                </a:solidFill>
+                <a:latin typeface="Microsoft JhengHei" panose="020B0604030504040204" pitchFamily="34" charset="-120"/>
+                <a:ea typeface="Microsoft JhengHei" panose="020B0604030504040204" pitchFamily="34" charset="-120"/>
+              </a:rPr>
+              <a:t>副歌</a:t>
+            </a:r>
+            <a:r>
+              <a:rPr lang="en-US" sz="2315" b="1" dirty="0">
+                <a:solidFill>
+                  <a:srgbClr val="000066"/>
+                </a:solidFill>
+                <a:latin typeface="Microsoft JhengHei" panose="020B0604030504040204" pitchFamily="34" charset="-120"/>
+                <a:ea typeface="Microsoft JhengHei" panose="020B0604030504040204" pitchFamily="34" charset="-120"/>
+              </a:rPr>
+              <a:t> )</a:t>
+            </a:r>
+            <a:endParaRPr lang="vi-VN" sz="2315" b="1" dirty="0">
+              <a:solidFill>
+                <a:srgbClr val="000066"/>
+              </a:solidFill>
+              <a:ea typeface="Microsoft JhengHei" panose="020B0604030504040204" pitchFamily="34" charset="-120"/>
+            </a:endParaRPr>
+          </a:p>
+        </p:txBody>
+      </p:sp>
+    </p:spTree>
+    <p:extLst>
+      <p:ext uri="{BB962C8B-B14F-4D97-AF65-F5344CB8AC3E}">
+        <p14:creationId xmlns:p14="http://schemas.microsoft.com/office/powerpoint/2010/main" val="3898240510"/>
+      </p:ext>
+    </p:extLst>
+  </p:cSld>
+  <p:clrMapOvr>
+    <a:masterClrMapping/>
+  </p:clrMapOvr>
+</p:sld>
+</file>
+
+<file path=ppt/slides/slide8.xml><?xml version="1.0" encoding="utf-8"?>
+<p:sld xmlns:a="http://schemas.openxmlformats.org/drawingml/2006/main" xmlns:r="http://schemas.openxmlformats.org/officeDocument/2006/relationships" xmlns:p="http://schemas.openxmlformats.org/presentationml/2006/main">
+  <p:cSld>
+    <p:spTree>
+      <p:nvGrpSpPr>
+        <p:cNvPr id="1" name="">
+          <a:extLst>
+            <a:ext uri="{FF2B5EF4-FFF2-40B4-BE49-F238E27FC236}">
+              <a16:creationId xmlns:a16="http://schemas.microsoft.com/office/drawing/2014/main" id="{B6455F65-A97D-52E5-BE3F-67F81C64D575}"/>
+            </a:ext>
+          </a:extLst>
+        </p:cNvPr>
+        <p:cNvGrpSpPr/>
+        <p:nvPr/>
+      </p:nvGrpSpPr>
+      <p:grpSpPr>
+        <a:xfrm>
+          <a:off x="0" y="0"/>
+          <a:ext cx="0" cy="0"/>
+          <a:chOff x="0" y="0"/>
+          <a:chExt cx="0" cy="0"/>
+        </a:xfrm>
+      </p:grpSpPr>
+      <p:sp>
+        <p:nvSpPr>
+          <p:cNvPr id="6" name="內容版面配置區 4">
+            <a:extLst>
+              <a:ext uri="{FF2B5EF4-FFF2-40B4-BE49-F238E27FC236}">
+                <a16:creationId xmlns:a16="http://schemas.microsoft.com/office/drawing/2014/main" id="{1480A6E0-398A-FB7F-5A6F-3B5149004443}"/>
+              </a:ext>
+            </a:extLst>
+          </p:cNvPr>
+          <p:cNvSpPr>
+            <a:spLocks noGrp="1"/>
+          </p:cNvSpPr>
+          <p:nvPr>
+            <p:ph idx="1"/>
+          </p:nvPr>
+        </p:nvSpPr>
+        <p:spPr>
+          <a:xfrm>
+            <a:off x="-1" y="1767434"/>
+            <a:ext cx="10080625" cy="1089939"/>
+          </a:xfrm>
+        </p:spPr>
+        <p:txBody>
+          <a:bodyPr anchor="ctr">
+            <a:normAutofit/>
+          </a:bodyPr>
+          <a:lstStyle/>
+          <a:p>
+            <a:pPr algn="ctr">
+              <a:buNone/>
+            </a:pPr>
+            <a:r>
+              <a:rPr lang="zh-TW" altLang="en-US" sz="5400" b="1" dirty="0">
+                <a:solidFill>
+                  <a:srgbClr val="000066"/>
+                </a:solidFill>
+                <a:latin typeface="微軟正黑體" pitchFamily="34" charset="-120"/>
+                <a:ea typeface="微軟正黑體" pitchFamily="34" charset="-120"/>
+              </a:rPr>
+              <a:t>惟有祢是我心</a:t>
+            </a:r>
+          </a:p>
+        </p:txBody>
+      </p:sp>
+      <p:sp>
+        <p:nvSpPr>
+          <p:cNvPr id="7" name="內容版面配置區 4">
+            <a:extLst>
+              <a:ext uri="{FF2B5EF4-FFF2-40B4-BE49-F238E27FC236}">
+                <a16:creationId xmlns:a16="http://schemas.microsoft.com/office/drawing/2014/main" id="{4AE77F5A-C474-2C15-40F9-04A4EA68D7A1}"/>
+              </a:ext>
+            </a:extLst>
+          </p:cNvPr>
+          <p:cNvSpPr txBox="1">
+            <a:spLocks/>
+          </p:cNvSpPr>
+          <p:nvPr/>
+        </p:nvSpPr>
+        <p:spPr>
+          <a:xfrm>
+            <a:off x="-1" y="2552543"/>
+            <a:ext cx="10080625" cy="1089939"/>
+          </a:xfrm>
+          <a:prstGeom prst="rect">
+            <a:avLst/>
+          </a:prstGeom>
+        </p:spPr>
+        <p:txBody>
+          <a:bodyPr vert="horz" lIns="75605" tIns="37802" rIns="75605" bIns="37802" rtlCol="0" anchor="ctr">
+            <a:normAutofit/>
+          </a:bodyPr>
+          <a:lstStyle>
+            <a:lvl1pPr marL="457189" indent="-457189" algn="l" defTabSz="1219170" rtl="0" eaLnBrk="1" latinLnBrk="0" hangingPunct="1">
+              <a:spcBef>
+                <a:spcPct val="20000"/>
+              </a:spcBef>
+              <a:buFont typeface="Arial" pitchFamily="34" charset="0"/>
+              <a:buChar char="•"/>
+              <a:defRPr sz="4267" kern="1200">
+                <a:solidFill>
+                  <a:schemeClr val="tx1"/>
+                </a:solidFill>
+                <a:latin typeface="+mn-lt"/>
+                <a:ea typeface="+mn-ea"/>
+                <a:cs typeface="+mn-cs"/>
+              </a:defRPr>
+            </a:lvl1pPr>
+            <a:lvl2pPr marL="990575" indent="-380990" algn="l" defTabSz="1219170" rtl="0" eaLnBrk="1" latinLnBrk="0" hangingPunct="1">
+              <a:spcBef>
+                <a:spcPct val="20000"/>
+              </a:spcBef>
+              <a:buFont typeface="Arial" pitchFamily="34" charset="0"/>
+              <a:buChar char="–"/>
+              <a:defRPr sz="3733" kern="1200">
+                <a:solidFill>
+                  <a:schemeClr val="tx1"/>
+                </a:solidFill>
+                <a:latin typeface="+mn-lt"/>
+                <a:ea typeface="+mn-ea"/>
+                <a:cs typeface="+mn-cs"/>
+              </a:defRPr>
+            </a:lvl2pPr>
+            <a:lvl3pPr marL="1523962" indent="-304792" algn="l" defTabSz="1219170" rtl="0" eaLnBrk="1" latinLnBrk="0" hangingPunct="1">
+              <a:spcBef>
+                <a:spcPct val="20000"/>
+              </a:spcBef>
+              <a:buFont typeface="Arial" pitchFamily="34" charset="0"/>
+              <a:buChar char="•"/>
+              <a:defRPr sz="3200" kern="1200">
+                <a:solidFill>
+                  <a:schemeClr val="tx1"/>
+                </a:solidFill>
+                <a:latin typeface="+mn-lt"/>
+                <a:ea typeface="+mn-ea"/>
+                <a:cs typeface="+mn-cs"/>
+              </a:defRPr>
+            </a:lvl3pPr>
+            <a:lvl4pPr marL="2133547" indent="-304792" algn="l" defTabSz="1219170" rtl="0" eaLnBrk="1" latinLnBrk="0" hangingPunct="1">
+              <a:spcBef>
+                <a:spcPct val="20000"/>
+              </a:spcBef>
+              <a:buFont typeface="Arial" pitchFamily="34" charset="0"/>
+              <a:buChar char="–"/>
+              <a:defRPr sz="2667" kern="1200">
+                <a:solidFill>
+                  <a:schemeClr val="tx1"/>
+                </a:solidFill>
+                <a:latin typeface="+mn-lt"/>
+                <a:ea typeface="+mn-ea"/>
+                <a:cs typeface="+mn-cs"/>
+              </a:defRPr>
+            </a:lvl4pPr>
+            <a:lvl5pPr marL="2743131" indent="-304792" algn="l" defTabSz="1219170" rtl="0" eaLnBrk="1" latinLnBrk="0" hangingPunct="1">
+              <a:spcBef>
+                <a:spcPct val="20000"/>
+              </a:spcBef>
+              <a:buFont typeface="Arial" pitchFamily="34" charset="0"/>
+              <a:buChar char="»"/>
+              <a:defRPr sz="2667" kern="1200">
+                <a:solidFill>
+                  <a:schemeClr val="tx1"/>
+                </a:solidFill>
+                <a:latin typeface="+mn-lt"/>
+                <a:ea typeface="+mn-ea"/>
+                <a:cs typeface="+mn-cs"/>
+              </a:defRPr>
+            </a:lvl5pPr>
+            <a:lvl6pPr marL="3352716" indent="-304792" algn="l" defTabSz="1219170" rtl="0" eaLnBrk="1" latinLnBrk="0" hangingPunct="1">
+              <a:spcBef>
+                <a:spcPct val="20000"/>
+              </a:spcBef>
+              <a:buFont typeface="Arial" pitchFamily="34" charset="0"/>
+              <a:buChar char="•"/>
+              <a:defRPr sz="2667" kern="1200">
+                <a:solidFill>
+                  <a:schemeClr val="tx1"/>
+                </a:solidFill>
+                <a:latin typeface="+mn-lt"/>
+                <a:ea typeface="+mn-ea"/>
+                <a:cs typeface="+mn-cs"/>
+              </a:defRPr>
+            </a:lvl6pPr>
+            <a:lvl7pPr marL="3962301" indent="-304792" algn="l" defTabSz="1219170" rtl="0" eaLnBrk="1" latinLnBrk="0" hangingPunct="1">
+              <a:spcBef>
+                <a:spcPct val="20000"/>
+              </a:spcBef>
+              <a:buFont typeface="Arial" pitchFamily="34" charset="0"/>
+              <a:buChar char="•"/>
+              <a:defRPr sz="2667" kern="1200">
+                <a:solidFill>
+                  <a:schemeClr val="tx1"/>
+                </a:solidFill>
+                <a:latin typeface="+mn-lt"/>
+                <a:ea typeface="+mn-ea"/>
+                <a:cs typeface="+mn-cs"/>
+              </a:defRPr>
+            </a:lvl7pPr>
+            <a:lvl8pPr marL="4571886" indent="-304792" algn="l" defTabSz="1219170" rtl="0" eaLnBrk="1" latinLnBrk="0" hangingPunct="1">
+              <a:spcBef>
+                <a:spcPct val="20000"/>
+              </a:spcBef>
+              <a:buFont typeface="Arial" pitchFamily="34" charset="0"/>
+              <a:buChar char="•"/>
+              <a:defRPr sz="2667" kern="1200">
+                <a:solidFill>
+                  <a:schemeClr val="tx1"/>
+                </a:solidFill>
+                <a:latin typeface="+mn-lt"/>
+                <a:ea typeface="+mn-ea"/>
+                <a:cs typeface="+mn-cs"/>
+              </a:defRPr>
+            </a:lvl8pPr>
+            <a:lvl9pPr marL="5181470" indent="-304792" algn="l" defTabSz="1219170" rtl="0" eaLnBrk="1" latinLnBrk="0" hangingPunct="1">
+              <a:spcBef>
+                <a:spcPct val="20000"/>
+              </a:spcBef>
+              <a:buFont typeface="Arial" pitchFamily="34" charset="0"/>
+              <a:buChar char="•"/>
+              <a:defRPr sz="2667" kern="1200">
+                <a:solidFill>
+                  <a:schemeClr val="tx1"/>
+                </a:solidFill>
+                <a:latin typeface="+mn-lt"/>
+                <a:ea typeface="+mn-ea"/>
+                <a:cs typeface="+mn-cs"/>
+              </a:defRPr>
+            </a:lvl9pPr>
+          </a:lstStyle>
+          <a:p>
+            <a:pPr marL="0" indent="0" algn="ctr">
+              <a:buNone/>
+            </a:pPr>
+            <a:r>
+              <a:rPr lang="en-US" sz="3307" b="1" dirty="0" err="1">
+                <a:solidFill>
+                  <a:srgbClr val="660033"/>
+                </a:solidFill>
+                <a:latin typeface="Times New Roman" panose="02020603050405020304" pitchFamily="18" charset="0"/>
+                <a:ea typeface="微軟正黑體" pitchFamily="34" charset="-120"/>
+                <a:cs typeface="Times New Roman" panose="02020603050405020304" pitchFamily="18" charset="0"/>
+              </a:rPr>
+              <a:t>Lòng</a:t>
+            </a:r>
+            <a:r>
+              <a:rPr lang="en-US" sz="3307" b="1" dirty="0">
+                <a:solidFill>
+                  <a:srgbClr val="660033"/>
+                </a:solidFill>
+                <a:latin typeface="Times New Roman" panose="02020603050405020304" pitchFamily="18" charset="0"/>
+                <a:ea typeface="微軟正黑體" pitchFamily="34" charset="-120"/>
+                <a:cs typeface="Times New Roman" panose="02020603050405020304" pitchFamily="18" charset="0"/>
+              </a:rPr>
+              <a:t> con </a:t>
+            </a:r>
+            <a:r>
+              <a:rPr lang="en-US" sz="3307" b="1" dirty="0" err="1">
+                <a:solidFill>
+                  <a:srgbClr val="660033"/>
+                </a:solidFill>
+                <a:latin typeface="Times New Roman" panose="02020603050405020304" pitchFamily="18" charset="0"/>
+                <a:ea typeface="微軟正黑體" pitchFamily="34" charset="-120"/>
+                <a:cs typeface="Times New Roman" panose="02020603050405020304" pitchFamily="18" charset="0"/>
+              </a:rPr>
+              <a:t>đây</a:t>
+            </a:r>
+            <a:r>
+              <a:rPr lang="en-US" sz="3307" b="1" dirty="0">
+                <a:solidFill>
+                  <a:srgbClr val="660033"/>
+                </a:solidFill>
+                <a:latin typeface="Times New Roman" panose="02020603050405020304" pitchFamily="18" charset="0"/>
+                <a:ea typeface="微軟正黑體" pitchFamily="34" charset="-120"/>
+                <a:cs typeface="Times New Roman" panose="02020603050405020304" pitchFamily="18" charset="0"/>
+              </a:rPr>
+              <a:t> </a:t>
+            </a:r>
+            <a:r>
+              <a:rPr lang="en-US" sz="3307" b="1" dirty="0" err="1">
+                <a:solidFill>
+                  <a:srgbClr val="660033"/>
+                </a:solidFill>
+                <a:latin typeface="Times New Roman" panose="02020603050405020304" pitchFamily="18" charset="0"/>
+                <a:ea typeface="微軟正黑體" pitchFamily="34" charset="-120"/>
+                <a:cs typeface="Times New Roman" panose="02020603050405020304" pitchFamily="18" charset="0"/>
+              </a:rPr>
+              <a:t>chỉ</a:t>
+            </a:r>
+            <a:r>
+              <a:rPr lang="en-US" sz="3307" b="1" dirty="0">
+                <a:solidFill>
+                  <a:srgbClr val="660033"/>
+                </a:solidFill>
+                <a:latin typeface="Times New Roman" panose="02020603050405020304" pitchFamily="18" charset="0"/>
+                <a:ea typeface="微軟正黑體" pitchFamily="34" charset="-120"/>
+                <a:cs typeface="Times New Roman" panose="02020603050405020304" pitchFamily="18" charset="0"/>
+              </a:rPr>
+              <a:t> </a:t>
+            </a:r>
+            <a:r>
+              <a:rPr lang="en-US" sz="3307" b="1" dirty="0" err="1">
+                <a:solidFill>
+                  <a:srgbClr val="660033"/>
+                </a:solidFill>
+                <a:latin typeface="Times New Roman" panose="02020603050405020304" pitchFamily="18" charset="0"/>
+                <a:ea typeface="微軟正黑體" pitchFamily="34" charset="-120"/>
+                <a:cs typeface="Times New Roman" panose="02020603050405020304" pitchFamily="18" charset="0"/>
+              </a:rPr>
+              <a:t>mong</a:t>
+            </a:r>
+            <a:r>
+              <a:rPr lang="en-US" sz="3307" b="1" dirty="0">
+                <a:solidFill>
+                  <a:srgbClr val="660033"/>
+                </a:solidFill>
+                <a:latin typeface="Times New Roman" panose="02020603050405020304" pitchFamily="18" charset="0"/>
+                <a:ea typeface="微軟正黑體" pitchFamily="34" charset="-120"/>
+                <a:cs typeface="Times New Roman" panose="02020603050405020304" pitchFamily="18" charset="0"/>
+              </a:rPr>
+              <a:t> </a:t>
+            </a:r>
+            <a:r>
+              <a:rPr lang="en-US" sz="3307" b="1" dirty="0" err="1">
+                <a:solidFill>
+                  <a:srgbClr val="660033"/>
+                </a:solidFill>
+                <a:latin typeface="Times New Roman" panose="02020603050405020304" pitchFamily="18" charset="0"/>
+                <a:ea typeface="微軟正黑體" pitchFamily="34" charset="-120"/>
+                <a:cs typeface="Times New Roman" panose="02020603050405020304" pitchFamily="18" charset="0"/>
+              </a:rPr>
+              <a:t>chờ</a:t>
+            </a:r>
+            <a:endParaRPr lang="en-US" sz="3307" b="1" dirty="0">
+              <a:solidFill>
+                <a:srgbClr val="660033"/>
+              </a:solidFill>
+              <a:latin typeface="Times New Roman" panose="02020603050405020304" pitchFamily="18" charset="0"/>
+              <a:ea typeface="微軟正黑體" pitchFamily="34" charset="-120"/>
+              <a:cs typeface="Times New Roman" panose="02020603050405020304" pitchFamily="18" charset="0"/>
+            </a:endParaRPr>
+          </a:p>
+        </p:txBody>
+      </p:sp>
+      <p:sp>
+        <p:nvSpPr>
+          <p:cNvPr id="8" name="TextBox 7">
+            <a:extLst>
+              <a:ext uri="{FF2B5EF4-FFF2-40B4-BE49-F238E27FC236}">
+                <a16:creationId xmlns:a16="http://schemas.microsoft.com/office/drawing/2014/main" id="{F8A4BD8C-51CD-EB55-D076-52B48DBC378D}"/>
+              </a:ext>
+            </a:extLst>
+          </p:cNvPr>
+          <p:cNvSpPr txBox="1"/>
+          <p:nvPr/>
+        </p:nvSpPr>
+        <p:spPr>
+          <a:xfrm>
+            <a:off x="-1" y="4343568"/>
+            <a:ext cx="10080625" cy="448584"/>
+          </a:xfrm>
+          <a:prstGeom prst="rect">
+            <a:avLst/>
+          </a:prstGeom>
+          <a:noFill/>
+        </p:spPr>
+        <p:txBody>
+          <a:bodyPr wrap="square" rtlCol="0">
+            <a:spAutoFit/>
+          </a:bodyPr>
+          <a:lstStyle/>
+          <a:p>
+            <a:pPr algn="ctr"/>
+            <a:r>
+              <a:rPr lang="en-US" sz="2315" b="1" dirty="0">
+                <a:solidFill>
+                  <a:srgbClr val="000066"/>
+                </a:solidFill>
+                <a:latin typeface="Microsoft JhengHei" panose="020B0604030504040204" pitchFamily="34" charset="-120"/>
+                <a:ea typeface="Microsoft JhengHei" panose="020B0604030504040204" pitchFamily="34" charset="-120"/>
+              </a:rPr>
+              <a:t>( </a:t>
+            </a:r>
+            <a:r>
+              <a:rPr lang="zh-CN" altLang="en-US" sz="2315" b="1" dirty="0">
+                <a:solidFill>
+                  <a:srgbClr val="000066"/>
+                </a:solidFill>
+                <a:latin typeface="Microsoft JhengHei" panose="020B0604030504040204" pitchFamily="34" charset="-120"/>
+                <a:ea typeface="Microsoft JhengHei" panose="020B0604030504040204" pitchFamily="34" charset="-120"/>
+              </a:rPr>
+              <a:t>副歌</a:t>
+            </a:r>
+            <a:r>
+              <a:rPr lang="en-US" sz="2315" b="1" dirty="0">
+                <a:solidFill>
+                  <a:srgbClr val="000066"/>
+                </a:solidFill>
+                <a:latin typeface="Microsoft JhengHei" panose="020B0604030504040204" pitchFamily="34" charset="-120"/>
+                <a:ea typeface="Microsoft JhengHei" panose="020B0604030504040204" pitchFamily="34" charset="-120"/>
+              </a:rPr>
+              <a:t> )</a:t>
+            </a:r>
+            <a:endParaRPr lang="vi-VN" sz="2315" b="1" dirty="0">
+              <a:solidFill>
+                <a:srgbClr val="000066"/>
+              </a:solidFill>
+              <a:ea typeface="Microsoft JhengHei" panose="020B0604030504040204" pitchFamily="34" charset="-120"/>
+            </a:endParaRPr>
+          </a:p>
+        </p:txBody>
+      </p:sp>
+    </p:spTree>
+    <p:extLst>
+      <p:ext uri="{BB962C8B-B14F-4D97-AF65-F5344CB8AC3E}">
+        <p14:creationId xmlns:p14="http://schemas.microsoft.com/office/powerpoint/2010/main" val="339417396"/>
+      </p:ext>
+    </p:extLst>
+  </p:cSld>
+  <p:clrMapOvr>
+    <a:masterClrMapping/>
+  </p:clrMapOvr>
+</p:sld>
+</file>
+
+<file path=ppt/slides/slide9.xml><?xml version="1.0" encoding="utf-8"?>
+<p:sld xmlns:a="http://schemas.openxmlformats.org/drawingml/2006/main" xmlns:r="http://schemas.openxmlformats.org/officeDocument/2006/relationships" xmlns:p="http://schemas.openxmlformats.org/presentationml/2006/main">
+  <p:cSld>
+    <p:spTree>
+      <p:nvGrpSpPr>
+        <p:cNvPr id="1" name="">
+          <a:extLst>
+            <a:ext uri="{FF2B5EF4-FFF2-40B4-BE49-F238E27FC236}">
+              <a16:creationId xmlns:a16="http://schemas.microsoft.com/office/drawing/2014/main" id="{DA44F7A5-1078-CF8B-19CF-B707E0EF3AE6}"/>
+            </a:ext>
+          </a:extLst>
+        </p:cNvPr>
+        <p:cNvGrpSpPr/>
+        <p:nvPr/>
+      </p:nvGrpSpPr>
+      <p:grpSpPr>
+        <a:xfrm>
+          <a:off x="0" y="0"/>
+          <a:ext cx="0" cy="0"/>
+          <a:chOff x="0" y="0"/>
+          <a:chExt cx="0" cy="0"/>
+        </a:xfrm>
+      </p:grpSpPr>
+      <p:sp>
+        <p:nvSpPr>
+          <p:cNvPr id="6" name="內容版面配置區 4">
+            <a:extLst>
+              <a:ext uri="{FF2B5EF4-FFF2-40B4-BE49-F238E27FC236}">
+                <a16:creationId xmlns:a16="http://schemas.microsoft.com/office/drawing/2014/main" id="{C0C4B3B1-EE34-1F9B-4647-5792116785E7}"/>
+              </a:ext>
+            </a:extLst>
+          </p:cNvPr>
+          <p:cNvSpPr>
+            <a:spLocks noGrp="1"/>
+          </p:cNvSpPr>
+          <p:nvPr>
+            <p:ph idx="1"/>
+          </p:nvPr>
+        </p:nvSpPr>
+        <p:spPr>
+          <a:xfrm>
+            <a:off x="-1" y="1767434"/>
+            <a:ext cx="10080625" cy="1089939"/>
+          </a:xfrm>
+        </p:spPr>
+        <p:txBody>
+          <a:bodyPr anchor="ctr">
+            <a:normAutofit/>
+          </a:bodyPr>
+          <a:lstStyle/>
+          <a:p>
+            <a:pPr algn="ctr">
+              <a:buNone/>
+            </a:pPr>
+            <a:r>
+              <a:rPr lang="zh-TW" altLang="en-US" sz="5400" b="1">
+                <a:solidFill>
+                  <a:srgbClr val="000066"/>
+                </a:solidFill>
+                <a:latin typeface="微軟正黑體" pitchFamily="34" charset="-120"/>
+                <a:ea typeface="微軟正黑體" pitchFamily="34" charset="-120"/>
+              </a:rPr>
+              <a:t>所愛  我</a:t>
+            </a:r>
+            <a:r>
+              <a:rPr lang="zh-TW" altLang="en-US" sz="5400" b="1" dirty="0">
+                <a:solidFill>
+                  <a:srgbClr val="000066"/>
+                </a:solidFill>
+                <a:latin typeface="微軟正黑體" pitchFamily="34" charset="-120"/>
+                <a:ea typeface="微軟正黑體" pitchFamily="34" charset="-120"/>
+              </a:rPr>
+              <a:t>渴慕來敬拜祢</a:t>
+            </a:r>
+          </a:p>
+        </p:txBody>
+      </p:sp>
+      <p:sp>
+        <p:nvSpPr>
+          <p:cNvPr id="7" name="內容版面配置區 4">
+            <a:extLst>
+              <a:ext uri="{FF2B5EF4-FFF2-40B4-BE49-F238E27FC236}">
+                <a16:creationId xmlns:a16="http://schemas.microsoft.com/office/drawing/2014/main" id="{E328026E-7DCC-51E5-1D90-B8BA4392C93F}"/>
+              </a:ext>
+            </a:extLst>
+          </p:cNvPr>
+          <p:cNvSpPr txBox="1">
+            <a:spLocks/>
+          </p:cNvSpPr>
+          <p:nvPr/>
+        </p:nvSpPr>
+        <p:spPr>
+          <a:xfrm>
+            <a:off x="-1" y="2552543"/>
+            <a:ext cx="10080625" cy="1089939"/>
+          </a:xfrm>
+          <a:prstGeom prst="rect">
+            <a:avLst/>
+          </a:prstGeom>
+        </p:spPr>
+        <p:txBody>
+          <a:bodyPr vert="horz" lIns="75605" tIns="37802" rIns="75605" bIns="37802" rtlCol="0" anchor="ctr">
+            <a:normAutofit/>
+          </a:bodyPr>
+          <a:lstStyle>
+            <a:lvl1pPr marL="457189" indent="-457189" algn="l" defTabSz="1219170" rtl="0" eaLnBrk="1" latinLnBrk="0" hangingPunct="1">
+              <a:spcBef>
+                <a:spcPct val="20000"/>
+              </a:spcBef>
+              <a:buFont typeface="Arial" pitchFamily="34" charset="0"/>
+              <a:buChar char="•"/>
+              <a:defRPr sz="4267" kern="1200">
+                <a:solidFill>
+                  <a:schemeClr val="tx1"/>
+                </a:solidFill>
+                <a:latin typeface="+mn-lt"/>
+                <a:ea typeface="+mn-ea"/>
+                <a:cs typeface="+mn-cs"/>
+              </a:defRPr>
+            </a:lvl1pPr>
+            <a:lvl2pPr marL="990575" indent="-380990" algn="l" defTabSz="1219170" rtl="0" eaLnBrk="1" latinLnBrk="0" hangingPunct="1">
+              <a:spcBef>
+                <a:spcPct val="20000"/>
+              </a:spcBef>
+              <a:buFont typeface="Arial" pitchFamily="34" charset="0"/>
+              <a:buChar char="–"/>
+              <a:defRPr sz="3733" kern="1200">
+                <a:solidFill>
+                  <a:schemeClr val="tx1"/>
+                </a:solidFill>
+                <a:latin typeface="+mn-lt"/>
+                <a:ea typeface="+mn-ea"/>
+                <a:cs typeface="+mn-cs"/>
+              </a:defRPr>
+            </a:lvl2pPr>
+            <a:lvl3pPr marL="1523962" indent="-304792" algn="l" defTabSz="1219170" rtl="0" eaLnBrk="1" latinLnBrk="0" hangingPunct="1">
+              <a:spcBef>
+                <a:spcPct val="20000"/>
+              </a:spcBef>
+              <a:buFont typeface="Arial" pitchFamily="34" charset="0"/>
+              <a:buChar char="•"/>
+              <a:defRPr sz="3200" kern="1200">
+                <a:solidFill>
+                  <a:schemeClr val="tx1"/>
+                </a:solidFill>
+                <a:latin typeface="+mn-lt"/>
+                <a:ea typeface="+mn-ea"/>
+                <a:cs typeface="+mn-cs"/>
+              </a:defRPr>
+            </a:lvl3pPr>
+            <a:lvl4pPr marL="2133547" indent="-304792" algn="l" defTabSz="1219170" rtl="0" eaLnBrk="1" latinLnBrk="0" hangingPunct="1">
+              <a:spcBef>
+                <a:spcPct val="20000"/>
+              </a:spcBef>
+              <a:buFont typeface="Arial" pitchFamily="34" charset="0"/>
+              <a:buChar char="–"/>
+              <a:defRPr sz="2667" kern="1200">
+                <a:solidFill>
+                  <a:schemeClr val="tx1"/>
+                </a:solidFill>
+                <a:latin typeface="+mn-lt"/>
+                <a:ea typeface="+mn-ea"/>
+                <a:cs typeface="+mn-cs"/>
+              </a:defRPr>
+            </a:lvl4pPr>
+            <a:lvl5pPr marL="2743131" indent="-304792" algn="l" defTabSz="1219170" rtl="0" eaLnBrk="1" latinLnBrk="0" hangingPunct="1">
+              <a:spcBef>
+                <a:spcPct val="20000"/>
+              </a:spcBef>
+              <a:buFont typeface="Arial" pitchFamily="34" charset="0"/>
+              <a:buChar char="»"/>
+              <a:defRPr sz="2667" kern="1200">
+                <a:solidFill>
+                  <a:schemeClr val="tx1"/>
+                </a:solidFill>
+                <a:latin typeface="+mn-lt"/>
+                <a:ea typeface="+mn-ea"/>
+                <a:cs typeface="+mn-cs"/>
+              </a:defRPr>
+            </a:lvl5pPr>
+            <a:lvl6pPr marL="3352716" indent="-304792" algn="l" defTabSz="1219170" rtl="0" eaLnBrk="1" latinLnBrk="0" hangingPunct="1">
+              <a:spcBef>
+                <a:spcPct val="20000"/>
+              </a:spcBef>
+              <a:buFont typeface="Arial" pitchFamily="34" charset="0"/>
+              <a:buChar char="•"/>
+              <a:defRPr sz="2667" kern="1200">
+                <a:solidFill>
+                  <a:schemeClr val="tx1"/>
+                </a:solidFill>
+                <a:latin typeface="+mn-lt"/>
+                <a:ea typeface="+mn-ea"/>
+                <a:cs typeface="+mn-cs"/>
+              </a:defRPr>
+            </a:lvl6pPr>
+            <a:lvl7pPr marL="3962301" indent="-304792" algn="l" defTabSz="1219170" rtl="0" eaLnBrk="1" latinLnBrk="0" hangingPunct="1">
+              <a:spcBef>
+                <a:spcPct val="20000"/>
+              </a:spcBef>
+              <a:buFont typeface="Arial" pitchFamily="34" charset="0"/>
+              <a:buChar char="•"/>
+              <a:defRPr sz="2667" kern="1200">
+                <a:solidFill>
+                  <a:schemeClr val="tx1"/>
+                </a:solidFill>
+                <a:latin typeface="+mn-lt"/>
+                <a:ea typeface="+mn-ea"/>
+                <a:cs typeface="+mn-cs"/>
+              </a:defRPr>
+            </a:lvl7pPr>
+            <a:lvl8pPr marL="4571886" indent="-304792" algn="l" defTabSz="1219170" rtl="0" eaLnBrk="1" latinLnBrk="0" hangingPunct="1">
+              <a:spcBef>
+                <a:spcPct val="20000"/>
+              </a:spcBef>
+              <a:buFont typeface="Arial" pitchFamily="34" charset="0"/>
+              <a:buChar char="•"/>
+              <a:defRPr sz="2667" kern="1200">
+                <a:solidFill>
+                  <a:schemeClr val="tx1"/>
+                </a:solidFill>
+                <a:latin typeface="+mn-lt"/>
+                <a:ea typeface="+mn-ea"/>
+                <a:cs typeface="+mn-cs"/>
+              </a:defRPr>
+            </a:lvl8pPr>
+            <a:lvl9pPr marL="5181470" indent="-304792" algn="l" defTabSz="1219170" rtl="0" eaLnBrk="1" latinLnBrk="0" hangingPunct="1">
+              <a:spcBef>
+                <a:spcPct val="20000"/>
+              </a:spcBef>
+              <a:buFont typeface="Arial" pitchFamily="34" charset="0"/>
+              <a:buChar char="•"/>
+              <a:defRPr sz="2667" kern="1200">
+                <a:solidFill>
+                  <a:schemeClr val="tx1"/>
+                </a:solidFill>
+                <a:latin typeface="+mn-lt"/>
+                <a:ea typeface="+mn-ea"/>
+                <a:cs typeface="+mn-cs"/>
+              </a:defRPr>
+            </a:lvl9pPr>
+          </a:lstStyle>
+          <a:p>
+            <a:pPr marL="0" indent="0" algn="ctr">
+              <a:buNone/>
+            </a:pPr>
+            <a:r>
+              <a:rPr lang="vi-VN" sz="3307" b="1" dirty="0">
+                <a:solidFill>
+                  <a:srgbClr val="660033"/>
+                </a:solidFill>
+                <a:latin typeface="Times New Roman" panose="02020603050405020304" pitchFamily="18" charset="0"/>
+                <a:ea typeface="微軟正黑體" pitchFamily="34" charset="-120"/>
+                <a:cs typeface="Times New Roman" panose="02020603050405020304" pitchFamily="18" charset="0"/>
+              </a:rPr>
+              <a:t>Được đến bên Cha và thờ kính Cha đời đời</a:t>
+            </a:r>
+          </a:p>
+        </p:txBody>
+      </p:sp>
+      <p:sp>
+        <p:nvSpPr>
+          <p:cNvPr id="8" name="TextBox 7">
+            <a:extLst>
+              <a:ext uri="{FF2B5EF4-FFF2-40B4-BE49-F238E27FC236}">
+                <a16:creationId xmlns:a16="http://schemas.microsoft.com/office/drawing/2014/main" id="{D397232C-0C7A-1875-A49C-13357872D812}"/>
+              </a:ext>
+            </a:extLst>
+          </p:cNvPr>
+          <p:cNvSpPr txBox="1"/>
+          <p:nvPr/>
+        </p:nvSpPr>
+        <p:spPr>
+          <a:xfrm>
+            <a:off x="-1" y="4343568"/>
+            <a:ext cx="10080625" cy="448584"/>
+          </a:xfrm>
+          <a:prstGeom prst="rect">
+            <a:avLst/>
+          </a:prstGeom>
+          <a:noFill/>
+        </p:spPr>
+        <p:txBody>
+          <a:bodyPr wrap="square" rtlCol="0">
+            <a:spAutoFit/>
+          </a:bodyPr>
+          <a:lstStyle/>
+          <a:p>
+            <a:pPr algn="ctr"/>
+            <a:r>
+              <a:rPr lang="en-US" sz="2315" b="1" dirty="0">
+                <a:solidFill>
+                  <a:srgbClr val="000066"/>
+                </a:solidFill>
+                <a:latin typeface="Microsoft JhengHei" panose="020B0604030504040204" pitchFamily="34" charset="-120"/>
+                <a:ea typeface="Microsoft JhengHei" panose="020B0604030504040204" pitchFamily="34" charset="-120"/>
+              </a:rPr>
+              <a:t>( </a:t>
+            </a:r>
+            <a:r>
+              <a:rPr lang="zh-CN" altLang="en-US" sz="2315" b="1" dirty="0">
+                <a:solidFill>
+                  <a:srgbClr val="000066"/>
+                </a:solidFill>
+                <a:latin typeface="Microsoft JhengHei" panose="020B0604030504040204" pitchFamily="34" charset="-120"/>
+                <a:ea typeface="Microsoft JhengHei" panose="020B0604030504040204" pitchFamily="34" charset="-120"/>
+              </a:rPr>
+              <a:t>副歌</a:t>
+            </a:r>
+            <a:r>
+              <a:rPr lang="en-US" sz="2315" b="1" dirty="0">
+                <a:solidFill>
+                  <a:srgbClr val="000066"/>
+                </a:solidFill>
+                <a:latin typeface="Microsoft JhengHei" panose="020B0604030504040204" pitchFamily="34" charset="-120"/>
+                <a:ea typeface="Microsoft JhengHei" panose="020B0604030504040204" pitchFamily="34" charset="-120"/>
+              </a:rPr>
+              <a:t> )</a:t>
+            </a:r>
+            <a:endParaRPr lang="vi-VN" sz="2315" b="1" dirty="0">
+              <a:solidFill>
+                <a:srgbClr val="000066"/>
+              </a:solidFill>
+              <a:ea typeface="Microsoft JhengHei" panose="020B0604030504040204" pitchFamily="34" charset="-120"/>
+            </a:endParaRPr>
+          </a:p>
+        </p:txBody>
+      </p:sp>
+    </p:spTree>
+    <p:extLst>
+      <p:ext uri="{BB962C8B-B14F-4D97-AF65-F5344CB8AC3E}">
+        <p14:creationId xmlns:p14="http://schemas.microsoft.com/office/powerpoint/2010/main" val="2252116427"/>
+      </p:ext>
+    </p:extLst>
+  </p:cSld>
+  <p:clrMapOvr>
+    <a:masterClrMapping/>
+  </p:clrMapOvr>
 </p:sld>
 </file>
 

--- a/中越詩歌/如鹿切慕在溪水_Khát khao dòng nước.pptx
+++ b/中越詩歌/如鹿切慕在溪水_Khát khao dòng nước.pptx
@@ -3417,7 +3417,27 @@
                 <a:latin typeface="微軟正黑體" pitchFamily="34" charset="-120"/>
                 <a:ea typeface="微軟正黑體" pitchFamily="34" charset="-120"/>
               </a:rPr>
-              <a:t>神啊  我的心切慕祢</a:t>
+              <a:t>神啊  我的心</a:t>
+            </a:r>
+            <a:r>
+              <a:rPr lang="zh-TW" altLang="en-US" sz="5400" b="1" dirty="0" smtClean="0">
+                <a:solidFill>
+                  <a:srgbClr val="000066"/>
+                </a:solidFill>
+                <a:latin typeface="微軟正黑體" pitchFamily="34" charset="-120"/>
+                <a:ea typeface="微軟正黑體" pitchFamily="34" charset="-120"/>
+              </a:rPr>
+              <a:t>切</a:t>
+            </a:r>
+            <a:r>
+              <a:rPr lang="en-US" altLang="zh-TW" sz="5400" b="1" dirty="0" smtClean="0">
+                <a:solidFill>
+                  <a:srgbClr val="000066"/>
+                </a:solidFill>
+                <a:latin typeface="微軟正黑體" pitchFamily="34" charset="-120"/>
+                <a:ea typeface="微軟正黑體" pitchFamily="34" charset="-120"/>
+              </a:rPr>
+              <a:t>…</a:t>
             </a:r>
             <a:endParaRPr lang="en-US" altLang="zh-TW" sz="5400" b="1" dirty="0">
               <a:solidFill>
@@ -3600,7 +3620,29 @@
                 <a:ea typeface="微軟正黑體" pitchFamily="34" charset="-120"/>
                 <a:cs typeface="Calibri" panose="020F0502020204030204" pitchFamily="34" charset="0"/>
               </a:rPr>
-              <a:t>Nhìn nai kia khát khao dòng nước mát</a:t>
+              <a:t>Nhìn nai kia khát khao </a:t>
+            </a:r>
+            <a:r>
+              <a:rPr lang="vi-VN" sz="3307" b="1" dirty="0" smtClean="0">
+                <a:solidFill>
+                  <a:srgbClr val="660033"/>
+                </a:solidFill>
+                <a:latin typeface="+mj-lt"/>
+                <a:ea typeface="微軟正黑體" pitchFamily="34" charset="-120"/>
+                <a:cs typeface="Calibri" panose="020F0502020204030204" pitchFamily="34" charset="0"/>
+              </a:rPr>
+              <a:t>dòng</a:t>
+            </a:r>
+            <a:r>
+              <a:rPr lang="en-US" sz="3307" b="1" dirty="0" smtClean="0">
+                <a:solidFill>
+                  <a:srgbClr val="660033"/>
+                </a:solidFill>
+                <a:latin typeface="+mj-lt"/>
+                <a:ea typeface="微軟正黑體" pitchFamily="34" charset="-120"/>
+                <a:cs typeface="Calibri" panose="020F0502020204030204" pitchFamily="34" charset="0"/>
+              </a:rPr>
+              <a:t>…</a:t>
             </a:r>
             <a:endParaRPr lang="en-US" sz="3307" b="1" dirty="0">
               <a:solidFill>
@@ -3743,14 +3785,34 @@
               <a:buNone/>
             </a:pPr>
             <a:r>
-              <a:rPr lang="zh-TW" altLang="en-US" sz="5400" b="1" dirty="0">
+              <a:rPr lang="en-US" altLang="zh-TW" sz="5400" b="1" dirty="0" smtClean="0">
                 <a:solidFill>
                   <a:srgbClr val="000066"/>
                 </a:solidFill>
                 <a:latin typeface="微軟正黑體" pitchFamily="34" charset="-120"/>
                 <a:ea typeface="微軟正黑體" pitchFamily="34" charset="-120"/>
               </a:rPr>
-              <a:t>如鹿切慕溪水</a:t>
+              <a:t>…</a:t>
+            </a:r>
+            <a:r>
+              <a:rPr lang="zh-TW" altLang="en-US" sz="5400" b="1" dirty="0" smtClean="0">
+                <a:solidFill>
+                  <a:srgbClr val="000066"/>
+                </a:solidFill>
+                <a:latin typeface="微軟正黑體" pitchFamily="34" charset="-120"/>
+                <a:ea typeface="微軟正黑體" pitchFamily="34" charset="-120"/>
+              </a:rPr>
+              <a:t>慕祢  如</a:t>
+            </a:r>
+            <a:r>
+              <a:rPr lang="zh-TW" altLang="en-US" sz="5400" b="1" dirty="0">
+                <a:solidFill>
+                  <a:srgbClr val="000066"/>
+                </a:solidFill>
+                <a:latin typeface="微軟正黑體" pitchFamily="34" charset="-120"/>
+                <a:ea typeface="微軟正黑體" pitchFamily="34" charset="-120"/>
+              </a:rPr>
+              <a:t>鹿切慕溪水</a:t>
             </a:r>
           </a:p>
         </p:txBody>
@@ -3924,7 +3986,7 @@
               <a:buNone/>
             </a:pPr>
             <a:r>
-              <a:rPr lang="vi-VN" sz="3307" b="1" dirty="0">
+              <a:rPr lang="en-US" sz="3000" b="1" dirty="0" smtClean="0">
                 <a:solidFill>
                   <a:srgbClr val="660033"/>
                 </a:solidFill>
@@ -3932,7 +3994,62 @@
                 <a:ea typeface="微軟正黑體" pitchFamily="34" charset="-120"/>
                 <a:cs typeface="Calibri" panose="020F0502020204030204" pitchFamily="34" charset="0"/>
               </a:rPr>
-              <a:t>Như con thèm khát chính Chúa Cha toàn năng</a:t>
+              <a:t>…</a:t>
+            </a:r>
+            <a:r>
+              <a:rPr lang="vi-VN" sz="3000" b="1" dirty="0" smtClean="0">
+                <a:solidFill>
+                  <a:srgbClr val="660033"/>
+                </a:solidFill>
+                <a:latin typeface="+mj-lt"/>
+                <a:ea typeface="微軟正黑體" pitchFamily="34" charset="-120"/>
+                <a:cs typeface="Calibri" panose="020F0502020204030204" pitchFamily="34" charset="0"/>
+              </a:rPr>
+              <a:t>nước mát</a:t>
+            </a:r>
+            <a:r>
+              <a:rPr lang="en-US" sz="3000" b="1" dirty="0" smtClean="0">
+                <a:solidFill>
+                  <a:srgbClr val="660033"/>
+                </a:solidFill>
+                <a:latin typeface="+mj-lt"/>
+                <a:ea typeface="微軟正黑體" pitchFamily="34" charset="-120"/>
+                <a:cs typeface="Calibri" panose="020F0502020204030204" pitchFamily="34" charset="0"/>
+              </a:rPr>
+              <a:t>, </a:t>
+            </a:r>
+            <a:r>
+              <a:rPr lang="en-US" sz="3000" b="1" dirty="0" smtClean="0">
+                <a:solidFill>
+                  <a:srgbClr val="660033"/>
+                </a:solidFill>
+                <a:latin typeface="Times New Roman" panose="02020603050405020304" pitchFamily="18" charset="0"/>
+                <a:ea typeface="微軟正黑體" pitchFamily="34" charset="-120"/>
+                <a:cs typeface="Times New Roman" panose="02020603050405020304" pitchFamily="18" charset="0"/>
+              </a:rPr>
+              <a:t>n</a:t>
+            </a:r>
+            <a:r>
+              <a:rPr lang="vi-VN" sz="3000" b="1" dirty="0" smtClean="0">
+                <a:solidFill>
+                  <a:srgbClr val="660033"/>
+                </a:solidFill>
+                <a:latin typeface="+mj-lt"/>
+                <a:ea typeface="微軟正黑體" pitchFamily="34" charset="-120"/>
+                <a:cs typeface="Calibri" panose="020F0502020204030204" pitchFamily="34" charset="0"/>
+              </a:rPr>
+              <a:t>hư </a:t>
+            </a:r>
+            <a:r>
+              <a:rPr lang="vi-VN" sz="3000" b="1" dirty="0">
+                <a:solidFill>
+                  <a:srgbClr val="660033"/>
+                </a:solidFill>
+                <a:latin typeface="+mj-lt"/>
+                <a:ea typeface="微軟正黑體" pitchFamily="34" charset="-120"/>
+                <a:cs typeface="Calibri" panose="020F0502020204030204" pitchFamily="34" charset="0"/>
+              </a:rPr>
+              <a:t>con thèm khát chính Chúa Cha toàn năng</a:t>
             </a:r>
           </a:p>
         </p:txBody>
@@ -4080,8 +4197,35 @@
                 <a:latin typeface="微軟正黑體" pitchFamily="34" charset="-120"/>
                 <a:ea typeface="微軟正黑體" pitchFamily="34" charset="-120"/>
               </a:rPr>
-              <a:t>惟有祢是我心</a:t>
-            </a:r>
+              <a:t>惟有祢是我</a:t>
+            </a:r>
+            <a:r>
+              <a:rPr lang="zh-TW" altLang="en-US" sz="5400" b="1" dirty="0" smtClean="0">
+                <a:solidFill>
+                  <a:srgbClr val="000066"/>
+                </a:solidFill>
+                <a:latin typeface="微軟正黑體" pitchFamily="34" charset="-120"/>
+                <a:ea typeface="微軟正黑體" pitchFamily="34" charset="-120"/>
+              </a:rPr>
+              <a:t>心</a:t>
+            </a:r>
+            <a:r>
+              <a:rPr lang="en-US" altLang="zh-TW" sz="5400" b="1" dirty="0" smtClean="0">
+                <a:solidFill>
+                  <a:srgbClr val="000066"/>
+                </a:solidFill>
+                <a:latin typeface="微軟正黑體" pitchFamily="34" charset="-120"/>
+                <a:ea typeface="微軟正黑體" pitchFamily="34" charset="-120"/>
+              </a:rPr>
+              <a:t>…</a:t>
+            </a:r>
+            <a:endParaRPr lang="zh-TW" altLang="en-US" sz="5400" b="1" dirty="0">
+              <a:solidFill>
+                <a:srgbClr val="000066"/>
+              </a:solidFill>
+              <a:latin typeface="微軟正黑體" pitchFamily="34" charset="-120"/>
+              <a:ea typeface="微軟正黑體" pitchFamily="34" charset="-120"/>
+            </a:endParaRPr>
           </a:p>
         </p:txBody>
       </p:sp>
@@ -4499,14 +4643,34 @@
               <a:buNone/>
             </a:pPr>
             <a:r>
-              <a:rPr lang="zh-TW" altLang="en-US" sz="5400" b="1" dirty="0">
+              <a:rPr lang="en-US" altLang="zh-TW" sz="5400" b="1" dirty="0" smtClean="0">
                 <a:solidFill>
                   <a:srgbClr val="000066"/>
                 </a:solidFill>
                 <a:latin typeface="微軟正黑體" pitchFamily="34" charset="-120"/>
                 <a:ea typeface="微軟正黑體" pitchFamily="34" charset="-120"/>
               </a:rPr>
-              <a:t>所愛</a:t>
+              <a:t>…</a:t>
+            </a:r>
+            <a:r>
+              <a:rPr lang="zh-TW" altLang="en-US" sz="5400" b="1" dirty="0" smtClean="0">
+                <a:solidFill>
+                  <a:srgbClr val="000066"/>
+                </a:solidFill>
+                <a:latin typeface="微軟正黑體" pitchFamily="34" charset="-120"/>
+                <a:ea typeface="微軟正黑體" pitchFamily="34" charset="-120"/>
+              </a:rPr>
+              <a:t>所</a:t>
+            </a:r>
+            <a:r>
+              <a:rPr lang="zh-TW" altLang="en-US" sz="5400" b="1" dirty="0">
+                <a:solidFill>
+                  <a:srgbClr val="000066"/>
+                </a:solidFill>
+                <a:latin typeface="微軟正黑體" pitchFamily="34" charset="-120"/>
+                <a:ea typeface="微軟正黑體" pitchFamily="34" charset="-120"/>
+              </a:rPr>
+              <a:t>愛</a:t>
             </a:r>
             <a:r>
               <a:rPr lang="en-US" altLang="zh-TW" sz="5400" b="1" dirty="0">
@@ -5523,8 +5687,35 @@
                 <a:latin typeface="微軟正黑體" pitchFamily="34" charset="-120"/>
                 <a:ea typeface="微軟正黑體" pitchFamily="34" charset="-120"/>
               </a:rPr>
-              <a:t>惟有祢是我心</a:t>
-            </a:r>
+              <a:t>惟有祢是我</a:t>
+            </a:r>
+            <a:r>
+              <a:rPr lang="zh-TW" altLang="en-US" sz="5400" b="1" dirty="0" smtClean="0">
+                <a:solidFill>
+                  <a:srgbClr val="000066"/>
+                </a:solidFill>
+                <a:latin typeface="微軟正黑體" pitchFamily="34" charset="-120"/>
+                <a:ea typeface="微軟正黑體" pitchFamily="34" charset="-120"/>
+              </a:rPr>
+              <a:t>心</a:t>
+            </a:r>
+            <a:r>
+              <a:rPr lang="en-US" altLang="zh-TW" sz="5400" b="1" dirty="0" smtClean="0">
+                <a:solidFill>
+                  <a:srgbClr val="000066"/>
+                </a:solidFill>
+                <a:latin typeface="微軟正黑體" pitchFamily="34" charset="-120"/>
+                <a:ea typeface="微軟正黑體" pitchFamily="34" charset="-120"/>
+              </a:rPr>
+              <a:t>…</a:t>
+            </a:r>
+            <a:endParaRPr lang="zh-TW" altLang="en-US" sz="5400" b="1" dirty="0">
+              <a:solidFill>
+                <a:srgbClr val="000066"/>
+              </a:solidFill>
+              <a:latin typeface="微軟正黑體" pitchFamily="34" charset="-120"/>
+              <a:ea typeface="微軟正黑體" pitchFamily="34" charset="-120"/>
+            </a:endParaRPr>
           </a:p>
         </p:txBody>
       </p:sp>
@@ -5942,24 +6133,34 @@
               <a:buNone/>
             </a:pPr>
             <a:r>
-              <a:rPr lang="zh-TW" altLang="en-US" sz="5400" b="1">
+              <a:rPr lang="en-US" altLang="zh-TW" sz="5400" b="1" dirty="0" smtClean="0">
                 <a:solidFill>
                   <a:srgbClr val="000066"/>
                 </a:solidFill>
                 <a:latin typeface="微軟正黑體" pitchFamily="34" charset="-120"/>
                 <a:ea typeface="微軟正黑體" pitchFamily="34" charset="-120"/>
               </a:rPr>
-              <a:t>所愛  我</a:t>
-            </a:r>
-            <a:r>
-              <a:rPr lang="zh-TW" altLang="en-US" sz="5400" b="1" dirty="0">
+              <a:t>…</a:t>
+            </a:r>
+            <a:r>
+              <a:rPr lang="zh-TW" altLang="en-US" sz="5400" b="1" dirty="0" smtClean="0">
                 <a:solidFill>
                   <a:srgbClr val="000066"/>
                 </a:solidFill>
                 <a:latin typeface="微軟正黑體" pitchFamily="34" charset="-120"/>
                 <a:ea typeface="微軟正黑體" pitchFamily="34" charset="-120"/>
               </a:rPr>
-              <a:t>渴慕來敬拜祢</a:t>
+              <a:t>所</a:t>
+            </a:r>
+            <a:r>
+              <a:rPr lang="zh-TW" altLang="en-US" sz="5400" b="1" dirty="0">
+                <a:solidFill>
+                  <a:srgbClr val="000066"/>
+                </a:solidFill>
+                <a:latin typeface="微軟正黑體" pitchFamily="34" charset="-120"/>
+                <a:ea typeface="微軟正黑體" pitchFamily="34" charset="-120"/>
+              </a:rPr>
+              <a:t>愛  我渴慕來敬拜祢</a:t>
             </a:r>
           </a:p>
         </p:txBody>
